--- a/Веб-приложение для оценки риска заболеваний.pptx
+++ b/Веб-приложение для оценки риска заболеваний.pptx
@@ -309,7 +309,7 @@
           <a:p>
             <a:fld id="{5BCAD085-E8A6-8845-BD4E-CB4CCA059FC4}" type="datetimeFigureOut">
               <a:rPr lang="en-US" smtClean="0"/>
-              <a:t>5/13/2026</a:t>
+              <a:t>5/25/2026</a:t>
             </a:fld>
             <a:endParaRPr lang="en-US" dirty="0"/>
           </a:p>
@@ -477,7 +477,7 @@
           <a:p>
             <a:fld id="{5BCAD085-E8A6-8845-BD4E-CB4CCA059FC4}" type="datetimeFigureOut">
               <a:rPr lang="en-US" smtClean="0"/>
-              <a:t>5/13/2026</a:t>
+              <a:t>5/25/2026</a:t>
             </a:fld>
             <a:endParaRPr lang="en-US" dirty="0"/>
           </a:p>
@@ -655,7 +655,7 @@
           <a:p>
             <a:fld id="{5BCAD085-E8A6-8845-BD4E-CB4CCA059FC4}" type="datetimeFigureOut">
               <a:rPr lang="en-US" smtClean="0"/>
-              <a:t>5/13/2026</a:t>
+              <a:t>5/25/2026</a:t>
             </a:fld>
             <a:endParaRPr lang="en-US" dirty="0"/>
           </a:p>
@@ -823,7 +823,7 @@
           <a:p>
             <a:fld id="{5BCAD085-E8A6-8845-BD4E-CB4CCA059FC4}" type="datetimeFigureOut">
               <a:rPr lang="en-US" smtClean="0"/>
-              <a:t>5/13/2026</a:t>
+              <a:t>5/25/2026</a:t>
             </a:fld>
             <a:endParaRPr lang="en-US" dirty="0"/>
           </a:p>
@@ -1068,7 +1068,7 @@
           <a:p>
             <a:fld id="{5BCAD085-E8A6-8845-BD4E-CB4CCA059FC4}" type="datetimeFigureOut">
               <a:rPr lang="en-US" smtClean="0"/>
-              <a:t>5/13/2026</a:t>
+              <a:t>5/25/2026</a:t>
             </a:fld>
             <a:endParaRPr lang="en-US" dirty="0"/>
           </a:p>
@@ -1353,7 +1353,7 @@
           <a:p>
             <a:fld id="{5BCAD085-E8A6-8845-BD4E-CB4CCA059FC4}" type="datetimeFigureOut">
               <a:rPr lang="en-US" smtClean="0"/>
-              <a:t>5/13/2026</a:t>
+              <a:t>5/25/2026</a:t>
             </a:fld>
             <a:endParaRPr lang="en-US" dirty="0"/>
           </a:p>
@@ -1772,7 +1772,7 @@
           <a:p>
             <a:fld id="{5BCAD085-E8A6-8845-BD4E-CB4CCA059FC4}" type="datetimeFigureOut">
               <a:rPr lang="en-US" smtClean="0"/>
-              <a:t>5/13/2026</a:t>
+              <a:t>5/25/2026</a:t>
             </a:fld>
             <a:endParaRPr lang="en-US" dirty="0"/>
           </a:p>
@@ -1889,7 +1889,7 @@
           <a:p>
             <a:fld id="{5BCAD085-E8A6-8845-BD4E-CB4CCA059FC4}" type="datetimeFigureOut">
               <a:rPr lang="en-US" smtClean="0"/>
-              <a:t>5/13/2026</a:t>
+              <a:t>5/25/2026</a:t>
             </a:fld>
             <a:endParaRPr lang="en-US" dirty="0"/>
           </a:p>
@@ -1984,7 +1984,7 @@
           <a:p>
             <a:fld id="{5BCAD085-E8A6-8845-BD4E-CB4CCA059FC4}" type="datetimeFigureOut">
               <a:rPr lang="en-US" smtClean="0"/>
-              <a:t>5/13/2026</a:t>
+              <a:t>5/25/2026</a:t>
             </a:fld>
             <a:endParaRPr lang="en-US" dirty="0"/>
           </a:p>
@@ -2259,7 +2259,7 @@
           <a:p>
             <a:fld id="{5BCAD085-E8A6-8845-BD4E-CB4CCA059FC4}" type="datetimeFigureOut">
               <a:rPr lang="en-US" smtClean="0"/>
-              <a:t>5/13/2026</a:t>
+              <a:t>5/25/2026</a:t>
             </a:fld>
             <a:endParaRPr lang="en-US" dirty="0"/>
           </a:p>
@@ -2511,7 +2511,7 @@
           <a:p>
             <a:fld id="{5BCAD085-E8A6-8845-BD4E-CB4CCA059FC4}" type="datetimeFigureOut">
               <a:rPr lang="en-US" smtClean="0"/>
-              <a:t>5/13/2026</a:t>
+              <a:t>5/25/2026</a:t>
             </a:fld>
             <a:endParaRPr lang="en-US" dirty="0"/>
           </a:p>
@@ -2722,7 +2722,7 @@
           <a:p>
             <a:fld id="{5BCAD085-E8A6-8845-BD4E-CB4CCA059FC4}" type="datetimeFigureOut">
               <a:rPr lang="en-US" smtClean="0"/>
-              <a:t>5/13/2026</a:t>
+              <a:t>5/25/2026</a:t>
             </a:fld>
             <a:endParaRPr lang="en-US" dirty="0"/>
           </a:p>
@@ -3428,8 +3428,8 @@
         </p:nvSpPr>
         <p:spPr>
           <a:xfrm>
-            <a:off x="9267593" y="1123949"/>
-            <a:ext cx="1609684" cy="228600"/>
+            <a:off x="9267593" y="1087696"/>
+            <a:ext cx="1664174" cy="301108"/>
           </a:xfrm>
           <a:prstGeom prst="rect">
             <a:avLst/>
@@ -3454,7 +3454,7 @@
               </a:spcAft>
             </a:pPr>
             <a:r>
-              <a:rPr sz="956" b="0" dirty="0" err="1">
+              <a:rPr sz="1100" b="0" dirty="0" err="1">
                 <a:solidFill>
                   <a:srgbClr val="FFFFFF"/>
                 </a:solidFill>
@@ -3462,7 +3462,7 @@
               </a:rPr>
               <a:t>Сердечно-сосудистые</a:t>
             </a:r>
-            <a:endParaRPr sz="956" b="0" dirty="0">
+            <a:endParaRPr sz="1100" b="0" dirty="0">
               <a:solidFill>
                 <a:srgbClr val="FFFFFF"/>
               </a:solidFill>
@@ -3479,8 +3479,8 @@
         </p:nvSpPr>
         <p:spPr>
           <a:xfrm>
-            <a:off x="9267593" y="1352549"/>
-            <a:ext cx="1609684" cy="190499"/>
+            <a:off x="9267593" y="1309044"/>
+            <a:ext cx="1047018" cy="277512"/>
           </a:xfrm>
           <a:prstGeom prst="rect">
             <a:avLst/>
@@ -3505,7 +3505,7 @@
               </a:spcAft>
             </a:pPr>
             <a:r>
-              <a:rPr sz="837" b="0" dirty="0" err="1">
+              <a:rPr sz="1100" b="0" dirty="0" err="1">
                 <a:solidFill>
                   <a:srgbClr val="D1D5DB"/>
                 </a:solidFill>
@@ -3513,7 +3513,7 @@
               </a:rPr>
               <a:t>заболевания</a:t>
             </a:r>
-            <a:endParaRPr sz="837" b="0" dirty="0">
+            <a:endParaRPr sz="1100" b="0" dirty="0">
               <a:solidFill>
                 <a:srgbClr val="D1D5DB"/>
               </a:solidFill>
@@ -3606,8 +3606,8 @@
         </p:nvSpPr>
         <p:spPr>
           <a:xfrm>
-            <a:off x="9267593" y="2171700"/>
-            <a:ext cx="790555" cy="228600"/>
+            <a:off x="9267593" y="2135447"/>
+            <a:ext cx="888320" cy="301108"/>
           </a:xfrm>
           <a:prstGeom prst="rect">
             <a:avLst/>
@@ -3632,7 +3632,7 @@
               </a:spcAft>
             </a:pPr>
             <a:r>
-              <a:rPr sz="956" b="0" dirty="0" err="1">
+              <a:rPr sz="1100" b="0" dirty="0" err="1">
                 <a:solidFill>
                   <a:srgbClr val="FFFFFF"/>
                 </a:solidFill>
@@ -3641,7 +3641,7 @@
               <a:t>Рак</a:t>
             </a:r>
             <a:r>
-              <a:rPr sz="956" b="0" dirty="0">
+              <a:rPr sz="1100" b="0" dirty="0">
                 <a:solidFill>
                   <a:srgbClr val="FFFFFF"/>
                 </a:solidFill>
@@ -3650,7 +3650,7 @@
               <a:t> </a:t>
             </a:r>
             <a:r>
-              <a:rPr sz="956" b="0" dirty="0" err="1">
+              <a:rPr sz="1100" b="0" dirty="0" err="1">
                 <a:solidFill>
                   <a:srgbClr val="FFFFFF"/>
                 </a:solidFill>
@@ -3658,7 +3658,7 @@
               </a:rPr>
               <a:t>лёгких</a:t>
             </a:r>
-            <a:endParaRPr sz="956" b="0" dirty="0">
+            <a:endParaRPr sz="1100" b="0" dirty="0">
               <a:solidFill>
                 <a:srgbClr val="FFFFFF"/>
               </a:solidFill>
@@ -3675,8 +3675,8 @@
         </p:nvSpPr>
         <p:spPr>
           <a:xfrm>
-            <a:off x="9267593" y="2400300"/>
-            <a:ext cx="790555" cy="190499"/>
+            <a:off x="9267593" y="2356795"/>
+            <a:ext cx="880306" cy="277512"/>
           </a:xfrm>
           <a:prstGeom prst="rect">
             <a:avLst/>
@@ -3701,7 +3701,7 @@
               </a:spcAft>
             </a:pPr>
             <a:r>
-              <a:rPr sz="837" b="0" dirty="0" err="1">
+              <a:rPr sz="1100" b="0" dirty="0" err="1">
                 <a:solidFill>
                   <a:srgbClr val="D1D5DB"/>
                 </a:solidFill>
@@ -3709,7 +3709,7 @@
               </a:rPr>
               <a:t>онкология</a:t>
             </a:r>
-            <a:endParaRPr sz="837" b="0" dirty="0">
+            <a:endParaRPr sz="1100" b="0" dirty="0">
               <a:solidFill>
                 <a:srgbClr val="D1D5DB"/>
               </a:solidFill>
@@ -3802,8 +3802,8 @@
         </p:nvSpPr>
         <p:spPr>
           <a:xfrm>
-            <a:off x="9267593" y="3219449"/>
-            <a:ext cx="1057248" cy="228600"/>
+            <a:off x="9267593" y="3183196"/>
+            <a:ext cx="1139992" cy="301108"/>
           </a:xfrm>
           <a:prstGeom prst="rect">
             <a:avLst/>
@@ -3828,7 +3828,7 @@
               </a:spcAft>
             </a:pPr>
             <a:r>
-              <a:rPr sz="956" b="0" dirty="0" err="1">
+              <a:rPr sz="1100" b="0" dirty="0" err="1">
                 <a:solidFill>
                   <a:srgbClr val="FFFFFF"/>
                 </a:solidFill>
@@ -3836,7 +3836,7 @@
               </a:rPr>
               <a:t>Артериальная</a:t>
             </a:r>
-            <a:endParaRPr sz="956" b="0" dirty="0">
+            <a:endParaRPr sz="1100" b="0" dirty="0">
               <a:solidFill>
                 <a:srgbClr val="FFFFFF"/>
               </a:solidFill>
@@ -3853,8 +3853,8 @@
         </p:nvSpPr>
         <p:spPr>
           <a:xfrm>
-            <a:off x="9267593" y="3448049"/>
-            <a:ext cx="1057248" cy="190499"/>
+            <a:off x="9267593" y="3404544"/>
+            <a:ext cx="1030988" cy="277512"/>
           </a:xfrm>
           <a:prstGeom prst="rect">
             <a:avLst/>
@@ -3879,7 +3879,7 @@
               </a:spcAft>
             </a:pPr>
             <a:r>
-              <a:rPr sz="837" b="0" dirty="0" err="1">
+              <a:rPr sz="1100" b="0" dirty="0" err="1">
                 <a:solidFill>
                   <a:srgbClr val="D1D5DB"/>
                 </a:solidFill>
@@ -3887,7 +3887,7 @@
               </a:rPr>
               <a:t>гипертензия</a:t>
             </a:r>
-            <a:endParaRPr sz="837" b="0" dirty="0">
+            <a:endParaRPr sz="1100" b="0" dirty="0">
               <a:solidFill>
                 <a:srgbClr val="D1D5DB"/>
               </a:solidFill>
@@ -3980,8 +3980,8 @@
         </p:nvSpPr>
         <p:spPr>
           <a:xfrm>
-            <a:off x="9267593" y="4267199"/>
-            <a:ext cx="800079" cy="228600"/>
+            <a:off x="9267593" y="4230946"/>
+            <a:ext cx="883512" cy="301108"/>
           </a:xfrm>
           <a:prstGeom prst="rect">
             <a:avLst/>
@@ -4006,7 +4006,7 @@
               </a:spcAft>
             </a:pPr>
             <a:r>
-              <a:rPr sz="956" b="0" dirty="0" err="1">
+              <a:rPr sz="1100" b="0" dirty="0" err="1">
                 <a:solidFill>
                   <a:srgbClr val="FFFFFF"/>
                 </a:solidFill>
@@ -4014,7 +4014,7 @@
               </a:rPr>
               <a:t>Ожирение</a:t>
             </a:r>
-            <a:endParaRPr sz="956" b="0" dirty="0">
+            <a:endParaRPr sz="1100" b="0" dirty="0">
               <a:solidFill>
                 <a:srgbClr val="FFFFFF"/>
               </a:solidFill>
@@ -4031,8 +4031,8 @@
         </p:nvSpPr>
         <p:spPr>
           <a:xfrm>
-            <a:off x="9267593" y="4495799"/>
-            <a:ext cx="800079" cy="190499"/>
+            <a:off x="9267593" y="4452294"/>
+            <a:ext cx="997324" cy="277512"/>
           </a:xfrm>
           <a:prstGeom prst="rect">
             <a:avLst/>
@@ -4057,7 +4057,7 @@
               </a:spcAft>
             </a:pPr>
             <a:r>
-              <a:rPr sz="837" b="0" dirty="0" err="1">
+              <a:rPr sz="1100" b="0" dirty="0" err="1">
                 <a:solidFill>
                   <a:srgbClr val="D1D5DB"/>
                 </a:solidFill>
@@ -4065,7 +4065,7 @@
               </a:rPr>
               <a:t>метаболизм</a:t>
             </a:r>
-            <a:endParaRPr sz="837" b="0" dirty="0">
+            <a:endParaRPr sz="1100" b="0" dirty="0">
               <a:solidFill>
                 <a:srgbClr val="D1D5DB"/>
               </a:solidFill>
@@ -4158,8 +4158,8 @@
         </p:nvSpPr>
         <p:spPr>
           <a:xfrm>
-            <a:off x="9267593" y="5314950"/>
-            <a:ext cx="1609684" cy="228600"/>
+            <a:off x="9267593" y="5278697"/>
+            <a:ext cx="1660968" cy="301108"/>
           </a:xfrm>
           <a:prstGeom prst="rect">
             <a:avLst/>
@@ -4184,7 +4184,7 @@
               </a:spcAft>
             </a:pPr>
             <a:r>
-              <a:rPr sz="956" b="0" dirty="0" err="1">
+              <a:rPr sz="1100" b="0" dirty="0" err="1">
                 <a:solidFill>
                   <a:srgbClr val="FFFFFF"/>
                 </a:solidFill>
@@ -4193,7 +4193,7 @@
               <a:t>Хроническая</a:t>
             </a:r>
             <a:r>
-              <a:rPr sz="956" b="0" dirty="0">
+              <a:rPr sz="1100" b="0" dirty="0">
                 <a:solidFill>
                   <a:srgbClr val="FFFFFF"/>
                 </a:solidFill>
@@ -4202,7 +4202,7 @@
               <a:t> </a:t>
             </a:r>
             <a:r>
-              <a:rPr sz="956" b="0" dirty="0" err="1">
+              <a:rPr sz="1100" b="0" dirty="0" err="1">
                 <a:solidFill>
                   <a:srgbClr val="FFFFFF"/>
                 </a:solidFill>
@@ -4210,7 +4210,7 @@
               </a:rPr>
               <a:t>болезнь</a:t>
             </a:r>
-            <a:endParaRPr sz="956" b="0" dirty="0">
+            <a:endParaRPr sz="1100" b="0" dirty="0">
               <a:solidFill>
                 <a:srgbClr val="FFFFFF"/>
               </a:solidFill>
@@ -4227,8 +4227,8 @@
         </p:nvSpPr>
         <p:spPr>
           <a:xfrm>
-            <a:off x="9267593" y="5543550"/>
-            <a:ext cx="1609684" cy="190499"/>
+            <a:off x="9267593" y="5503507"/>
+            <a:ext cx="931602" cy="270587"/>
           </a:xfrm>
           <a:prstGeom prst="rect">
             <a:avLst/>
@@ -4253,7 +4253,7 @@
               </a:spcAft>
             </a:pPr>
             <a:r>
-              <a:rPr sz="837" b="0" dirty="0" err="1">
+              <a:rPr sz="1050" b="0" dirty="0" err="1">
                 <a:solidFill>
                   <a:srgbClr val="D1D5DB"/>
                 </a:solidFill>
@@ -4262,7 +4262,7 @@
               <a:t>почек</a:t>
             </a:r>
             <a:r>
-              <a:rPr sz="837" b="0" dirty="0">
+              <a:rPr sz="1050" b="0" dirty="0">
                 <a:solidFill>
                   <a:srgbClr val="D1D5DB"/>
                 </a:solidFill>
@@ -4611,8 +4611,8 @@
         </p:nvSpPr>
         <p:spPr>
           <a:xfrm>
-            <a:off x="895327" y="2247899"/>
-            <a:ext cx="1609684" cy="457200"/>
+            <a:off x="895327" y="2238902"/>
+            <a:ext cx="1508683" cy="475195"/>
           </a:xfrm>
           <a:prstGeom prst="rect">
             <a:avLst/>
@@ -4637,7 +4637,7 @@
               </a:spcAft>
             </a:pPr>
             <a:r>
-              <a:rPr sz="1913" b="1" dirty="0" err="1">
+              <a:rPr sz="2000" b="1" dirty="0" err="1">
                 <a:solidFill>
                   <a:srgbClr val="0D47A1"/>
                 </a:solidFill>
@@ -4645,7 +4645,7 @@
               </a:rPr>
               <a:t>Проблема</a:t>
             </a:r>
-            <a:endParaRPr sz="1913" b="1" dirty="0">
+            <a:endParaRPr sz="2000" b="1" dirty="0">
               <a:solidFill>
                 <a:srgbClr val="0D47A1"/>
               </a:solidFill>
@@ -5215,8 +5215,8 @@
         </p:nvSpPr>
         <p:spPr>
           <a:xfrm>
-            <a:off x="6991175" y="1743075"/>
-            <a:ext cx="809604" cy="457200"/>
+            <a:off x="6991175" y="1734078"/>
+            <a:ext cx="849848" cy="475195"/>
           </a:xfrm>
           <a:prstGeom prst="rect">
             <a:avLst/>
@@ -5241,7 +5241,7 @@
               </a:spcAft>
             </a:pPr>
             <a:r>
-              <a:rPr sz="1913" b="1" dirty="0" err="1">
+              <a:rPr sz="2000" b="1" dirty="0" err="1">
                 <a:solidFill>
                   <a:srgbClr val="0D47A1"/>
                 </a:solidFill>
@@ -5249,7 +5249,7 @@
               </a:rPr>
               <a:t>Цели</a:t>
             </a:r>
-            <a:endParaRPr sz="1913" b="1" dirty="0">
+            <a:endParaRPr sz="2000" b="1" dirty="0">
               <a:solidFill>
                 <a:srgbClr val="0D47A1"/>
               </a:solidFill>
@@ -6190,8 +6190,8 @@
         </p:nvSpPr>
         <p:spPr>
           <a:xfrm>
-            <a:off x="895327" y="1628775"/>
-            <a:ext cx="3076498" cy="400050"/>
+            <a:off x="895327" y="1610439"/>
+            <a:ext cx="3179012" cy="436723"/>
           </a:xfrm>
           <a:prstGeom prst="rect">
             <a:avLst/>
@@ -6216,7 +6216,7 @@
               </a:spcAft>
             </a:pPr>
             <a:r>
-              <a:rPr sz="1674" b="1" dirty="0" err="1">
+              <a:rPr sz="2000" b="1" dirty="0" err="1">
                 <a:solidFill>
                   <a:srgbClr val="0D47A1"/>
                 </a:solidFill>
@@ -6225,7 +6225,7 @@
               <a:t>Целевые</a:t>
             </a:r>
             <a:r>
-              <a:rPr sz="1674" b="1" dirty="0">
+              <a:rPr sz="2000" b="1" dirty="0">
                 <a:solidFill>
                   <a:srgbClr val="0D47A1"/>
                 </a:solidFill>
@@ -6234,7 +6234,7 @@
               <a:t> </a:t>
             </a:r>
             <a:r>
-              <a:rPr sz="1674" b="1" dirty="0" err="1">
+              <a:rPr sz="2000" b="1" dirty="0" err="1">
                 <a:solidFill>
                   <a:srgbClr val="0D47A1"/>
                 </a:solidFill>
@@ -6242,7 +6242,7 @@
               </a:rPr>
               <a:t>заболевания</a:t>
             </a:r>
-            <a:endParaRPr sz="1674" b="1" dirty="0">
+            <a:endParaRPr sz="2000" b="1" dirty="0">
               <a:solidFill>
                 <a:srgbClr val="0D47A1"/>
               </a:solidFill>
@@ -6431,8 +6431,8 @@
         </p:nvSpPr>
         <p:spPr>
           <a:xfrm>
-            <a:off x="895327" y="3152775"/>
-            <a:ext cx="2190695" cy="228600"/>
+            <a:off x="895327" y="3118925"/>
+            <a:ext cx="2274918" cy="296300"/>
           </a:xfrm>
           <a:prstGeom prst="rect">
             <a:avLst/>
@@ -6464,6 +6464,24 @@
                 <a:latin typeface="Noto Sans"/>
               </a:rPr>
               <a:t>Сердечно-сосудистые</a:t>
+            </a:r>
+            <a:r>
+              <a:rPr lang="en-US" sz="956" b="0" dirty="0">
+                <a:solidFill>
+                  <a:srgbClr val="4B5563"/>
+                </a:solidFill>
+                <a:latin typeface="Noto Sans"/>
+              </a:rPr>
+              <a:t> </a:t>
+            </a:r>
+            <a:r>
+              <a:rPr lang="ru-RU" sz="956" b="0" dirty="0">
+                <a:solidFill>
+                  <a:srgbClr val="4B5563"/>
+                </a:solidFill>
+                <a:latin typeface="Noto Sans"/>
+              </a:rPr>
+              <a:t>заболевания</a:t>
             </a:r>
             <a:endParaRPr sz="956" b="0" dirty="0">
               <a:solidFill>
@@ -8048,53 +8066,36 @@
           </a:p>
         </p:txBody>
       </p:sp>
-      <p:sp>
-        <p:nvSpPr>
-          <p:cNvPr id="44" name="Rectangle 43"/>
-          <p:cNvSpPr/>
-          <p:nvPr/>
-        </p:nvSpPr>
-        <p:spPr>
-          <a:xfrm>
-            <a:off x="7372165" y="4448175"/>
-            <a:ext cx="4152796" cy="2158814"/>
-          </a:xfrm>
-          <a:prstGeom prst="rect">
-            <a:avLst/>
-          </a:prstGeom>
-          <a:blipFill>
-            <a:blip r:embed="rId11"/>
-            <a:stretch>
-              <a:fillRect/>
-            </a:stretch>
-          </a:blipFill>
-          <a:ln>
-            <a:noFill/>
-          </a:ln>
-        </p:spPr>
-        <p:style>
-          <a:lnRef idx="1">
-            <a:schemeClr val="accent1"/>
-          </a:lnRef>
-          <a:fillRef idx="3">
-            <a:schemeClr val="accent1"/>
-          </a:fillRef>
-          <a:effectRef idx="2">
-            <a:schemeClr val="accent1"/>
-          </a:effectRef>
-          <a:fontRef idx="minor">
-            <a:schemeClr val="lt1"/>
-          </a:fontRef>
-        </p:style>
-        <p:txBody>
-          <a:bodyPr rtlCol="0" anchor="ctr"/>
-          <a:lstStyle/>
-          <a:p>
-            <a:pPr algn="ctr"/>
-            <a:endParaRPr dirty="0"/>
-          </a:p>
-        </p:txBody>
-      </p:sp>
+      <p:pic>
+        <p:nvPicPr>
+          <p:cNvPr id="46" name="Рисунок 45">
+            <a:extLst>
+              <a:ext uri="{FF2B5EF4-FFF2-40B4-BE49-F238E27FC236}">
+                <a16:creationId xmlns:a16="http://schemas.microsoft.com/office/drawing/2014/main" id="{25FEFF13-A631-60A2-F069-59C0895F7D4D}"/>
+              </a:ext>
+            </a:extLst>
+          </p:cNvPr>
+          <p:cNvPicPr>
+            <a:picLocks noChangeAspect="1"/>
+          </p:cNvPicPr>
+          <p:nvPr/>
+        </p:nvPicPr>
+        <p:blipFill>
+          <a:blip r:embed="rId11"/>
+          <a:stretch>
+            <a:fillRect/>
+          </a:stretch>
+        </p:blipFill>
+        <p:spPr>
+          <a:xfrm>
+            <a:off x="7524560" y="4486273"/>
+            <a:ext cx="3772113" cy="2202362"/>
+          </a:xfrm>
+          <a:prstGeom prst="rect">
+            <a:avLst/>
+          </a:prstGeom>
+        </p:spPr>
+      </p:pic>
     </p:spTree>
   </p:cSld>
   <p:clrMapOvr>
@@ -8261,7 +8262,7 @@
         </p:blipFill>
         <p:spPr>
           <a:xfrm>
-            <a:off x="666733" y="1415561"/>
+            <a:off x="442901" y="1967274"/>
             <a:ext cx="304792" cy="216876"/>
           </a:xfrm>
           <a:prstGeom prst="rect">
@@ -8277,7 +8278,7 @@
         </p:nvSpPr>
         <p:spPr>
           <a:xfrm>
-            <a:off x="1085822" y="1311056"/>
+            <a:off x="861990" y="1862769"/>
             <a:ext cx="1133580" cy="425886"/>
           </a:xfrm>
           <a:prstGeom prst="rect">
@@ -8322,7 +8323,7 @@
         </p:nvSpPr>
         <p:spPr>
           <a:xfrm>
-            <a:off x="666733" y="1914525"/>
+            <a:off x="442901" y="2466238"/>
             <a:ext cx="1685882" cy="990599"/>
           </a:xfrm>
           <a:prstGeom prst="roundRect">
@@ -8376,7 +8377,7 @@
         </p:nvSpPr>
         <p:spPr>
           <a:xfrm rot="16200000">
-            <a:off x="237474" y="2343784"/>
+            <a:off x="13642" y="2895497"/>
             <a:ext cx="990599" cy="132080"/>
           </a:xfrm>
           <a:prstGeom prst="round2SameRect">
@@ -8423,7 +8424,7 @@
         </p:nvSpPr>
         <p:spPr>
           <a:xfrm>
-            <a:off x="1142271" y="2086711"/>
+            <a:off x="918439" y="2638424"/>
             <a:ext cx="772904" cy="379527"/>
           </a:xfrm>
           <a:prstGeom prst="rect">
@@ -8468,7 +8469,7 @@
         </p:nvSpPr>
         <p:spPr>
           <a:xfrm>
-            <a:off x="1154294" y="2454099"/>
+            <a:off x="930462" y="3005812"/>
             <a:ext cx="748858" cy="292452"/>
           </a:xfrm>
           <a:prstGeom prst="rect">
@@ -8513,7 +8514,7 @@
         </p:nvSpPr>
         <p:spPr>
           <a:xfrm>
-            <a:off x="2505012" y="1914525"/>
+            <a:off x="2281180" y="2466238"/>
             <a:ext cx="1685882" cy="990599"/>
           </a:xfrm>
           <a:prstGeom prst="roundRect">
@@ -8567,7 +8568,7 @@
         </p:nvSpPr>
         <p:spPr>
           <a:xfrm rot="16200000">
-            <a:off x="2075753" y="2343784"/>
+            <a:off x="1851921" y="2895497"/>
             <a:ext cx="990599" cy="132080"/>
           </a:xfrm>
           <a:prstGeom prst="round2SameRect">
@@ -8614,7 +8615,7 @@
         </p:nvSpPr>
         <p:spPr>
           <a:xfrm>
-            <a:off x="3133637" y="2086711"/>
+            <a:off x="2909805" y="2638424"/>
             <a:ext cx="466730" cy="379527"/>
           </a:xfrm>
           <a:prstGeom prst="rect">
@@ -8659,7 +8660,7 @@
         </p:nvSpPr>
         <p:spPr>
           <a:xfrm>
-            <a:off x="3111997" y="2454099"/>
+            <a:off x="2888165" y="3005812"/>
             <a:ext cx="510011" cy="292452"/>
           </a:xfrm>
           <a:prstGeom prst="rect">
@@ -8704,7 +8705,7 @@
         </p:nvSpPr>
         <p:spPr>
           <a:xfrm>
-            <a:off x="4352816" y="1914525"/>
+            <a:off x="4128984" y="2466238"/>
             <a:ext cx="1685882" cy="990599"/>
           </a:xfrm>
           <a:prstGeom prst="roundRect">
@@ -8758,7 +8759,7 @@
         </p:nvSpPr>
         <p:spPr>
           <a:xfrm rot="16200000">
-            <a:off x="3923557" y="2343784"/>
+            <a:off x="3699725" y="2895497"/>
             <a:ext cx="990599" cy="132080"/>
           </a:xfrm>
           <a:prstGeom prst="round2SameRect">
@@ -8805,7 +8806,7 @@
         </p:nvSpPr>
         <p:spPr>
           <a:xfrm>
-            <a:off x="4681679" y="2086711"/>
+            <a:off x="4457847" y="2638424"/>
             <a:ext cx="1066254" cy="379527"/>
           </a:xfrm>
           <a:prstGeom prst="rect">
@@ -8850,7 +8851,7 @@
         </p:nvSpPr>
         <p:spPr>
           <a:xfrm>
-            <a:off x="4928542" y="2454099"/>
+            <a:off x="4704710" y="3005812"/>
             <a:ext cx="572529" cy="292452"/>
           </a:xfrm>
           <a:prstGeom prst="rect">
@@ -8905,7 +8906,7 @@
         </p:blipFill>
         <p:spPr>
           <a:xfrm>
-            <a:off x="666733" y="3292719"/>
+            <a:off x="442901" y="3844432"/>
             <a:ext cx="304792" cy="234461"/>
           </a:xfrm>
           <a:prstGeom prst="rect">
@@ -8921,7 +8922,7 @@
         </p:nvSpPr>
         <p:spPr>
           <a:xfrm>
-            <a:off x="1085822" y="3197007"/>
+            <a:off x="861990" y="3748720"/>
             <a:ext cx="1069460" cy="425886"/>
           </a:xfrm>
           <a:prstGeom prst="rect">
@@ -8966,7 +8967,7 @@
         </p:nvSpPr>
         <p:spPr>
           <a:xfrm>
-            <a:off x="666733" y="3800475"/>
+            <a:off x="442901" y="4352188"/>
             <a:ext cx="2609784" cy="990599"/>
           </a:xfrm>
           <a:prstGeom prst="roundRect">
@@ -9020,7 +9021,7 @@
         </p:nvSpPr>
         <p:spPr>
           <a:xfrm rot="16200000">
-            <a:off x="237474" y="4229734"/>
+            <a:off x="13642" y="4781447"/>
             <a:ext cx="990599" cy="132080"/>
           </a:xfrm>
           <a:prstGeom prst="round2SameRect">
@@ -9067,7 +9068,7 @@
         </p:nvSpPr>
         <p:spPr>
           <a:xfrm>
-            <a:off x="895327" y="3972661"/>
+            <a:off x="671495" y="4524374"/>
             <a:ext cx="801758" cy="379527"/>
           </a:xfrm>
           <a:prstGeom prst="rect">
@@ -9112,7 +9113,7 @@
         </p:nvSpPr>
         <p:spPr>
           <a:xfrm>
-            <a:off x="895327" y="4340049"/>
+            <a:off x="671495" y="4891762"/>
             <a:ext cx="1077474" cy="292452"/>
           </a:xfrm>
           <a:prstGeom prst="rect">
@@ -9167,7 +9168,7 @@
         </p:blipFill>
         <p:spPr>
           <a:xfrm>
-            <a:off x="666733" y="5187461"/>
+            <a:off x="3324141" y="3853224"/>
             <a:ext cx="304792" cy="216876"/>
           </a:xfrm>
           <a:prstGeom prst="rect">
@@ -9183,7 +9184,7 @@
         </p:nvSpPr>
         <p:spPr>
           <a:xfrm>
-            <a:off x="1085822" y="5082956"/>
+            <a:off x="3743230" y="3748719"/>
             <a:ext cx="1582421" cy="425886"/>
           </a:xfrm>
           <a:prstGeom prst="rect">
@@ -9228,7 +9229,7 @@
         </p:nvSpPr>
         <p:spPr>
           <a:xfrm>
-            <a:off x="666733" y="5686425"/>
+            <a:off x="3324141" y="4352188"/>
             <a:ext cx="2886002" cy="990599"/>
           </a:xfrm>
           <a:prstGeom prst="roundRect">
@@ -9282,7 +9283,7 @@
         </p:nvSpPr>
         <p:spPr>
           <a:xfrm rot="16200000">
-            <a:off x="237474" y="6115684"/>
+            <a:off x="2894882" y="4781447"/>
             <a:ext cx="990599" cy="132080"/>
           </a:xfrm>
           <a:prstGeom prst="round2SameRect">
@@ -9329,7 +9330,7 @@
         </p:nvSpPr>
         <p:spPr>
           <a:xfrm>
-            <a:off x="895327" y="5858612"/>
+            <a:off x="3552735" y="4524375"/>
             <a:ext cx="744050" cy="379527"/>
           </a:xfrm>
           <a:prstGeom prst="rect">
@@ -9374,7 +9375,7 @@
         </p:nvSpPr>
         <p:spPr>
           <a:xfrm>
-            <a:off x="895327" y="6225999"/>
+            <a:off x="3552735" y="4891762"/>
             <a:ext cx="2170722" cy="292452"/>
           </a:xfrm>
           <a:prstGeom prst="rect">
@@ -9455,53 +9456,36 @@
           </a:p>
         </p:txBody>
       </p:sp>
-      <p:sp>
-        <p:nvSpPr>
-          <p:cNvPr id="36" name="Rectangle 35"/>
-          <p:cNvSpPr/>
-          <p:nvPr/>
-        </p:nvSpPr>
-        <p:spPr>
-          <a:xfrm>
-            <a:off x="7372165" y="1238249"/>
-            <a:ext cx="4152796" cy="5143500"/>
-          </a:xfrm>
-          <a:prstGeom prst="rect">
-            <a:avLst/>
-          </a:prstGeom>
-          <a:blipFill>
-            <a:blip r:embed="rId6"/>
-            <a:stretch>
-              <a:fillRect/>
-            </a:stretch>
-          </a:blipFill>
-          <a:ln>
-            <a:noFill/>
-          </a:ln>
-        </p:spPr>
-        <p:style>
-          <a:lnRef idx="1">
-            <a:schemeClr val="accent1"/>
-          </a:lnRef>
-          <a:fillRef idx="3">
-            <a:schemeClr val="accent1"/>
-          </a:fillRef>
-          <a:effectRef idx="2">
-            <a:schemeClr val="accent1"/>
-          </a:effectRef>
-          <a:fontRef idx="minor">
-            <a:schemeClr val="lt1"/>
-          </a:fontRef>
-        </p:style>
-        <p:txBody>
-          <a:bodyPr rtlCol="0" anchor="ctr"/>
-          <a:lstStyle/>
-          <a:p>
-            <a:pPr algn="ctr"/>
-            <a:endParaRPr lang="en-US" noProof="1"/>
-          </a:p>
-        </p:txBody>
-      </p:sp>
+      <p:pic>
+        <p:nvPicPr>
+          <p:cNvPr id="26" name="Рисунок 25">
+            <a:extLst>
+              <a:ext uri="{FF2B5EF4-FFF2-40B4-BE49-F238E27FC236}">
+                <a16:creationId xmlns:a16="http://schemas.microsoft.com/office/drawing/2014/main" id="{06832EF9-D62C-E111-3913-87FBD1EBEF9D}"/>
+              </a:ext>
+            </a:extLst>
+          </p:cNvPr>
+          <p:cNvPicPr>
+            <a:picLocks noChangeAspect="1"/>
+          </p:cNvPicPr>
+          <p:nvPr/>
+        </p:nvPicPr>
+        <p:blipFill>
+          <a:blip r:embed="rId6"/>
+          <a:stretch>
+            <a:fillRect/>
+          </a:stretch>
+        </p:blipFill>
+        <p:spPr>
+          <a:xfrm>
+            <a:off x="7270371" y="1311056"/>
+            <a:ext cx="4473228" cy="5116638"/>
+          </a:xfrm>
+          <a:prstGeom prst="rect">
+            <a:avLst/>
+          </a:prstGeom>
+        </p:spPr>
+      </p:pic>
     </p:spTree>
   </p:cSld>
   <p:clrMapOvr>
@@ -9700,8 +9684,8 @@
         </p:nvSpPr>
         <p:spPr>
           <a:xfrm>
-            <a:off x="666733" y="2047874"/>
-            <a:ext cx="2666933" cy="2857500"/>
+            <a:off x="514461" y="1958021"/>
+            <a:ext cx="2901220" cy="3062008"/>
           </a:xfrm>
           <a:prstGeom prst="roundRect">
             <a:avLst>
@@ -9756,8 +9740,8 @@
         </p:nvSpPr>
         <p:spPr>
           <a:xfrm>
-            <a:off x="1695407" y="2314575"/>
-            <a:ext cx="609584" cy="609600"/>
+            <a:off x="1679451" y="2171732"/>
+            <a:ext cx="663135" cy="653228"/>
           </a:xfrm>
           <a:prstGeom prst="roundRect">
             <a:avLst>
@@ -9812,8 +9796,8 @@
         </p:blipFill>
         <p:spPr>
           <a:xfrm>
-            <a:off x="1828754" y="2486353"/>
-            <a:ext cx="342891" cy="266043"/>
+            <a:off x="1812799" y="2343510"/>
+            <a:ext cx="373014" cy="289415"/>
           </a:xfrm>
           <a:prstGeom prst="rect">
             <a:avLst/>
@@ -9828,8 +9812,8 @@
         </p:nvSpPr>
         <p:spPr>
           <a:xfrm>
-            <a:off x="895327" y="3076574"/>
-            <a:ext cx="2209744" cy="342900"/>
+            <a:off x="743054" y="2993083"/>
+            <a:ext cx="2403867" cy="391646"/>
           </a:xfrm>
           <a:prstGeom prst="rect">
             <a:avLst/>
@@ -9837,7 +9821,7 @@
           <a:noFill/>
         </p:spPr>
         <p:txBody>
-          <a:bodyPr wrap="none" lIns="73152" tIns="54864" rIns="73152" bIns="54864" anchor="ctr">
+          <a:bodyPr wrap="square" lIns="73152" tIns="54864" rIns="73152" bIns="54864" anchor="ctr">
             <a:spAutoFit/>
           </a:bodyPr>
           <a:lstStyle/>
@@ -9854,7 +9838,7 @@
               </a:spcAft>
             </a:pPr>
             <a:r>
-              <a:rPr sz="1435" b="1" dirty="0" err="1">
+              <a:rPr b="1" dirty="0" err="1">
                 <a:solidFill>
                   <a:srgbClr val="0D47A1"/>
                 </a:solidFill>
@@ -9863,7 +9847,7 @@
               <a:t>Ввод</a:t>
             </a:r>
             <a:r>
-              <a:rPr sz="1435" b="1" dirty="0">
+              <a:rPr b="1" dirty="0">
                 <a:solidFill>
                   <a:srgbClr val="0D47A1"/>
                 </a:solidFill>
@@ -9872,7 +9856,7 @@
               <a:t> </a:t>
             </a:r>
             <a:r>
-              <a:rPr sz="1435" b="1" dirty="0" err="1">
+              <a:rPr b="1" dirty="0" err="1">
                 <a:solidFill>
                   <a:srgbClr val="0D47A1"/>
                 </a:solidFill>
@@ -9880,7 +9864,7 @@
               </a:rPr>
               <a:t>данных</a:t>
             </a:r>
-            <a:endParaRPr sz="1435" b="1" dirty="0">
+            <a:endParaRPr b="1" dirty="0">
               <a:solidFill>
                 <a:srgbClr val="0D47A1"/>
               </a:solidFill>
@@ -9907,8 +9891,8 @@
         </p:blipFill>
         <p:spPr>
           <a:xfrm>
-            <a:off x="895327" y="3608070"/>
-            <a:ext cx="133346" cy="80010"/>
+            <a:off x="743055" y="3518216"/>
+            <a:ext cx="145060" cy="87039"/>
           </a:xfrm>
           <a:prstGeom prst="rect">
             <a:avLst/>
@@ -9923,8 +9907,8 @@
         </p:nvSpPr>
         <p:spPr>
           <a:xfrm>
-            <a:off x="1104872" y="3533774"/>
-            <a:ext cx="942951" cy="228600"/>
+            <a:off x="952600" y="3399172"/>
+            <a:ext cx="1025788" cy="299441"/>
           </a:xfrm>
           <a:prstGeom prst="rect">
             <a:avLst/>
@@ -9932,7 +9916,7 @@
           <a:noFill/>
         </p:spPr>
         <p:txBody>
-          <a:bodyPr wrap="none" lIns="73152" tIns="54864" rIns="73152" bIns="54864" anchor="ctr">
+          <a:bodyPr wrap="square" lIns="73152" tIns="54864" rIns="73152" bIns="54864" anchor="ctr">
             <a:spAutoFit/>
           </a:bodyPr>
           <a:lstStyle/>
@@ -9949,7 +9933,7 @@
               </a:spcAft>
             </a:pPr>
             <a:r>
-              <a:rPr sz="956" b="0" dirty="0" err="1">
+              <a:rPr sz="1100" b="0" dirty="0" err="1">
                 <a:solidFill>
                   <a:srgbClr val="374151"/>
                 </a:solidFill>
@@ -9958,7 +9942,7 @@
               <a:t>Возраст</a:t>
             </a:r>
             <a:r>
-              <a:rPr sz="956" b="0" dirty="0">
+              <a:rPr sz="1100" b="0" dirty="0">
                 <a:solidFill>
                   <a:srgbClr val="374151"/>
                 </a:solidFill>
@@ -9967,7 +9951,7 @@
               <a:t>, </a:t>
             </a:r>
             <a:r>
-              <a:rPr sz="956" b="0" dirty="0" err="1">
+              <a:rPr sz="1100" b="0" dirty="0" err="1">
                 <a:solidFill>
                   <a:srgbClr val="374151"/>
                 </a:solidFill>
@@ -9975,7 +9959,7 @@
               </a:rPr>
               <a:t>пол</a:t>
             </a:r>
-            <a:endParaRPr sz="956" b="0" dirty="0">
+            <a:endParaRPr sz="1100" b="0" dirty="0">
               <a:solidFill>
                 <a:srgbClr val="374151"/>
               </a:solidFill>
@@ -10002,8 +9986,8 @@
         </p:blipFill>
         <p:spPr>
           <a:xfrm>
-            <a:off x="895327" y="3912870"/>
-            <a:ext cx="133346" cy="80010"/>
+            <a:off x="743055" y="3823016"/>
+            <a:ext cx="145060" cy="87039"/>
           </a:xfrm>
           <a:prstGeom prst="rect">
             <a:avLst/>
@@ -10018,8 +10002,8 @@
         </p:nvSpPr>
         <p:spPr>
           <a:xfrm>
-            <a:off x="1104872" y="3838574"/>
-            <a:ext cx="1076298" cy="228600"/>
+            <a:off x="952600" y="3703972"/>
+            <a:ext cx="1170850" cy="299441"/>
           </a:xfrm>
           <a:prstGeom prst="rect">
             <a:avLst/>
@@ -10027,7 +10011,7 @@
           <a:noFill/>
         </p:spPr>
         <p:txBody>
-          <a:bodyPr wrap="none" lIns="73152" tIns="54864" rIns="73152" bIns="54864" anchor="ctr">
+          <a:bodyPr wrap="square" lIns="73152" tIns="54864" rIns="73152" bIns="54864" anchor="ctr">
             <a:spAutoFit/>
           </a:bodyPr>
           <a:lstStyle/>
@@ -10044,7 +10028,7 @@
               </a:spcAft>
             </a:pPr>
             <a:r>
-              <a:rPr sz="956" b="0" dirty="0">
+              <a:rPr sz="1100" b="0" dirty="0">
                 <a:solidFill>
                   <a:srgbClr val="374151"/>
                 </a:solidFill>
@@ -10053,7 +10037,7 @@
               <a:t>ИМТ, </a:t>
             </a:r>
             <a:r>
-              <a:rPr sz="956" b="0" dirty="0" err="1">
+              <a:rPr sz="1100" b="0" dirty="0" err="1">
                 <a:solidFill>
                   <a:srgbClr val="374151"/>
                 </a:solidFill>
@@ -10062,7 +10046,7 @@
               <a:t>рост</a:t>
             </a:r>
             <a:r>
-              <a:rPr sz="956" b="0" dirty="0">
+              <a:rPr sz="1100" b="0" dirty="0">
                 <a:solidFill>
                   <a:srgbClr val="374151"/>
                 </a:solidFill>
@@ -10071,7 +10055,7 @@
               <a:t>, </a:t>
             </a:r>
             <a:r>
-              <a:rPr sz="956" b="0" dirty="0" err="1">
+              <a:rPr sz="1100" b="0" dirty="0" err="1">
                 <a:solidFill>
                   <a:srgbClr val="374151"/>
                 </a:solidFill>
@@ -10079,7 +10063,7 @@
               </a:rPr>
               <a:t>вес</a:t>
             </a:r>
-            <a:endParaRPr sz="956" b="0" dirty="0">
+            <a:endParaRPr sz="1100" b="0" dirty="0">
               <a:solidFill>
                 <a:srgbClr val="374151"/>
               </a:solidFill>
@@ -10106,8 +10090,8 @@
         </p:blipFill>
         <p:spPr>
           <a:xfrm>
-            <a:off x="895327" y="4217670"/>
-            <a:ext cx="133346" cy="80010"/>
+            <a:off x="743055" y="4127816"/>
+            <a:ext cx="145060" cy="87039"/>
           </a:xfrm>
           <a:prstGeom prst="rect">
             <a:avLst/>
@@ -10122,8 +10106,8 @@
         </p:nvSpPr>
         <p:spPr>
           <a:xfrm>
-            <a:off x="1104872" y="4143375"/>
-            <a:ext cx="1219169" cy="228600"/>
+            <a:off x="952600" y="4008773"/>
+            <a:ext cx="1326272" cy="299441"/>
           </a:xfrm>
           <a:prstGeom prst="rect">
             <a:avLst/>
@@ -10131,7 +10115,7 @@
           <a:noFill/>
         </p:spPr>
         <p:txBody>
-          <a:bodyPr wrap="none" lIns="73152" tIns="54864" rIns="73152" bIns="54864" anchor="ctr">
+          <a:bodyPr wrap="square" lIns="73152" tIns="54864" rIns="73152" bIns="54864" anchor="ctr">
             <a:spAutoFit/>
           </a:bodyPr>
           <a:lstStyle/>
@@ -10148,7 +10132,7 @@
               </a:spcAft>
             </a:pPr>
             <a:r>
-              <a:rPr sz="956" b="0" dirty="0" err="1">
+              <a:rPr sz="1100" b="0" dirty="0" err="1">
                 <a:solidFill>
                   <a:srgbClr val="374151"/>
                 </a:solidFill>
@@ -10157,7 +10141,7 @@
               <a:t>Давление</a:t>
             </a:r>
             <a:r>
-              <a:rPr sz="956" b="0" dirty="0">
+              <a:rPr sz="1100" b="0" dirty="0">
                 <a:solidFill>
                   <a:srgbClr val="374151"/>
                 </a:solidFill>
@@ -10166,7 +10150,7 @@
               <a:t>, </a:t>
             </a:r>
             <a:r>
-              <a:rPr sz="956" b="0" dirty="0" err="1">
+              <a:rPr sz="1100" b="0" dirty="0" err="1">
                 <a:solidFill>
                   <a:srgbClr val="374151"/>
                 </a:solidFill>
@@ -10174,7 +10158,7 @@
               </a:rPr>
               <a:t>пульс</a:t>
             </a:r>
-            <a:endParaRPr sz="956" b="0" dirty="0">
+            <a:endParaRPr sz="1100" b="0" dirty="0">
               <a:solidFill>
                 <a:srgbClr val="374151"/>
               </a:solidFill>
@@ -10201,8 +10185,8 @@
         </p:blipFill>
         <p:spPr>
           <a:xfrm>
-            <a:off x="895327" y="4522470"/>
-            <a:ext cx="133346" cy="80010"/>
+            <a:off x="743055" y="4432616"/>
+            <a:ext cx="145060" cy="87039"/>
           </a:xfrm>
           <a:prstGeom prst="rect">
             <a:avLst/>
@@ -10217,8 +10201,8 @@
         </p:nvSpPr>
         <p:spPr>
           <a:xfrm>
-            <a:off x="1104872" y="4448175"/>
-            <a:ext cx="1447763" cy="228600"/>
+            <a:off x="952600" y="4313573"/>
+            <a:ext cx="1574947" cy="299441"/>
           </a:xfrm>
           <a:prstGeom prst="rect">
             <a:avLst/>
@@ -10226,7 +10210,7 @@
           <a:noFill/>
         </p:spPr>
         <p:txBody>
-          <a:bodyPr wrap="none" lIns="73152" tIns="54864" rIns="73152" bIns="54864" anchor="ctr">
+          <a:bodyPr wrap="square" lIns="73152" tIns="54864" rIns="73152" bIns="54864" anchor="ctr">
             <a:spAutoFit/>
           </a:bodyPr>
           <a:lstStyle/>
@@ -10243,7 +10227,7 @@
               </a:spcAft>
             </a:pPr>
             <a:r>
-              <a:rPr sz="956" b="0" dirty="0" err="1">
+              <a:rPr sz="1100" b="0" dirty="0" err="1">
                 <a:solidFill>
                   <a:srgbClr val="374151"/>
                 </a:solidFill>
@@ -10252,7 +10236,7 @@
               <a:t>Вредные</a:t>
             </a:r>
             <a:r>
-              <a:rPr sz="956" b="0" dirty="0">
+              <a:rPr sz="1100" b="0" dirty="0">
                 <a:solidFill>
                   <a:srgbClr val="374151"/>
                 </a:solidFill>
@@ -10261,7 +10245,7 @@
               <a:t> </a:t>
             </a:r>
             <a:r>
-              <a:rPr sz="956" b="0" dirty="0" err="1">
+              <a:rPr sz="1100" b="0" dirty="0" err="1">
                 <a:solidFill>
                   <a:srgbClr val="374151"/>
                 </a:solidFill>
@@ -10269,7 +10253,7 @@
               </a:rPr>
               <a:t>привычки</a:t>
             </a:r>
-            <a:endParaRPr sz="956" b="0" dirty="0">
+            <a:endParaRPr sz="1100" b="0" dirty="0">
               <a:solidFill>
                 <a:srgbClr val="374151"/>
               </a:solidFill>
@@ -10296,7 +10280,7 @@
         </p:blipFill>
         <p:spPr>
           <a:xfrm>
-            <a:off x="3819429" y="3317206"/>
+            <a:off x="3853820" y="3183968"/>
             <a:ext cx="457188" cy="318836"/>
           </a:xfrm>
           <a:prstGeom prst="rect">
@@ -10312,8 +10296,8 @@
         </p:nvSpPr>
         <p:spPr>
           <a:xfrm>
-            <a:off x="4762380" y="2047874"/>
-            <a:ext cx="2666933" cy="2857500"/>
+            <a:off x="4610108" y="1958021"/>
+            <a:ext cx="2901220" cy="3062008"/>
           </a:xfrm>
           <a:prstGeom prst="roundRect">
             <a:avLst>
@@ -10368,8 +10352,8 @@
         </p:nvSpPr>
         <p:spPr>
           <a:xfrm>
-            <a:off x="5791055" y="2314575"/>
-            <a:ext cx="609584" cy="609600"/>
+            <a:off x="5775099" y="2171732"/>
+            <a:ext cx="663135" cy="653228"/>
           </a:xfrm>
           <a:prstGeom prst="roundRect">
             <a:avLst>
@@ -10424,8 +10408,8 @@
         </p:blipFill>
         <p:spPr>
           <a:xfrm>
-            <a:off x="5924401" y="2498177"/>
-            <a:ext cx="342891" cy="242394"/>
+            <a:off x="5908446" y="2355334"/>
+            <a:ext cx="373014" cy="263688"/>
           </a:xfrm>
           <a:prstGeom prst="rect">
             <a:avLst/>
@@ -10440,8 +10424,8 @@
         </p:nvSpPr>
         <p:spPr>
           <a:xfrm>
-            <a:off x="4990975" y="3076574"/>
-            <a:ext cx="2209744" cy="342900"/>
+            <a:off x="4838702" y="2973115"/>
+            <a:ext cx="2403867" cy="391646"/>
           </a:xfrm>
           <a:prstGeom prst="rect">
             <a:avLst/>
@@ -10449,7 +10433,7 @@
           <a:noFill/>
         </p:spPr>
         <p:txBody>
-          <a:bodyPr wrap="none" lIns="73152" tIns="54864" rIns="73152" bIns="54864" anchor="ctr">
+          <a:bodyPr wrap="square" lIns="73152" tIns="54864" rIns="73152" bIns="54864" anchor="ctr">
             <a:spAutoFit/>
           </a:bodyPr>
           <a:lstStyle/>
@@ -10466,7 +10450,7 @@
               </a:spcAft>
             </a:pPr>
             <a:r>
-              <a:rPr sz="1435" b="1" dirty="0" err="1">
+              <a:rPr b="1" dirty="0" err="1">
                 <a:solidFill>
                   <a:srgbClr val="0D47A1"/>
                 </a:solidFill>
@@ -10474,7 +10458,7 @@
               </a:rPr>
               <a:t>Обработка</a:t>
             </a:r>
-            <a:endParaRPr sz="1435" b="1" dirty="0">
+            <a:endParaRPr b="1" dirty="0">
               <a:solidFill>
                 <a:srgbClr val="0D47A1"/>
               </a:solidFill>
@@ -10501,8 +10485,8 @@
         </p:blipFill>
         <p:spPr>
           <a:xfrm>
-            <a:off x="4990975" y="3608070"/>
-            <a:ext cx="133346" cy="80010"/>
+            <a:off x="4838703" y="3518216"/>
+            <a:ext cx="145060" cy="87039"/>
           </a:xfrm>
           <a:prstGeom prst="rect">
             <a:avLst/>
@@ -10517,8 +10501,8 @@
         </p:nvSpPr>
         <p:spPr>
           <a:xfrm>
-            <a:off x="5200519" y="3533774"/>
-            <a:ext cx="1771605" cy="228600"/>
+            <a:off x="5048247" y="3395586"/>
+            <a:ext cx="1927238" cy="299441"/>
           </a:xfrm>
           <a:prstGeom prst="rect">
             <a:avLst/>
@@ -10526,7 +10510,7 @@
           <a:noFill/>
         </p:spPr>
         <p:txBody>
-          <a:bodyPr wrap="none" lIns="73152" tIns="54864" rIns="73152" bIns="54864" anchor="ctr">
+          <a:bodyPr wrap="square" lIns="73152" tIns="54864" rIns="73152" bIns="54864" anchor="ctr">
             <a:spAutoFit/>
           </a:bodyPr>
           <a:lstStyle/>
@@ -10543,7 +10527,7 @@
               </a:spcAft>
             </a:pPr>
             <a:r>
-              <a:rPr sz="956" b="0" dirty="0" err="1">
+              <a:rPr sz="1100" b="0" dirty="0" err="1">
                 <a:solidFill>
                   <a:srgbClr val="374151"/>
                 </a:solidFill>
@@ -10552,7 +10536,7 @@
               <a:t>Статистические</a:t>
             </a:r>
             <a:r>
-              <a:rPr sz="956" b="0" dirty="0">
+              <a:rPr sz="1100" b="0" dirty="0">
                 <a:solidFill>
                   <a:srgbClr val="374151"/>
                 </a:solidFill>
@@ -10561,7 +10545,7 @@
               <a:t> </a:t>
             </a:r>
             <a:r>
-              <a:rPr sz="956" b="0" dirty="0" err="1">
+              <a:rPr sz="1100" b="0" dirty="0" err="1">
                 <a:solidFill>
                   <a:srgbClr val="374151"/>
                 </a:solidFill>
@@ -10569,7 +10553,7 @@
               </a:rPr>
               <a:t>модели</a:t>
             </a:r>
-            <a:endParaRPr sz="956" b="0" dirty="0">
+            <a:endParaRPr sz="1100" b="0" dirty="0">
               <a:solidFill>
                 <a:srgbClr val="374151"/>
               </a:solidFill>
@@ -10596,8 +10580,8 @@
         </p:blipFill>
         <p:spPr>
           <a:xfrm>
-            <a:off x="4990975" y="3912870"/>
-            <a:ext cx="133346" cy="80010"/>
+            <a:off x="4838703" y="3823016"/>
+            <a:ext cx="145060" cy="87039"/>
           </a:xfrm>
           <a:prstGeom prst="rect">
             <a:avLst/>
@@ -10612,8 +10596,8 @@
         </p:nvSpPr>
         <p:spPr>
           <a:xfrm>
-            <a:off x="5200519" y="3838574"/>
-            <a:ext cx="1038199" cy="228600"/>
+            <a:off x="5048247" y="3700386"/>
+            <a:ext cx="1129404" cy="299441"/>
           </a:xfrm>
           <a:prstGeom prst="rect">
             <a:avLst/>
@@ -10621,7 +10605,7 @@
           <a:noFill/>
         </p:spPr>
         <p:txBody>
-          <a:bodyPr wrap="none" lIns="73152" tIns="54864" rIns="73152" bIns="54864" anchor="ctr">
+          <a:bodyPr wrap="square" lIns="73152" tIns="54864" rIns="73152" bIns="54864" anchor="ctr">
             <a:spAutoFit/>
           </a:bodyPr>
           <a:lstStyle/>
@@ -10638,7 +10622,7 @@
               </a:spcAft>
             </a:pPr>
             <a:r>
-              <a:rPr sz="956" b="0" dirty="0" err="1">
+              <a:rPr sz="1100" b="0" dirty="0" err="1">
                 <a:solidFill>
                   <a:srgbClr val="374151"/>
                 </a:solidFill>
@@ -10646,7 +10630,7 @@
               </a:rPr>
               <a:t>Риск-факторы</a:t>
             </a:r>
-            <a:endParaRPr sz="956" b="0" dirty="0">
+            <a:endParaRPr sz="1100" b="0" dirty="0">
               <a:solidFill>
                 <a:srgbClr val="374151"/>
               </a:solidFill>
@@ -10673,8 +10657,8 @@
         </p:blipFill>
         <p:spPr>
           <a:xfrm>
-            <a:off x="4990975" y="4217670"/>
-            <a:ext cx="133346" cy="80010"/>
+            <a:off x="4838703" y="4127816"/>
+            <a:ext cx="145060" cy="87039"/>
           </a:xfrm>
           <a:prstGeom prst="rect">
             <a:avLst/>
@@ -10689,8 +10673,8 @@
         </p:nvSpPr>
         <p:spPr>
           <a:xfrm>
-            <a:off x="5200519" y="4143375"/>
-            <a:ext cx="1133446" cy="228600"/>
+            <a:off x="5048247" y="4005187"/>
+            <a:ext cx="1233018" cy="299441"/>
           </a:xfrm>
           <a:prstGeom prst="rect">
             <a:avLst/>
@@ -10698,7 +10682,7 @@
           <a:noFill/>
         </p:spPr>
         <p:txBody>
-          <a:bodyPr wrap="none" lIns="73152" tIns="54864" rIns="73152" bIns="54864" anchor="ctr">
+          <a:bodyPr wrap="square" lIns="73152" tIns="54864" rIns="73152" bIns="54864" anchor="ctr">
             <a:spAutoFit/>
           </a:bodyPr>
           <a:lstStyle/>
@@ -10715,7 +10699,7 @@
               </a:spcAft>
             </a:pPr>
             <a:r>
-              <a:rPr sz="956" b="0" dirty="0" err="1">
+              <a:rPr sz="1100" b="0" dirty="0" err="1">
                 <a:solidFill>
                   <a:srgbClr val="374151"/>
                 </a:solidFill>
@@ -10723,7 +10707,7 @@
               </a:rPr>
               <a:t>Коэффициенты</a:t>
             </a:r>
-            <a:endParaRPr sz="956" b="0" dirty="0">
+            <a:endParaRPr sz="1100" b="0" dirty="0">
               <a:solidFill>
                 <a:srgbClr val="374151"/>
               </a:solidFill>
@@ -10750,8 +10734,8 @@
         </p:blipFill>
         <p:spPr>
           <a:xfrm>
-            <a:off x="4990975" y="4522470"/>
-            <a:ext cx="133346" cy="80010"/>
+            <a:off x="4838703" y="4432616"/>
+            <a:ext cx="145060" cy="87039"/>
           </a:xfrm>
           <a:prstGeom prst="rect">
             <a:avLst/>
@@ -10766,8 +10750,8 @@
         </p:nvSpPr>
         <p:spPr>
           <a:xfrm>
-            <a:off x="5200519" y="4448175"/>
-            <a:ext cx="1323941" cy="228600"/>
+            <a:off x="5048247" y="4309987"/>
+            <a:ext cx="1440248" cy="299441"/>
           </a:xfrm>
           <a:prstGeom prst="rect">
             <a:avLst/>
@@ -10775,7 +10759,7 @@
           <a:noFill/>
         </p:spPr>
         <p:txBody>
-          <a:bodyPr wrap="none" lIns="73152" tIns="54864" rIns="73152" bIns="54864" anchor="ctr">
+          <a:bodyPr wrap="square" lIns="73152" tIns="54864" rIns="73152" bIns="54864" anchor="ctr">
             <a:spAutoFit/>
           </a:bodyPr>
           <a:lstStyle/>
@@ -10792,7 +10776,7 @@
               </a:spcAft>
             </a:pPr>
             <a:r>
-              <a:rPr sz="956" b="0" dirty="0" err="1">
+              <a:rPr sz="1100" b="0" dirty="0" err="1">
                 <a:solidFill>
                   <a:srgbClr val="374151"/>
                 </a:solidFill>
@@ -10801,7 +10785,7 @@
               <a:t>Формулы</a:t>
             </a:r>
             <a:r>
-              <a:rPr sz="956" b="0" dirty="0">
+              <a:rPr sz="1100" b="0" dirty="0">
                 <a:solidFill>
                   <a:srgbClr val="374151"/>
                 </a:solidFill>
@@ -10810,7 +10794,7 @@
               <a:t> </a:t>
             </a:r>
             <a:r>
-              <a:rPr sz="956" b="0" dirty="0" err="1">
+              <a:rPr sz="1100" b="0" dirty="0" err="1">
                 <a:solidFill>
                   <a:srgbClr val="374151"/>
                 </a:solidFill>
@@ -10818,7 +10802,7 @@
               </a:rPr>
               <a:t>расчета</a:t>
             </a:r>
-            <a:endParaRPr sz="956" b="0" dirty="0">
+            <a:endParaRPr sz="1100" b="0" dirty="0">
               <a:solidFill>
                 <a:srgbClr val="374151"/>
               </a:solidFill>
@@ -10845,7 +10829,7 @@
         </p:blipFill>
         <p:spPr>
           <a:xfrm>
-            <a:off x="7915077" y="3317206"/>
+            <a:off x="7949468" y="3183968"/>
             <a:ext cx="457188" cy="318836"/>
           </a:xfrm>
           <a:prstGeom prst="rect">
@@ -10861,8 +10845,8 @@
         </p:nvSpPr>
         <p:spPr>
           <a:xfrm>
-            <a:off x="8858028" y="2047874"/>
-            <a:ext cx="2666933" cy="2857500"/>
+            <a:off x="8705756" y="1958021"/>
+            <a:ext cx="2901220" cy="3062008"/>
           </a:xfrm>
           <a:prstGeom prst="roundRect">
             <a:avLst>
@@ -10917,8 +10901,8 @@
         </p:nvSpPr>
         <p:spPr>
           <a:xfrm>
-            <a:off x="9886702" y="2314575"/>
-            <a:ext cx="609584" cy="609600"/>
+            <a:off x="9870746" y="2171732"/>
+            <a:ext cx="663135" cy="653228"/>
           </a:xfrm>
           <a:prstGeom prst="roundRect">
             <a:avLst>
@@ -10973,8 +10957,8 @@
         </p:blipFill>
         <p:spPr>
           <a:xfrm>
-            <a:off x="10020049" y="2486353"/>
-            <a:ext cx="342891" cy="266043"/>
+            <a:off x="10004094" y="2343510"/>
+            <a:ext cx="373014" cy="289415"/>
           </a:xfrm>
           <a:prstGeom prst="rect">
             <a:avLst/>
@@ -10989,8 +10973,8 @@
         </p:nvSpPr>
         <p:spPr>
           <a:xfrm>
-            <a:off x="9086622" y="3076574"/>
-            <a:ext cx="2209744" cy="342900"/>
+            <a:off x="8934349" y="2973115"/>
+            <a:ext cx="2403867" cy="391646"/>
           </a:xfrm>
           <a:prstGeom prst="rect">
             <a:avLst/>
@@ -10998,7 +10982,7 @@
           <a:noFill/>
         </p:spPr>
         <p:txBody>
-          <a:bodyPr wrap="none" lIns="73152" tIns="54864" rIns="73152" bIns="54864" anchor="ctr">
+          <a:bodyPr wrap="square" lIns="73152" tIns="54864" rIns="73152" bIns="54864" anchor="ctr">
             <a:spAutoFit/>
           </a:bodyPr>
           <a:lstStyle/>
@@ -11015,7 +10999,7 @@
               </a:spcAft>
             </a:pPr>
             <a:r>
-              <a:rPr sz="1435" b="1" dirty="0" err="1">
+              <a:rPr b="1" dirty="0" err="1">
                 <a:solidFill>
                   <a:srgbClr val="0D47A1"/>
                 </a:solidFill>
@@ -11023,7 +11007,7 @@
               </a:rPr>
               <a:t>Результат</a:t>
             </a:r>
-            <a:endParaRPr sz="1435" b="1" dirty="0">
+            <a:endParaRPr b="1" dirty="0">
               <a:solidFill>
                 <a:srgbClr val="0D47A1"/>
               </a:solidFill>
@@ -11050,8 +11034,8 @@
         </p:blipFill>
         <p:spPr>
           <a:xfrm>
-            <a:off x="9086622" y="3608070"/>
-            <a:ext cx="133346" cy="80010"/>
+            <a:off x="8934350" y="3518216"/>
+            <a:ext cx="145060" cy="87039"/>
           </a:xfrm>
           <a:prstGeom prst="rect">
             <a:avLst/>
@@ -11066,8 +11050,8 @@
         </p:nvSpPr>
         <p:spPr>
           <a:xfrm>
-            <a:off x="9296167" y="3533774"/>
-            <a:ext cx="1190595" cy="228600"/>
+            <a:off x="9143895" y="3395586"/>
+            <a:ext cx="1295187" cy="299441"/>
           </a:xfrm>
           <a:prstGeom prst="rect">
             <a:avLst/>
@@ -11075,7 +11059,7 @@
           <a:noFill/>
         </p:spPr>
         <p:txBody>
-          <a:bodyPr wrap="none" lIns="73152" tIns="54864" rIns="73152" bIns="54864" anchor="ctr">
+          <a:bodyPr wrap="square" lIns="73152" tIns="54864" rIns="73152" bIns="54864" anchor="ctr">
             <a:spAutoFit/>
           </a:bodyPr>
           <a:lstStyle/>
@@ -11092,7 +11076,7 @@
               </a:spcAft>
             </a:pPr>
             <a:r>
-              <a:rPr sz="956" b="0" dirty="0" err="1">
+              <a:rPr sz="1100" b="0" dirty="0" err="1">
                 <a:solidFill>
                   <a:srgbClr val="374151"/>
                 </a:solidFill>
@@ -11101,7 +11085,7 @@
               <a:t>Вероятность</a:t>
             </a:r>
             <a:r>
-              <a:rPr sz="956" b="0" dirty="0">
+              <a:rPr sz="1100" b="0" dirty="0">
                 <a:solidFill>
                   <a:srgbClr val="374151"/>
                 </a:solidFill>
@@ -11130,8 +11114,8 @@
         </p:blipFill>
         <p:spPr>
           <a:xfrm>
-            <a:off x="9086622" y="3912870"/>
-            <a:ext cx="133346" cy="80010"/>
+            <a:off x="8934350" y="3823016"/>
+            <a:ext cx="145060" cy="87039"/>
           </a:xfrm>
           <a:prstGeom prst="rect">
             <a:avLst/>
@@ -11146,8 +11130,8 @@
         </p:nvSpPr>
         <p:spPr>
           <a:xfrm>
-            <a:off x="9296167" y="3838574"/>
-            <a:ext cx="1085822" cy="228600"/>
+            <a:off x="9143895" y="3700386"/>
+            <a:ext cx="1181210" cy="299441"/>
           </a:xfrm>
           <a:prstGeom prst="rect">
             <a:avLst/>
@@ -11155,7 +11139,7 @@
           <a:noFill/>
         </p:spPr>
         <p:txBody>
-          <a:bodyPr wrap="none" lIns="73152" tIns="54864" rIns="73152" bIns="54864" anchor="ctr">
+          <a:bodyPr wrap="square" lIns="73152" tIns="54864" rIns="73152" bIns="54864" anchor="ctr">
             <a:spAutoFit/>
           </a:bodyPr>
           <a:lstStyle/>
@@ -11172,7 +11156,7 @@
               </a:spcAft>
             </a:pPr>
             <a:r>
-              <a:rPr sz="956" b="0" dirty="0" err="1">
+              <a:rPr sz="1100" b="0" dirty="0" err="1">
                 <a:solidFill>
                   <a:srgbClr val="374151"/>
                 </a:solidFill>
@@ -11181,7 +11165,7 @@
               <a:t>Уровень</a:t>
             </a:r>
             <a:r>
-              <a:rPr sz="956" b="0" dirty="0">
+              <a:rPr sz="1100" b="0" dirty="0">
                 <a:solidFill>
                   <a:srgbClr val="374151"/>
                 </a:solidFill>
@@ -11190,7 +11174,7 @@
               <a:t> </a:t>
             </a:r>
             <a:r>
-              <a:rPr sz="956" b="0" dirty="0" err="1">
+              <a:rPr sz="1100" b="0" dirty="0" err="1">
                 <a:solidFill>
                   <a:srgbClr val="374151"/>
                 </a:solidFill>
@@ -11198,7 +11182,7 @@
               </a:rPr>
               <a:t>риска</a:t>
             </a:r>
-            <a:endParaRPr sz="956" b="0" dirty="0">
+            <a:endParaRPr sz="1100" b="0" dirty="0">
               <a:solidFill>
                 <a:srgbClr val="374151"/>
               </a:solidFill>
@@ -11225,8 +11209,8 @@
         </p:blipFill>
         <p:spPr>
           <a:xfrm>
-            <a:off x="9086622" y="4217670"/>
-            <a:ext cx="133346" cy="80010"/>
+            <a:off x="8934350" y="4127816"/>
+            <a:ext cx="145060" cy="87039"/>
           </a:xfrm>
           <a:prstGeom prst="rect">
             <a:avLst/>
@@ -11241,8 +11225,8 @@
         </p:nvSpPr>
         <p:spPr>
           <a:xfrm>
-            <a:off x="9296167" y="4143375"/>
-            <a:ext cx="1047723" cy="228600"/>
+            <a:off x="9143895" y="4005187"/>
+            <a:ext cx="1139764" cy="299441"/>
           </a:xfrm>
           <a:prstGeom prst="rect">
             <a:avLst/>
@@ -11250,7 +11234,7 @@
           <a:noFill/>
         </p:spPr>
         <p:txBody>
-          <a:bodyPr wrap="none" lIns="73152" tIns="54864" rIns="73152" bIns="54864" anchor="ctr">
+          <a:bodyPr wrap="square" lIns="73152" tIns="54864" rIns="73152" bIns="54864" anchor="ctr">
             <a:spAutoFit/>
           </a:bodyPr>
           <a:lstStyle/>
@@ -11267,7 +11251,7 @@
               </a:spcAft>
             </a:pPr>
             <a:r>
-              <a:rPr sz="956" b="0" dirty="0" err="1">
+              <a:rPr sz="1100" b="0" dirty="0" err="1">
                 <a:solidFill>
                   <a:srgbClr val="374151"/>
                 </a:solidFill>
@@ -11275,7 +11259,7 @@
               </a:rPr>
               <a:t>Визуализация</a:t>
             </a:r>
-            <a:endParaRPr sz="956" b="0" dirty="0">
+            <a:endParaRPr sz="1100" b="0" dirty="0">
               <a:solidFill>
                 <a:srgbClr val="374151"/>
               </a:solidFill>
@@ -11302,8 +11286,8 @@
         </p:blipFill>
         <p:spPr>
           <a:xfrm>
-            <a:off x="9086622" y="4522470"/>
-            <a:ext cx="133346" cy="80010"/>
+            <a:off x="8934350" y="4432616"/>
+            <a:ext cx="145060" cy="87039"/>
           </a:xfrm>
           <a:prstGeom prst="rect">
             <a:avLst/>
@@ -11318,8 +11302,8 @@
         </p:nvSpPr>
         <p:spPr>
           <a:xfrm>
-            <a:off x="9296167" y="4448175"/>
-            <a:ext cx="1095347" cy="228600"/>
+            <a:off x="9143895" y="4309987"/>
+            <a:ext cx="1191572" cy="299441"/>
           </a:xfrm>
           <a:prstGeom prst="rect">
             <a:avLst/>
@@ -11327,7 +11311,7 @@
           <a:noFill/>
         </p:spPr>
         <p:txBody>
-          <a:bodyPr wrap="none" lIns="73152" tIns="54864" rIns="73152" bIns="54864" anchor="ctr">
+          <a:bodyPr wrap="square" lIns="73152" tIns="54864" rIns="73152" bIns="54864" anchor="ctr">
             <a:spAutoFit/>
           </a:bodyPr>
           <a:lstStyle/>
@@ -11344,7 +11328,7 @@
               </a:spcAft>
             </a:pPr>
             <a:r>
-              <a:rPr sz="956" b="0" dirty="0" err="1">
+              <a:rPr sz="1100" b="0" dirty="0" err="1">
                 <a:solidFill>
                   <a:srgbClr val="374151"/>
                 </a:solidFill>
@@ -11352,7 +11336,7 @@
               </a:rPr>
               <a:t>Рекомендации</a:t>
             </a:r>
-            <a:endParaRPr sz="956" b="0" dirty="0">
+            <a:endParaRPr sz="1100" b="0" dirty="0">
               <a:solidFill>
                 <a:srgbClr val="374151"/>
               </a:solidFill>
@@ -11740,18 +11724,63 @@
       </p:sp>
       <p:sp>
         <p:nvSpPr>
-          <p:cNvPr id="6" name="Rounded Rectangle 5"/>
+          <p:cNvPr id="11" name="TextBox 10"/>
+          <p:cNvSpPr txBox="1"/>
+          <p:nvPr/>
+        </p:nvSpPr>
+        <p:spPr>
+          <a:xfrm>
+            <a:off x="8704366" y="1615263"/>
+            <a:ext cx="2762180" cy="497637"/>
+          </a:xfrm>
+          <a:prstGeom prst="rect">
+            <a:avLst/>
+          </a:prstGeom>
+          <a:noFill/>
+        </p:spPr>
+        <p:txBody>
+          <a:bodyPr wrap="square" lIns="73152" tIns="54864" rIns="73152" bIns="54864" anchor="ctr">
+            <a:spAutoFit/>
+          </a:bodyPr>
+          <a:lstStyle/>
+          <a:p>
+            <a:pPr algn="l">
+              <a:lnSpc>
+                <a:spcPts val="1560"/>
+              </a:lnSpc>
+              <a:spcBef>
+                <a:spcPts val="0"/>
+              </a:spcBef>
+              <a:spcAft>
+                <a:spcPts val="0"/>
+              </a:spcAft>
+            </a:pPr>
+            <a:r>
+              <a:rPr lang="en-US" sz="956" b="0" noProof="1">
+                <a:solidFill>
+                  <a:srgbClr val="4B5563"/>
+                </a:solidFill>
+                <a:latin typeface="Noto Sans"/>
+              </a:rPr>
+              <a:t>Удобная форма для заполнения медицинских показателей и привычек</a:t>
+            </a:r>
+          </a:p>
+        </p:txBody>
+      </p:sp>
+      <p:sp>
+        <p:nvSpPr>
+          <p:cNvPr id="12" name="Rounded Rectangle 11"/>
           <p:cNvSpPr/>
           <p:nvPr/>
         </p:nvSpPr>
         <p:spPr>
           <a:xfrm>
-            <a:off x="7866187" y="978257"/>
+            <a:off x="7866187" y="3056057"/>
             <a:ext cx="3790855" cy="1419225"/>
           </a:xfrm>
           <a:prstGeom prst="roundRect">
             <a:avLst>
-              <a:gd name="adj" fmla="val 15475"/>
+              <a:gd name="adj" fmla="val 16107"/>
             </a:avLst>
           </a:prstGeom>
           <a:gradFill rotWithShape="1">
@@ -11794,227 +11823,18 @@
       </p:sp>
       <p:sp>
         <p:nvSpPr>
-          <p:cNvPr id="7" name="Round Same Side Corner Rectangle 6"/>
+          <p:cNvPr id="18" name="Rounded Rectangle 17"/>
           <p:cNvSpPr/>
           <p:nvPr/>
         </p:nvSpPr>
         <p:spPr>
-          <a:xfrm rot="16200000">
-            <a:off x="7222615" y="1621829"/>
-            <a:ext cx="1419225" cy="132080"/>
-          </a:xfrm>
-          <a:prstGeom prst="round2SameRect">
-            <a:avLst>
-              <a:gd name="adj1" fmla="val 50000"/>
-              <a:gd name="adj2" fmla="val 0"/>
-            </a:avLst>
-          </a:prstGeom>
-          <a:solidFill>
-            <a:srgbClr val="4FC3F7"/>
-          </a:solidFill>
-          <a:ln>
-            <a:noFill/>
-          </a:ln>
-        </p:spPr>
-        <p:style>
-          <a:lnRef idx="1">
-            <a:schemeClr val="accent1"/>
-          </a:lnRef>
-          <a:fillRef idx="3">
-            <a:schemeClr val="accent1"/>
-          </a:fillRef>
-          <a:effectRef idx="2">
-            <a:schemeClr val="accent1"/>
-          </a:effectRef>
-          <a:fontRef idx="minor">
-            <a:schemeClr val="lt1"/>
-          </a:fontRef>
-        </p:style>
-        <p:txBody>
-          <a:bodyPr rtlCol="0" anchor="ctr"/>
-          <a:lstStyle/>
-          <a:p>
-            <a:pPr algn="ctr"/>
-            <a:endParaRPr lang="en-US" noProof="1"/>
-          </a:p>
-        </p:txBody>
-      </p:sp>
-      <p:sp>
-        <p:nvSpPr>
-          <p:cNvPr id="8" name="Rounded Rectangle 7"/>
-          <p:cNvSpPr/>
-          <p:nvPr/>
-        </p:nvSpPr>
-        <p:spPr>
-          <a:xfrm>
-            <a:off x="8094781" y="1168756"/>
-            <a:ext cx="457188" cy="457200"/>
+          <a:xfrm>
+            <a:off x="7866187" y="4665781"/>
+            <a:ext cx="3790855" cy="1190625"/>
           </a:xfrm>
           <a:prstGeom prst="roundRect">
             <a:avLst>
-              <a:gd name="adj" fmla="val 33333"/>
-            </a:avLst>
-          </a:prstGeom>
-          <a:solidFill>
-            <a:srgbClr val="4FC3F7"/>
-          </a:solidFill>
-          <a:ln>
-            <a:noFill/>
-          </a:ln>
-        </p:spPr>
-        <p:style>
-          <a:lnRef idx="1">
-            <a:schemeClr val="accent1"/>
-          </a:lnRef>
-          <a:fillRef idx="3">
-            <a:schemeClr val="accent1"/>
-          </a:fillRef>
-          <a:effectRef idx="2">
-            <a:schemeClr val="accent1"/>
-          </a:effectRef>
-          <a:fontRef idx="minor">
-            <a:schemeClr val="lt1"/>
-          </a:fontRef>
-        </p:style>
-        <p:txBody>
-          <a:bodyPr rtlCol="0" anchor="ctr"/>
-          <a:lstStyle/>
-          <a:p>
-            <a:pPr algn="ctr"/>
-            <a:endParaRPr lang="en-US" noProof="1"/>
-          </a:p>
-        </p:txBody>
-      </p:sp>
-      <p:pic>
-        <p:nvPicPr>
-          <p:cNvPr id="9" name="Picture 8" descr="image.png"/>
-          <p:cNvPicPr>
-            <a:picLocks noChangeAspect="1"/>
-          </p:cNvPicPr>
-          <p:nvPr/>
-        </p:nvPicPr>
-        <p:blipFill>
-          <a:blip r:embed="rId3">
-            <a:alphaModFix/>
-          </a:blip>
-          <a:stretch>
-            <a:fillRect/>
-          </a:stretch>
-        </p:blipFill>
-        <p:spPr>
-          <a:xfrm>
-            <a:off x="8209079" y="1321633"/>
-            <a:ext cx="228594" cy="151447"/>
-          </a:xfrm>
-          <a:prstGeom prst="rect">
-            <a:avLst/>
-          </a:prstGeom>
-        </p:spPr>
-      </p:pic>
-      <p:sp>
-        <p:nvSpPr>
-          <p:cNvPr id="10" name="TextBox 9"/>
-          <p:cNvSpPr txBox="1"/>
-          <p:nvPr/>
-        </p:nvSpPr>
-        <p:spPr>
-          <a:xfrm>
-            <a:off x="8704366" y="1147761"/>
-            <a:ext cx="1308307" cy="356316"/>
-          </a:xfrm>
-          <a:prstGeom prst="rect">
-            <a:avLst/>
-          </a:prstGeom>
-          <a:noFill/>
-        </p:spPr>
-        <p:txBody>
-          <a:bodyPr wrap="none" lIns="73152" tIns="54864" rIns="73152" bIns="54864" anchor="ctr">
-            <a:spAutoFit/>
-          </a:bodyPr>
-          <a:lstStyle/>
-          <a:p>
-            <a:pPr algn="l">
-              <a:lnSpc>
-                <a:spcPts val="2145"/>
-              </a:lnSpc>
-              <a:spcBef>
-                <a:spcPts val="0"/>
-              </a:spcBef>
-              <a:spcAft>
-                <a:spcPts val="260"/>
-              </a:spcAft>
-            </a:pPr>
-            <a:r>
-              <a:rPr lang="en-US" sz="1315" b="1" noProof="1">
-                <a:solidFill>
-                  <a:srgbClr val="0D47A1"/>
-                </a:solidFill>
-                <a:latin typeface="Noto Sans"/>
-              </a:rPr>
-              <a:t>Ввод данных</a:t>
-            </a:r>
-          </a:p>
-        </p:txBody>
-      </p:sp>
-      <p:sp>
-        <p:nvSpPr>
-          <p:cNvPr id="11" name="TextBox 10"/>
-          <p:cNvSpPr txBox="1"/>
-          <p:nvPr/>
-        </p:nvSpPr>
-        <p:spPr>
-          <a:xfrm>
-            <a:off x="8704366" y="1615263"/>
-            <a:ext cx="2762180" cy="497637"/>
-          </a:xfrm>
-          <a:prstGeom prst="rect">
-            <a:avLst/>
-          </a:prstGeom>
-          <a:noFill/>
-        </p:spPr>
-        <p:txBody>
-          <a:bodyPr wrap="square" lIns="73152" tIns="54864" rIns="73152" bIns="54864" anchor="ctr">
-            <a:spAutoFit/>
-          </a:bodyPr>
-          <a:lstStyle/>
-          <a:p>
-            <a:pPr algn="l">
-              <a:lnSpc>
-                <a:spcPts val="1560"/>
-              </a:lnSpc>
-              <a:spcBef>
-                <a:spcPts val="0"/>
-              </a:spcBef>
-              <a:spcAft>
-                <a:spcPts val="0"/>
-              </a:spcAft>
-            </a:pPr>
-            <a:r>
-              <a:rPr lang="en-US" sz="956" b="0" noProof="1">
-                <a:solidFill>
-                  <a:srgbClr val="4B5563"/>
-                </a:solidFill>
-                <a:latin typeface="Noto Sans"/>
-              </a:rPr>
-              <a:t>Удобная форма для заполнения медицинских показателей и привычек</a:t>
-            </a:r>
-          </a:p>
-        </p:txBody>
-      </p:sp>
-      <p:sp>
-        <p:nvSpPr>
-          <p:cNvPr id="12" name="Rounded Rectangle 11"/>
-          <p:cNvSpPr/>
-          <p:nvPr/>
-        </p:nvSpPr>
-        <p:spPr>
-          <a:xfrm>
-            <a:off x="7866187" y="2587982"/>
-            <a:ext cx="3790855" cy="1419225"/>
-          </a:xfrm>
-          <a:prstGeom prst="roundRect">
-            <a:avLst>
-              <a:gd name="adj" fmla="val 16107"/>
+              <a:gd name="adj" fmla="val 19200"/>
             </a:avLst>
           </a:prstGeom>
           <a:gradFill rotWithShape="1">
@@ -12057,177 +11877,13 @@
       </p:sp>
       <p:sp>
         <p:nvSpPr>
-          <p:cNvPr id="13" name="Round Same Side Corner Rectangle 12"/>
-          <p:cNvSpPr/>
-          <p:nvPr/>
-        </p:nvSpPr>
-        <p:spPr>
-          <a:xfrm rot="16200000">
-            <a:off x="7222615" y="3231554"/>
-            <a:ext cx="1419225" cy="132080"/>
-          </a:xfrm>
-          <a:prstGeom prst="round2SameRect">
-            <a:avLst>
-              <a:gd name="adj1" fmla="val 50000"/>
-              <a:gd name="adj2" fmla="val 0"/>
-            </a:avLst>
-          </a:prstGeom>
-          <a:solidFill>
-            <a:srgbClr val="0D47A1"/>
-          </a:solidFill>
-          <a:ln>
-            <a:noFill/>
-          </a:ln>
-        </p:spPr>
-        <p:style>
-          <a:lnRef idx="1">
-            <a:schemeClr val="accent1"/>
-          </a:lnRef>
-          <a:fillRef idx="3">
-            <a:schemeClr val="accent1"/>
-          </a:fillRef>
-          <a:effectRef idx="2">
-            <a:schemeClr val="accent1"/>
-          </a:effectRef>
-          <a:fontRef idx="minor">
-            <a:schemeClr val="lt1"/>
-          </a:fontRef>
-        </p:style>
-        <p:txBody>
-          <a:bodyPr rtlCol="0" anchor="ctr"/>
-          <a:lstStyle/>
-          <a:p>
-            <a:pPr algn="ctr"/>
-            <a:endParaRPr lang="en-US" noProof="1"/>
-          </a:p>
-        </p:txBody>
-      </p:sp>
-      <p:sp>
-        <p:nvSpPr>
-          <p:cNvPr id="14" name="Rounded Rectangle 13"/>
-          <p:cNvSpPr/>
-          <p:nvPr/>
-        </p:nvSpPr>
-        <p:spPr>
-          <a:xfrm>
-            <a:off x="8094781" y="2778481"/>
-            <a:ext cx="457188" cy="457200"/>
-          </a:xfrm>
-          <a:prstGeom prst="roundRect">
-            <a:avLst>
-              <a:gd name="adj" fmla="val 33333"/>
-            </a:avLst>
-          </a:prstGeom>
-          <a:solidFill>
-            <a:srgbClr val="0D47A1"/>
-          </a:solidFill>
-          <a:ln>
-            <a:noFill/>
-          </a:ln>
-        </p:spPr>
-        <p:style>
-          <a:lnRef idx="1">
-            <a:schemeClr val="accent1"/>
-          </a:lnRef>
-          <a:fillRef idx="3">
-            <a:schemeClr val="accent1"/>
-          </a:fillRef>
-          <a:effectRef idx="2">
-            <a:schemeClr val="accent1"/>
-          </a:effectRef>
-          <a:fontRef idx="minor">
-            <a:schemeClr val="lt1"/>
-          </a:fontRef>
-        </p:style>
-        <p:txBody>
-          <a:bodyPr rtlCol="0" anchor="ctr"/>
-          <a:lstStyle/>
-          <a:p>
-            <a:pPr algn="ctr"/>
-            <a:endParaRPr lang="en-US" noProof="1"/>
-          </a:p>
-        </p:txBody>
-      </p:sp>
-      <p:pic>
-        <p:nvPicPr>
-          <p:cNvPr id="15" name="Picture 14" descr="image.png"/>
-          <p:cNvPicPr>
-            <a:picLocks noChangeAspect="1"/>
-          </p:cNvPicPr>
-          <p:nvPr/>
-        </p:nvPicPr>
-        <p:blipFill>
-          <a:blip r:embed="rId4">
-            <a:alphaModFix/>
-          </a:blip>
-          <a:stretch>
-            <a:fillRect/>
-          </a:stretch>
-        </p:blipFill>
-        <p:spPr>
-          <a:xfrm>
-            <a:off x="8209079" y="2918499"/>
-            <a:ext cx="228594" cy="177164"/>
-          </a:xfrm>
-          <a:prstGeom prst="rect">
-            <a:avLst/>
-          </a:prstGeom>
-        </p:spPr>
-      </p:pic>
-      <p:sp>
-        <p:nvSpPr>
-          <p:cNvPr id="16" name="TextBox 15"/>
+          <p:cNvPr id="23" name="TextBox 22"/>
           <p:cNvSpPr txBox="1"/>
           <p:nvPr/>
         </p:nvSpPr>
         <p:spPr>
           <a:xfrm>
-            <a:off x="8704366" y="2757486"/>
-            <a:ext cx="1941494" cy="356316"/>
-          </a:xfrm>
-          <a:prstGeom prst="rect">
-            <a:avLst/>
-          </a:prstGeom>
-          <a:noFill/>
-        </p:spPr>
-        <p:txBody>
-          <a:bodyPr wrap="none" lIns="73152" tIns="54864" rIns="73152" bIns="54864" anchor="ctr">
-            <a:spAutoFit/>
-          </a:bodyPr>
-          <a:lstStyle/>
-          <a:p>
-            <a:pPr algn="l">
-              <a:lnSpc>
-                <a:spcPts val="2145"/>
-              </a:lnSpc>
-              <a:spcBef>
-                <a:spcPts val="0"/>
-              </a:spcBef>
-              <a:spcAft>
-                <a:spcPts val="260"/>
-              </a:spcAft>
-            </a:pPr>
-            <a:r>
-              <a:rPr lang="en-US" sz="1315" b="1" noProof="1">
-                <a:solidFill>
-                  <a:srgbClr val="0D47A1"/>
-                </a:solidFill>
-                <a:latin typeface="Noto Sans"/>
-              </a:rPr>
-              <a:t>Мгновенный расчет</a:t>
-            </a:r>
-          </a:p>
-        </p:txBody>
-      </p:sp>
-      <p:sp>
-        <p:nvSpPr>
-          <p:cNvPr id="17" name="TextBox 16"/>
-          <p:cNvSpPr txBox="1"/>
-          <p:nvPr/>
-        </p:nvSpPr>
-        <p:spPr>
-          <a:xfrm>
-            <a:off x="8704366" y="3224988"/>
+            <a:off x="8704366" y="5188488"/>
             <a:ext cx="2762180" cy="497637"/>
           </a:xfrm>
           <a:prstGeom prst="rect">
@@ -12259,25 +11915,68 @@
                 </a:solidFill>
                 <a:latin typeface="Noto Sans"/>
               </a:rPr>
-              <a:t>Быстрый анализ данных и вычисление вероятности заболеваний</a:t>
-            </a:r>
-          </a:p>
-        </p:txBody>
-      </p:sp>
-      <p:sp>
-        <p:nvSpPr>
-          <p:cNvPr id="18" name="Rounded Rectangle 17"/>
+              <a:t>Интуитивные графики и диаграммы для наглядного отображения рисков</a:t>
+            </a:r>
+          </a:p>
+        </p:txBody>
+      </p:sp>
+      <p:pic>
+        <p:nvPicPr>
+          <p:cNvPr id="30" name="Рисунок 29">
+            <a:extLst>
+              <a:ext uri="{FF2B5EF4-FFF2-40B4-BE49-F238E27FC236}">
+                <a16:creationId xmlns:a16="http://schemas.microsoft.com/office/drawing/2014/main" id="{39311C09-946A-F4F7-095C-0C615EA0856A}"/>
+              </a:ext>
+            </a:extLst>
+          </p:cNvPr>
+          <p:cNvPicPr>
+            <a:picLocks noChangeAspect="1"/>
+          </p:cNvPicPr>
+          <p:nvPr/>
+        </p:nvPicPr>
+        <p:blipFill>
+          <a:blip r:embed="rId3"/>
+          <a:stretch>
+            <a:fillRect/>
+          </a:stretch>
+        </p:blipFill>
+        <p:spPr>
+          <a:xfrm>
+            <a:off x="663335" y="1061209"/>
+            <a:ext cx="5683334" cy="5289148"/>
+          </a:xfrm>
+          <a:prstGeom prst="rect">
+            <a:avLst/>
+          </a:prstGeom>
+          <a:effectLst>
+            <a:outerShdw blurRad="50800" dist="38100" dir="5400000" algn="t" rotWithShape="0">
+              <a:prstClr val="black">
+                <a:alpha val="40000"/>
+              </a:prstClr>
+            </a:outerShdw>
+          </a:effectLst>
+        </p:spPr>
+      </p:pic>
+      <p:sp>
+        <p:nvSpPr>
+          <p:cNvPr id="5" name="Rounded Rectangle 5">
+            <a:extLst>
+              <a:ext uri="{FF2B5EF4-FFF2-40B4-BE49-F238E27FC236}">
+                <a16:creationId xmlns:a16="http://schemas.microsoft.com/office/drawing/2014/main" id="{7234E414-76A5-A0BC-458C-5B3DB508074C}"/>
+              </a:ext>
+            </a:extLst>
+          </p:cNvPr>
           <p:cNvSpPr/>
           <p:nvPr/>
         </p:nvSpPr>
         <p:spPr>
           <a:xfrm>
-            <a:off x="7866187" y="4197706"/>
-            <a:ext cx="3790855" cy="1190625"/>
+            <a:off x="7866187" y="1467327"/>
+            <a:ext cx="3790855" cy="1419225"/>
           </a:xfrm>
           <a:prstGeom prst="roundRect">
             <a:avLst>
-              <a:gd name="adj" fmla="val 19200"/>
+              <a:gd name="adj" fmla="val 15475"/>
             </a:avLst>
           </a:prstGeom>
           <a:gradFill rotWithShape="1">
@@ -12320,14 +12019,20 @@
       </p:sp>
       <p:sp>
         <p:nvSpPr>
-          <p:cNvPr id="19" name="Round Same Side Corner Rectangle 18"/>
+          <p:cNvPr id="31" name="Round Same Side Corner Rectangle 6">
+            <a:extLst>
+              <a:ext uri="{FF2B5EF4-FFF2-40B4-BE49-F238E27FC236}">
+                <a16:creationId xmlns:a16="http://schemas.microsoft.com/office/drawing/2014/main" id="{B3C9ACC0-A99A-F511-4E00-27B8F10A51FA}"/>
+              </a:ext>
+            </a:extLst>
+          </p:cNvPr>
           <p:cNvSpPr/>
           <p:nvPr/>
         </p:nvSpPr>
         <p:spPr>
           <a:xfrm rot="16200000">
-            <a:off x="7336915" y="4726978"/>
-            <a:ext cx="1190625" cy="132080"/>
+            <a:off x="7222615" y="2110899"/>
+            <a:ext cx="1419225" cy="132080"/>
           </a:xfrm>
           <a:prstGeom prst="round2SameRect">
             <a:avLst>
@@ -12367,13 +12072,19 @@
       </p:sp>
       <p:sp>
         <p:nvSpPr>
-          <p:cNvPr id="20" name="Rounded Rectangle 19"/>
+          <p:cNvPr id="32" name="Rounded Rectangle 7">
+            <a:extLst>
+              <a:ext uri="{FF2B5EF4-FFF2-40B4-BE49-F238E27FC236}">
+                <a16:creationId xmlns:a16="http://schemas.microsoft.com/office/drawing/2014/main" id="{7B0E853A-59C5-974D-4FF9-B2F5AEE4D805}"/>
+              </a:ext>
+            </a:extLst>
+          </p:cNvPr>
           <p:cNvSpPr/>
           <p:nvPr/>
         </p:nvSpPr>
         <p:spPr>
           <a:xfrm>
-            <a:off x="8094781" y="4388207"/>
+            <a:off x="8094781" y="1657826"/>
             <a:ext cx="457188" cy="457200"/>
           </a:xfrm>
           <a:prstGeom prst="roundRect">
@@ -12413,7 +12124,252 @@
       </p:sp>
       <p:pic>
         <p:nvPicPr>
-          <p:cNvPr id="21" name="Picture 20" descr="image.png"/>
+          <p:cNvPr id="33" name="Picture 8" descr="image.png">
+            <a:extLst>
+              <a:ext uri="{FF2B5EF4-FFF2-40B4-BE49-F238E27FC236}">
+                <a16:creationId xmlns:a16="http://schemas.microsoft.com/office/drawing/2014/main" id="{B6F756D0-0421-45BA-CC0B-605DCD1086B6}"/>
+              </a:ext>
+            </a:extLst>
+          </p:cNvPr>
+          <p:cNvPicPr>
+            <a:picLocks noChangeAspect="1"/>
+          </p:cNvPicPr>
+          <p:nvPr/>
+        </p:nvPicPr>
+        <p:blipFill>
+          <a:blip r:embed="rId4">
+            <a:alphaModFix/>
+          </a:blip>
+          <a:stretch>
+            <a:fillRect/>
+          </a:stretch>
+        </p:blipFill>
+        <p:spPr>
+          <a:xfrm>
+            <a:off x="8209079" y="1810703"/>
+            <a:ext cx="228594" cy="151447"/>
+          </a:xfrm>
+          <a:prstGeom prst="rect">
+            <a:avLst/>
+          </a:prstGeom>
+        </p:spPr>
+      </p:pic>
+      <p:sp>
+        <p:nvSpPr>
+          <p:cNvPr id="34" name="TextBox 33">
+            <a:extLst>
+              <a:ext uri="{FF2B5EF4-FFF2-40B4-BE49-F238E27FC236}">
+                <a16:creationId xmlns:a16="http://schemas.microsoft.com/office/drawing/2014/main" id="{9C4E7187-4B7A-A67B-5674-3D570B5F0547}"/>
+              </a:ext>
+            </a:extLst>
+          </p:cNvPr>
+          <p:cNvSpPr txBox="1"/>
+          <p:nvPr/>
+        </p:nvSpPr>
+        <p:spPr>
+          <a:xfrm>
+            <a:off x="8704366" y="1636831"/>
+            <a:ext cx="1308307" cy="356316"/>
+          </a:xfrm>
+          <a:prstGeom prst="rect">
+            <a:avLst/>
+          </a:prstGeom>
+          <a:noFill/>
+        </p:spPr>
+        <p:txBody>
+          <a:bodyPr wrap="none" lIns="73152" tIns="54864" rIns="73152" bIns="54864" anchor="ctr">
+            <a:spAutoFit/>
+          </a:bodyPr>
+          <a:lstStyle/>
+          <a:p>
+            <a:pPr algn="l">
+              <a:lnSpc>
+                <a:spcPts val="2145"/>
+              </a:lnSpc>
+              <a:spcBef>
+                <a:spcPts val="0"/>
+              </a:spcBef>
+              <a:spcAft>
+                <a:spcPts val="260"/>
+              </a:spcAft>
+            </a:pPr>
+            <a:r>
+              <a:rPr lang="en-US" sz="1315" b="1" noProof="1">
+                <a:solidFill>
+                  <a:srgbClr val="0D47A1"/>
+                </a:solidFill>
+                <a:latin typeface="Noto Sans"/>
+              </a:rPr>
+              <a:t>Ввод данных</a:t>
+            </a:r>
+          </a:p>
+        </p:txBody>
+      </p:sp>
+      <p:sp>
+        <p:nvSpPr>
+          <p:cNvPr id="35" name="TextBox 34">
+            <a:extLst>
+              <a:ext uri="{FF2B5EF4-FFF2-40B4-BE49-F238E27FC236}">
+                <a16:creationId xmlns:a16="http://schemas.microsoft.com/office/drawing/2014/main" id="{DAAFA252-032D-4766-659B-EFF666C402BE}"/>
+              </a:ext>
+            </a:extLst>
+          </p:cNvPr>
+          <p:cNvSpPr txBox="1"/>
+          <p:nvPr/>
+        </p:nvSpPr>
+        <p:spPr>
+          <a:xfrm>
+            <a:off x="8704366" y="2104333"/>
+            <a:ext cx="2762180" cy="497637"/>
+          </a:xfrm>
+          <a:prstGeom prst="rect">
+            <a:avLst/>
+          </a:prstGeom>
+          <a:noFill/>
+        </p:spPr>
+        <p:txBody>
+          <a:bodyPr wrap="square" lIns="73152" tIns="54864" rIns="73152" bIns="54864" anchor="ctr">
+            <a:spAutoFit/>
+          </a:bodyPr>
+          <a:lstStyle/>
+          <a:p>
+            <a:pPr algn="l">
+              <a:lnSpc>
+                <a:spcPts val="1560"/>
+              </a:lnSpc>
+              <a:spcBef>
+                <a:spcPts val="0"/>
+              </a:spcBef>
+              <a:spcAft>
+                <a:spcPts val="0"/>
+              </a:spcAft>
+            </a:pPr>
+            <a:r>
+              <a:rPr lang="en-US" sz="956" b="0" noProof="1">
+                <a:solidFill>
+                  <a:srgbClr val="4B5563"/>
+                </a:solidFill>
+                <a:latin typeface="Noto Sans"/>
+              </a:rPr>
+              <a:t>Удобная форма для заполнения медицинских показателей и привычек</a:t>
+            </a:r>
+          </a:p>
+        </p:txBody>
+      </p:sp>
+      <p:sp>
+        <p:nvSpPr>
+          <p:cNvPr id="36" name="Round Same Side Corner Rectangle 12">
+            <a:extLst>
+              <a:ext uri="{FF2B5EF4-FFF2-40B4-BE49-F238E27FC236}">
+                <a16:creationId xmlns:a16="http://schemas.microsoft.com/office/drawing/2014/main" id="{12816912-960E-4F65-4CF4-A638058A58D7}"/>
+              </a:ext>
+            </a:extLst>
+          </p:cNvPr>
+          <p:cNvSpPr/>
+          <p:nvPr/>
+        </p:nvSpPr>
+        <p:spPr>
+          <a:xfrm rot="16200000">
+            <a:off x="7222615" y="3720624"/>
+            <a:ext cx="1419225" cy="132080"/>
+          </a:xfrm>
+          <a:prstGeom prst="round2SameRect">
+            <a:avLst>
+              <a:gd name="adj1" fmla="val 50000"/>
+              <a:gd name="adj2" fmla="val 0"/>
+            </a:avLst>
+          </a:prstGeom>
+          <a:solidFill>
+            <a:srgbClr val="0D47A1"/>
+          </a:solidFill>
+          <a:ln>
+            <a:noFill/>
+          </a:ln>
+        </p:spPr>
+        <p:style>
+          <a:lnRef idx="1">
+            <a:schemeClr val="accent1"/>
+          </a:lnRef>
+          <a:fillRef idx="3">
+            <a:schemeClr val="accent1"/>
+          </a:fillRef>
+          <a:effectRef idx="2">
+            <a:schemeClr val="accent1"/>
+          </a:effectRef>
+          <a:fontRef idx="minor">
+            <a:schemeClr val="lt1"/>
+          </a:fontRef>
+        </p:style>
+        <p:txBody>
+          <a:bodyPr rtlCol="0" anchor="ctr"/>
+          <a:lstStyle/>
+          <a:p>
+            <a:pPr algn="ctr"/>
+            <a:endParaRPr lang="en-US" noProof="1"/>
+          </a:p>
+        </p:txBody>
+      </p:sp>
+      <p:sp>
+        <p:nvSpPr>
+          <p:cNvPr id="37" name="Rounded Rectangle 13">
+            <a:extLst>
+              <a:ext uri="{FF2B5EF4-FFF2-40B4-BE49-F238E27FC236}">
+                <a16:creationId xmlns:a16="http://schemas.microsoft.com/office/drawing/2014/main" id="{E8DC637A-6AE6-663F-FBE0-906A7CDFC069}"/>
+              </a:ext>
+            </a:extLst>
+          </p:cNvPr>
+          <p:cNvSpPr/>
+          <p:nvPr/>
+        </p:nvSpPr>
+        <p:spPr>
+          <a:xfrm>
+            <a:off x="8094781" y="3267551"/>
+            <a:ext cx="457188" cy="457200"/>
+          </a:xfrm>
+          <a:prstGeom prst="roundRect">
+            <a:avLst>
+              <a:gd name="adj" fmla="val 33333"/>
+            </a:avLst>
+          </a:prstGeom>
+          <a:solidFill>
+            <a:srgbClr val="0D47A1"/>
+          </a:solidFill>
+          <a:ln>
+            <a:noFill/>
+          </a:ln>
+        </p:spPr>
+        <p:style>
+          <a:lnRef idx="1">
+            <a:schemeClr val="accent1"/>
+          </a:lnRef>
+          <a:fillRef idx="3">
+            <a:schemeClr val="accent1"/>
+          </a:fillRef>
+          <a:effectRef idx="2">
+            <a:schemeClr val="accent1"/>
+          </a:effectRef>
+          <a:fontRef idx="minor">
+            <a:schemeClr val="lt1"/>
+          </a:fontRef>
+        </p:style>
+        <p:txBody>
+          <a:bodyPr rtlCol="0" anchor="ctr"/>
+          <a:lstStyle/>
+          <a:p>
+            <a:pPr algn="ctr"/>
+            <a:endParaRPr lang="en-US" noProof="1"/>
+          </a:p>
+        </p:txBody>
+      </p:sp>
+      <p:pic>
+        <p:nvPicPr>
+          <p:cNvPr id="38" name="Picture 14" descr="image.png">
+            <a:extLst>
+              <a:ext uri="{FF2B5EF4-FFF2-40B4-BE49-F238E27FC236}">
+                <a16:creationId xmlns:a16="http://schemas.microsoft.com/office/drawing/2014/main" id="{45FE45B7-41DA-58B2-0D6E-4FED17A822B0}"/>
+              </a:ext>
+            </a:extLst>
+          </p:cNvPr>
           <p:cNvPicPr>
             <a:picLocks noChangeAspect="1"/>
           </p:cNvPicPr>
@@ -12429,8 +12385,8 @@
         </p:blipFill>
         <p:spPr>
           <a:xfrm>
-            <a:off x="8209079" y="4545369"/>
-            <a:ext cx="228594" cy="142875"/>
+            <a:off x="8209079" y="3407569"/>
+            <a:ext cx="228594" cy="177164"/>
           </a:xfrm>
           <a:prstGeom prst="rect">
             <a:avLst/>
@@ -12439,14 +12395,20 @@
       </p:pic>
       <p:sp>
         <p:nvSpPr>
-          <p:cNvPr id="22" name="TextBox 21"/>
+          <p:cNvPr id="39" name="TextBox 38">
+            <a:extLst>
+              <a:ext uri="{FF2B5EF4-FFF2-40B4-BE49-F238E27FC236}">
+                <a16:creationId xmlns:a16="http://schemas.microsoft.com/office/drawing/2014/main" id="{6F57AFC5-292D-A38B-36BA-3CFEF71BF3D6}"/>
+              </a:ext>
+            </a:extLst>
+          </p:cNvPr>
           <p:cNvSpPr txBox="1"/>
           <p:nvPr/>
         </p:nvSpPr>
         <p:spPr>
           <a:xfrm>
-            <a:off x="8704366" y="4367212"/>
-            <a:ext cx="1438151" cy="356316"/>
+            <a:off x="8704366" y="3246556"/>
+            <a:ext cx="1941494" cy="356316"/>
           </a:xfrm>
           <a:prstGeom prst="rect">
             <a:avLst/>
@@ -12477,20 +12439,26 @@
                 </a:solidFill>
                 <a:latin typeface="Noto Sans"/>
               </a:rPr>
-              <a:t>Визуализация</a:t>
-            </a:r>
-          </a:p>
-        </p:txBody>
-      </p:sp>
-      <p:sp>
-        <p:nvSpPr>
-          <p:cNvPr id="23" name="TextBox 22"/>
+              <a:t>Мгновенный расчет</a:t>
+            </a:r>
+          </a:p>
+        </p:txBody>
+      </p:sp>
+      <p:sp>
+        <p:nvSpPr>
+          <p:cNvPr id="40" name="TextBox 39">
+            <a:extLst>
+              <a:ext uri="{FF2B5EF4-FFF2-40B4-BE49-F238E27FC236}">
+                <a16:creationId xmlns:a16="http://schemas.microsoft.com/office/drawing/2014/main" id="{C4885C42-828B-5756-376E-C4337981E367}"/>
+              </a:ext>
+            </a:extLst>
+          </p:cNvPr>
           <p:cNvSpPr txBox="1"/>
           <p:nvPr/>
         </p:nvSpPr>
         <p:spPr>
           <a:xfrm>
-            <a:off x="8704366" y="4720413"/>
+            <a:off x="8704366" y="3714058"/>
             <a:ext cx="2762180" cy="497637"/>
           </a:xfrm>
           <a:prstGeom prst="rect">
@@ -12522,38 +12490,37 @@
                 </a:solidFill>
                 <a:latin typeface="Noto Sans"/>
               </a:rPr>
-              <a:t>Интуитивные графики и диаграммы для наглядного отображения рисков</a:t>
-            </a:r>
-          </a:p>
-        </p:txBody>
-      </p:sp>
-      <p:sp>
-        <p:nvSpPr>
-          <p:cNvPr id="24" name="Rounded Rectangle 23"/>
+              <a:t>Быстрый анализ данных и вычисление вероятности заболеваний</a:t>
+            </a:r>
+          </a:p>
+        </p:txBody>
+      </p:sp>
+      <p:sp>
+        <p:nvSpPr>
+          <p:cNvPr id="41" name="Round Same Side Corner Rectangle 18">
+            <a:extLst>
+              <a:ext uri="{FF2B5EF4-FFF2-40B4-BE49-F238E27FC236}">
+                <a16:creationId xmlns:a16="http://schemas.microsoft.com/office/drawing/2014/main" id="{AA85C3E9-099D-437E-D772-0E11FBDB1FC6}"/>
+              </a:ext>
+            </a:extLst>
+          </p:cNvPr>
           <p:cNvSpPr/>
           <p:nvPr/>
         </p:nvSpPr>
         <p:spPr>
-          <a:xfrm>
-            <a:off x="7866187" y="5578832"/>
-            <a:ext cx="3790855" cy="1190625"/>
-          </a:xfrm>
-          <a:prstGeom prst="roundRect">
+          <a:xfrm rot="16200000">
+            <a:off x="7336915" y="5216048"/>
+            <a:ext cx="1190625" cy="132080"/>
+          </a:xfrm>
+          <a:prstGeom prst="round2SameRect">
             <a:avLst>
-              <a:gd name="adj" fmla="val 19200"/>
+              <a:gd name="adj1" fmla="val 50000"/>
+              <a:gd name="adj2" fmla="val 0"/>
             </a:avLst>
           </a:prstGeom>
-          <a:gradFill rotWithShape="1">
-            <a:gsLst>
-              <a:gs pos="0">
-                <a:srgbClr val="EFF6FF"/>
-              </a:gs>
-              <a:gs pos="100000">
-                <a:srgbClr val="FFFFFF"/>
-              </a:gs>
-            </a:gsLst>
-            <a:lin ang="10800000" scaled="0"/>
-          </a:gradFill>
+          <a:solidFill>
+            <a:srgbClr val="4FC3F7"/>
+          </a:solidFill>
           <a:ln>
             <a:noFill/>
           </a:ln>
@@ -12583,23 +12550,28 @@
       </p:sp>
       <p:sp>
         <p:nvSpPr>
-          <p:cNvPr id="25" name="Round Same Side Corner Rectangle 24"/>
+          <p:cNvPr id="42" name="Rounded Rectangle 19">
+            <a:extLst>
+              <a:ext uri="{FF2B5EF4-FFF2-40B4-BE49-F238E27FC236}">
+                <a16:creationId xmlns:a16="http://schemas.microsoft.com/office/drawing/2014/main" id="{45D743E1-4867-8CEF-CA92-0BB6E436C9E3}"/>
+              </a:ext>
+            </a:extLst>
+          </p:cNvPr>
           <p:cNvSpPr/>
           <p:nvPr/>
         </p:nvSpPr>
         <p:spPr>
-          <a:xfrm rot="16200000">
-            <a:off x="7336915" y="6108104"/>
-            <a:ext cx="1190625" cy="132080"/>
-          </a:xfrm>
-          <a:prstGeom prst="round2SameRect">
+          <a:xfrm>
+            <a:off x="8094781" y="4877277"/>
+            <a:ext cx="457188" cy="457200"/>
+          </a:xfrm>
+          <a:prstGeom prst="roundRect">
             <a:avLst>
-              <a:gd name="adj1" fmla="val 50000"/>
-              <a:gd name="adj2" fmla="val 0"/>
+              <a:gd name="adj" fmla="val 33333"/>
             </a:avLst>
           </a:prstGeom>
           <a:solidFill>
-            <a:srgbClr val="0D47A1"/>
+            <a:srgbClr val="4FC3F7"/>
           </a:solidFill>
           <a:ln>
             <a:noFill/>
@@ -12628,55 +12600,15 @@
           </a:p>
         </p:txBody>
       </p:sp>
-      <p:sp>
-        <p:nvSpPr>
-          <p:cNvPr id="26" name="Rounded Rectangle 25"/>
-          <p:cNvSpPr/>
-          <p:nvPr/>
-        </p:nvSpPr>
-        <p:spPr>
-          <a:xfrm>
-            <a:off x="8094781" y="5769331"/>
-            <a:ext cx="457188" cy="457200"/>
-          </a:xfrm>
-          <a:prstGeom prst="roundRect">
-            <a:avLst>
-              <a:gd name="adj" fmla="val 33333"/>
-            </a:avLst>
-          </a:prstGeom>
-          <a:solidFill>
-            <a:srgbClr val="0D47A1"/>
-          </a:solidFill>
-          <a:ln>
-            <a:noFill/>
-          </a:ln>
-        </p:spPr>
-        <p:style>
-          <a:lnRef idx="1">
-            <a:schemeClr val="accent1"/>
-          </a:lnRef>
-          <a:fillRef idx="3">
-            <a:schemeClr val="accent1"/>
-          </a:fillRef>
-          <a:effectRef idx="2">
-            <a:schemeClr val="accent1"/>
-          </a:effectRef>
-          <a:fontRef idx="minor">
-            <a:schemeClr val="lt1"/>
-          </a:fontRef>
-        </p:style>
-        <p:txBody>
-          <a:bodyPr rtlCol="0" anchor="ctr"/>
-          <a:lstStyle/>
-          <a:p>
-            <a:pPr algn="ctr"/>
-            <a:endParaRPr lang="en-US" noProof="1"/>
-          </a:p>
-        </p:txBody>
-      </p:sp>
       <p:pic>
         <p:nvPicPr>
-          <p:cNvPr id="27" name="Picture 26" descr="image.png"/>
+          <p:cNvPr id="43" name="Picture 20" descr="image.png">
+            <a:extLst>
+              <a:ext uri="{FF2B5EF4-FFF2-40B4-BE49-F238E27FC236}">
+                <a16:creationId xmlns:a16="http://schemas.microsoft.com/office/drawing/2014/main" id="{BC24FA1B-8EA8-D338-31E9-2E3E56BE5DB4}"/>
+              </a:ext>
+            </a:extLst>
+          </p:cNvPr>
           <p:cNvPicPr>
             <a:picLocks noChangeAspect="1"/>
           </p:cNvPicPr>
@@ -12692,8 +12624,8 @@
         </p:blipFill>
         <p:spPr>
           <a:xfrm>
-            <a:off x="8209079" y="5900776"/>
-            <a:ext cx="228594" cy="194309"/>
+            <a:off x="8209079" y="5034439"/>
+            <a:ext cx="228594" cy="142875"/>
           </a:xfrm>
           <a:prstGeom prst="rect">
             <a:avLst/>
@@ -12702,14 +12634,20 @@
       </p:pic>
       <p:sp>
         <p:nvSpPr>
-          <p:cNvPr id="28" name="TextBox 27"/>
+          <p:cNvPr id="44" name="TextBox 43">
+            <a:extLst>
+              <a:ext uri="{FF2B5EF4-FFF2-40B4-BE49-F238E27FC236}">
+                <a16:creationId xmlns:a16="http://schemas.microsoft.com/office/drawing/2014/main" id="{7DB3B880-F97C-0219-6529-A9FD234FAC5A}"/>
+              </a:ext>
+            </a:extLst>
+          </p:cNvPr>
           <p:cNvSpPr txBox="1"/>
           <p:nvPr/>
         </p:nvSpPr>
         <p:spPr>
           <a:xfrm>
-            <a:off x="8704366" y="5748336"/>
-            <a:ext cx="1489447" cy="356316"/>
+            <a:off x="8704366" y="4856282"/>
+            <a:ext cx="1438151" cy="356316"/>
           </a:xfrm>
           <a:prstGeom prst="rect">
             <a:avLst/>
@@ -12740,93 +12678,11 @@
                 </a:solidFill>
                 <a:latin typeface="Noto Sans"/>
               </a:rPr>
-              <a:t>Рекомендации</a:t>
-            </a:r>
-          </a:p>
-        </p:txBody>
-      </p:sp>
-      <p:sp>
-        <p:nvSpPr>
-          <p:cNvPr id="29" name="TextBox 28"/>
-          <p:cNvSpPr txBox="1"/>
-          <p:nvPr/>
-        </p:nvSpPr>
-        <p:spPr>
-          <a:xfrm>
-            <a:off x="8704366" y="6101539"/>
-            <a:ext cx="2762180" cy="497637"/>
-          </a:xfrm>
-          <a:prstGeom prst="rect">
-            <a:avLst/>
-          </a:prstGeom>
-          <a:noFill/>
-        </p:spPr>
-        <p:txBody>
-          <a:bodyPr wrap="square" lIns="73152" tIns="54864" rIns="73152" bIns="54864" anchor="ctr">
-            <a:spAutoFit/>
-          </a:bodyPr>
-          <a:lstStyle/>
-          <a:p>
-            <a:pPr algn="l">
-              <a:lnSpc>
-                <a:spcPts val="1560"/>
-              </a:lnSpc>
-              <a:spcBef>
-                <a:spcPts val="0"/>
-              </a:spcBef>
-              <a:spcAft>
-                <a:spcPts val="0"/>
-              </a:spcAft>
-            </a:pPr>
-            <a:r>
-              <a:rPr lang="en-US" sz="956" b="0" noProof="1">
-                <a:solidFill>
-                  <a:srgbClr val="4B5563"/>
-                </a:solidFill>
-                <a:latin typeface="Noto Sans"/>
-              </a:rPr>
-              <a:t>Персональные советы по снижению риска развития заболеваний</a:t>
-            </a:r>
-          </a:p>
-        </p:txBody>
-      </p:sp>
-      <p:pic>
-        <p:nvPicPr>
-          <p:cNvPr id="30" name="Рисунок 29">
-            <a:extLst>
-              <a:ext uri="{FF2B5EF4-FFF2-40B4-BE49-F238E27FC236}">
-                <a16:creationId xmlns:a16="http://schemas.microsoft.com/office/drawing/2014/main" id="{39311C09-946A-F4F7-095C-0C615EA0856A}"/>
-              </a:ext>
-            </a:extLst>
-          </p:cNvPr>
-          <p:cNvPicPr>
-            <a:picLocks noChangeAspect="1"/>
-          </p:cNvPicPr>
-          <p:nvPr/>
-        </p:nvPicPr>
-        <p:blipFill>
-          <a:blip r:embed="rId7"/>
-          <a:stretch>
-            <a:fillRect/>
-          </a:stretch>
-        </p:blipFill>
-        <p:spPr>
-          <a:xfrm>
-            <a:off x="663335" y="1061209"/>
-            <a:ext cx="5683334" cy="5289148"/>
-          </a:xfrm>
-          <a:prstGeom prst="rect">
-            <a:avLst/>
-          </a:prstGeom>
-          <a:effectLst>
-            <a:outerShdw blurRad="50800" dist="38100" dir="5400000" algn="t" rotWithShape="0">
-              <a:prstClr val="black">
-                <a:alpha val="40000"/>
-              </a:prstClr>
-            </a:outerShdw>
-          </a:effectLst>
-        </p:spPr>
-      </p:pic>
+              <a:t>Визуализация</a:t>
+            </a:r>
+          </a:p>
+        </p:txBody>
+      </p:sp>
     </p:spTree>
   </p:cSld>
   <p:clrMapOvr>
@@ -13051,8 +12907,8 @@
         </p:nvSpPr>
         <p:spPr>
           <a:xfrm>
-            <a:off x="895327" y="1863506"/>
-            <a:ext cx="1624099" cy="425886"/>
+            <a:off x="895327" y="1858088"/>
+            <a:ext cx="1911036" cy="436723"/>
           </a:xfrm>
           <a:prstGeom prst="rect">
             <a:avLst/>
@@ -13077,7 +12933,7 @@
               </a:spcAft>
             </a:pPr>
             <a:r>
-              <a:rPr lang="ru-RU" sz="1674" b="1" dirty="0">
+              <a:rPr lang="ru-RU" sz="2000" b="1" dirty="0">
                 <a:solidFill>
                   <a:srgbClr val="0D47A1"/>
                 </a:solidFill>
@@ -13085,7 +12941,7 @@
               </a:rPr>
               <a:t>Особенности</a:t>
             </a:r>
-            <a:endParaRPr sz="1674" b="1" dirty="0">
+            <a:endParaRPr sz="2000" b="1" dirty="0">
               <a:solidFill>
                 <a:srgbClr val="0D47A1"/>
               </a:solidFill>
@@ -13275,8 +13131,8 @@
         </p:nvSpPr>
         <p:spPr>
           <a:xfrm>
-            <a:off x="1619209" y="2695575"/>
-            <a:ext cx="3876578" cy="285750"/>
+            <a:off x="1619209" y="2663691"/>
+            <a:ext cx="3145348" cy="349519"/>
           </a:xfrm>
           <a:prstGeom prst="rect">
             <a:avLst/>
@@ -13301,7 +13157,7 @@
               </a:spcAft>
             </a:pPr>
             <a:r>
-              <a:rPr sz="1196" b="1" dirty="0" err="1">
+              <a:rPr sz="1400" b="1" dirty="0" err="1">
                 <a:solidFill>
                   <a:srgbClr val="0D47A1"/>
                 </a:solidFill>
@@ -13310,7 +13166,7 @@
               <a:t>Корректная</a:t>
             </a:r>
             <a:r>
-              <a:rPr sz="1196" b="1" dirty="0">
+              <a:rPr sz="1400" b="1" dirty="0">
                 <a:solidFill>
                   <a:srgbClr val="0D47A1"/>
                 </a:solidFill>
@@ -13319,7 +13175,7 @@
               <a:t> </a:t>
             </a:r>
             <a:r>
-              <a:rPr sz="1196" b="1" dirty="0" err="1">
+              <a:rPr sz="1400" b="1" dirty="0" err="1">
                 <a:solidFill>
                   <a:srgbClr val="0D47A1"/>
                 </a:solidFill>
@@ -13328,7 +13184,7 @@
               <a:t>работа</a:t>
             </a:r>
             <a:r>
-              <a:rPr sz="1196" b="1" dirty="0">
+              <a:rPr sz="1400" b="1" dirty="0">
                 <a:solidFill>
                   <a:srgbClr val="0D47A1"/>
                 </a:solidFill>
@@ -13337,7 +13193,7 @@
               <a:t> </a:t>
             </a:r>
             <a:r>
-              <a:rPr sz="1196" b="1" dirty="0" err="1">
+              <a:rPr sz="1400" b="1" dirty="0" err="1">
                 <a:solidFill>
                   <a:srgbClr val="0D47A1"/>
                 </a:solidFill>
@@ -13345,7 +13201,7 @@
               </a:rPr>
               <a:t>алгоритмов</a:t>
             </a:r>
-            <a:endParaRPr sz="1196" b="1" dirty="0">
+            <a:endParaRPr sz="1400" b="1" dirty="0">
               <a:solidFill>
                 <a:srgbClr val="0D47A1"/>
               </a:solidFill>
@@ -13362,8 +13218,8 @@
         </p:nvSpPr>
         <p:spPr>
           <a:xfrm>
-            <a:off x="1619209" y="3019424"/>
-            <a:ext cx="3876578" cy="228600"/>
+            <a:off x="1619209" y="2984837"/>
+            <a:ext cx="3448316" cy="297774"/>
           </a:xfrm>
           <a:prstGeom prst="rect">
             <a:avLst/>
@@ -13388,7 +13244,7 @@
               </a:spcAft>
             </a:pPr>
             <a:r>
-              <a:rPr sz="956" b="0" dirty="0" err="1">
+              <a:rPr sz="1000" b="0" dirty="0" err="1">
                 <a:solidFill>
                   <a:srgbClr val="4B5563"/>
                 </a:solidFill>
@@ -13397,7 +13253,7 @@
               <a:t>Точный</a:t>
             </a:r>
             <a:r>
-              <a:rPr sz="956" b="0" dirty="0">
+              <a:rPr sz="1000" b="0" dirty="0">
                 <a:solidFill>
                   <a:srgbClr val="4B5563"/>
                 </a:solidFill>
@@ -13406,7 +13262,7 @@
               <a:t> </a:t>
             </a:r>
             <a:r>
-              <a:rPr sz="956" b="0" dirty="0" err="1">
+              <a:rPr sz="1000" b="0" dirty="0" err="1">
                 <a:solidFill>
                   <a:srgbClr val="4B5563"/>
                 </a:solidFill>
@@ -13415,7 +13271,7 @@
               <a:t>расчет</a:t>
             </a:r>
             <a:r>
-              <a:rPr sz="956" b="0" dirty="0">
+              <a:rPr sz="1000" b="0" dirty="0">
                 <a:solidFill>
                   <a:srgbClr val="4B5563"/>
                 </a:solidFill>
@@ -13424,7 +13280,7 @@
               <a:t> </a:t>
             </a:r>
             <a:r>
-              <a:rPr sz="956" b="0" dirty="0" err="1">
+              <a:rPr sz="1000" b="0" dirty="0" err="1">
                 <a:solidFill>
                   <a:srgbClr val="4B5563"/>
                 </a:solidFill>
@@ -13433,7 +13289,7 @@
               <a:t>вероятности</a:t>
             </a:r>
             <a:r>
-              <a:rPr sz="956" b="0" dirty="0">
+              <a:rPr sz="1000" b="0" dirty="0">
                 <a:solidFill>
                   <a:srgbClr val="4B5563"/>
                 </a:solidFill>
@@ -13442,7 +13298,7 @@
               <a:t> </a:t>
             </a:r>
             <a:r>
-              <a:rPr sz="956" b="0" dirty="0" err="1">
+              <a:rPr sz="1000" b="0" dirty="0" err="1">
                 <a:solidFill>
                   <a:srgbClr val="4B5563"/>
                 </a:solidFill>
@@ -13451,7 +13307,7 @@
               <a:t>для</a:t>
             </a:r>
             <a:r>
-              <a:rPr sz="956" b="0" dirty="0">
+              <a:rPr sz="1000" b="0" dirty="0">
                 <a:solidFill>
                   <a:srgbClr val="4B5563"/>
                 </a:solidFill>
@@ -13460,7 +13316,7 @@
               <a:t> </a:t>
             </a:r>
             <a:r>
-              <a:rPr sz="956" b="0" dirty="0" err="1">
+              <a:rPr sz="1000" b="0" dirty="0" err="1">
                 <a:solidFill>
                   <a:srgbClr val="4B5563"/>
                 </a:solidFill>
@@ -13469,7 +13325,7 @@
               <a:t>всех</a:t>
             </a:r>
             <a:r>
-              <a:rPr sz="956" b="0" dirty="0">
+              <a:rPr sz="1000" b="0" dirty="0">
                 <a:solidFill>
                   <a:srgbClr val="4B5563"/>
                 </a:solidFill>
@@ -13478,7 +13334,7 @@
               <a:t> 5 </a:t>
             </a:r>
             <a:r>
-              <a:rPr sz="956" b="0" dirty="0" err="1">
+              <a:rPr sz="1000" b="0" dirty="0" err="1">
                 <a:solidFill>
                   <a:srgbClr val="4B5563"/>
                 </a:solidFill>
@@ -13486,7 +13342,7 @@
               </a:rPr>
               <a:t>заболеваний</a:t>
             </a:r>
-            <a:endParaRPr sz="956" b="0" dirty="0">
+            <a:endParaRPr sz="1000" b="0" dirty="0">
               <a:solidFill>
                 <a:srgbClr val="4B5563"/>
               </a:solidFill>
@@ -13676,8 +13532,8 @@
         </p:nvSpPr>
         <p:spPr>
           <a:xfrm>
-            <a:off x="1619209" y="3781424"/>
-            <a:ext cx="4228994" cy="285750"/>
+            <a:off x="1619209" y="3749540"/>
+            <a:ext cx="2096984" cy="349519"/>
           </a:xfrm>
           <a:prstGeom prst="rect">
             <a:avLst/>
@@ -13702,7 +13558,7 @@
               </a:spcAft>
             </a:pPr>
             <a:r>
-              <a:rPr sz="1196" b="1" dirty="0" err="1">
+              <a:rPr sz="1400" b="1" dirty="0" err="1">
                 <a:solidFill>
                   <a:srgbClr val="0D47A1"/>
                 </a:solidFill>
@@ -13711,7 +13567,7 @@
               <a:t>Удобный</a:t>
             </a:r>
             <a:r>
-              <a:rPr sz="1196" b="1" dirty="0">
+              <a:rPr sz="1400" b="1" dirty="0">
                 <a:solidFill>
                   <a:srgbClr val="0D47A1"/>
                 </a:solidFill>
@@ -13720,7 +13576,7 @@
               <a:t> </a:t>
             </a:r>
             <a:r>
-              <a:rPr sz="1196" b="1" dirty="0" err="1">
+              <a:rPr sz="1400" b="1" dirty="0" err="1">
                 <a:solidFill>
                   <a:srgbClr val="0D47A1"/>
                 </a:solidFill>
@@ -13728,7 +13584,7 @@
               </a:rPr>
               <a:t>интерфейс</a:t>
             </a:r>
-            <a:endParaRPr sz="1196" b="1" dirty="0">
+            <a:endParaRPr sz="1400" b="1" dirty="0">
               <a:solidFill>
                 <a:srgbClr val="0D47A1"/>
               </a:solidFill>
@@ -13745,8 +13601,8 @@
         </p:nvSpPr>
         <p:spPr>
           <a:xfrm>
-            <a:off x="1619209" y="4187648"/>
-            <a:ext cx="4228994" cy="292452"/>
+            <a:off x="1619209" y="4082395"/>
+            <a:ext cx="4228994" cy="502958"/>
           </a:xfrm>
           <a:prstGeom prst="rect">
             <a:avLst/>
@@ -13771,7 +13627,7 @@
               </a:spcAft>
             </a:pPr>
             <a:r>
-              <a:rPr lang="en-US" sz="956" b="0" noProof="1">
+              <a:rPr lang="en-US" sz="1000" b="0" noProof="1">
                 <a:solidFill>
                   <a:srgbClr val="4B5563"/>
                 </a:solidFill>
@@ -13780,7 +13636,7 @@
               <a:t>Интуитивно</a:t>
             </a:r>
             <a:r>
-              <a:rPr sz="956" b="0" dirty="0">
+              <a:rPr sz="1000" b="0" dirty="0">
                 <a:solidFill>
                   <a:srgbClr val="4B5563"/>
                 </a:solidFill>
@@ -13789,7 +13645,7 @@
               <a:t> </a:t>
             </a:r>
             <a:r>
-              <a:rPr sz="956" b="0" dirty="0" err="1">
+              <a:rPr sz="1000" b="0" dirty="0" err="1">
                 <a:solidFill>
                   <a:srgbClr val="4B5563"/>
                 </a:solidFill>
@@ -13798,7 +13654,7 @@
               <a:t>понятный</a:t>
             </a:r>
             <a:r>
-              <a:rPr sz="956" b="0" dirty="0">
+              <a:rPr sz="1000" b="0" dirty="0">
                 <a:solidFill>
                   <a:srgbClr val="4B5563"/>
                 </a:solidFill>
@@ -13807,7 +13663,7 @@
               <a:t> </a:t>
             </a:r>
             <a:r>
-              <a:rPr sz="956" b="0" dirty="0" err="1">
+              <a:rPr sz="1000" b="0" dirty="0" err="1">
                 <a:solidFill>
                   <a:srgbClr val="4B5563"/>
                 </a:solidFill>
@@ -13816,7 +13672,7 @@
               <a:t>дизайн</a:t>
             </a:r>
             <a:r>
-              <a:rPr sz="956" b="0" dirty="0">
+              <a:rPr sz="1000" b="0" dirty="0">
                 <a:solidFill>
                   <a:srgbClr val="4B5563"/>
                 </a:solidFill>
@@ -13825,7 +13681,7 @@
               <a:t> </a:t>
             </a:r>
             <a:r>
-              <a:rPr sz="956" b="0" dirty="0" err="1">
+              <a:rPr sz="1000" b="0" dirty="0" err="1">
                 <a:solidFill>
                   <a:srgbClr val="4B5563"/>
                 </a:solidFill>
@@ -13834,7 +13690,7 @@
               <a:t>для</a:t>
             </a:r>
             <a:r>
-              <a:rPr sz="956" b="0" dirty="0">
+              <a:rPr sz="1000" b="0" dirty="0">
                 <a:solidFill>
                   <a:srgbClr val="4B5563"/>
                 </a:solidFill>
@@ -13843,7 +13699,7 @@
               <a:t> </a:t>
             </a:r>
             <a:r>
-              <a:rPr sz="956" b="0" dirty="0" err="1">
+              <a:rPr sz="1000" b="0" dirty="0" err="1">
                 <a:solidFill>
                   <a:srgbClr val="4B5563"/>
                 </a:solidFill>
@@ -13852,7 +13708,7 @@
               <a:t>широкого</a:t>
             </a:r>
             <a:r>
-              <a:rPr sz="956" b="0" dirty="0">
+              <a:rPr sz="1000" b="0" dirty="0">
                 <a:solidFill>
                   <a:srgbClr val="4B5563"/>
                 </a:solidFill>
@@ -13861,7 +13717,7 @@
               <a:t> </a:t>
             </a:r>
             <a:r>
-              <a:rPr sz="956" b="0" dirty="0" err="1">
+              <a:rPr sz="1000" b="0" dirty="0" err="1">
                 <a:solidFill>
                   <a:srgbClr val="4B5563"/>
                 </a:solidFill>
@@ -13870,7 +13726,7 @@
               <a:t>круга</a:t>
             </a:r>
             <a:r>
-              <a:rPr sz="956" b="0" dirty="0">
+              <a:rPr sz="1000" b="0" dirty="0">
                 <a:solidFill>
                   <a:srgbClr val="4B5563"/>
                 </a:solidFill>
@@ -13879,7 +13735,7 @@
               <a:t> </a:t>
             </a:r>
             <a:r>
-              <a:rPr sz="956" b="0" dirty="0" err="1">
+              <a:rPr sz="1000" b="0" dirty="0" err="1">
                 <a:solidFill>
                   <a:srgbClr val="4B5563"/>
                 </a:solidFill>
@@ -13887,7 +13743,7 @@
               </a:rPr>
               <a:t>пользователей</a:t>
             </a:r>
-            <a:endParaRPr sz="956" b="0" dirty="0">
+            <a:endParaRPr sz="1000" b="0" dirty="0">
               <a:solidFill>
                 <a:srgbClr val="4B5563"/>
               </a:solidFill>
@@ -14077,8 +13933,8 @@
         </p:nvSpPr>
         <p:spPr>
           <a:xfrm>
-            <a:off x="1619209" y="5095874"/>
-            <a:ext cx="3905152" cy="285750"/>
+            <a:off x="1619209" y="5063990"/>
+            <a:ext cx="2193164" cy="349519"/>
           </a:xfrm>
           <a:prstGeom prst="rect">
             <a:avLst/>
@@ -14103,7 +13959,7 @@
               </a:spcAft>
             </a:pPr>
             <a:r>
-              <a:rPr sz="1196" b="1" dirty="0" err="1">
+              <a:rPr sz="1400" b="1" dirty="0" err="1">
                 <a:solidFill>
                   <a:srgbClr val="0D47A1"/>
                 </a:solidFill>
@@ -14112,7 +13968,7 @@
               <a:t>Практическая</a:t>
             </a:r>
             <a:r>
-              <a:rPr sz="1196" b="1" dirty="0">
+              <a:rPr sz="1400" b="1" dirty="0">
                 <a:solidFill>
                   <a:srgbClr val="0D47A1"/>
                 </a:solidFill>
@@ -14121,7 +13977,7 @@
               <a:t> </a:t>
             </a:r>
             <a:r>
-              <a:rPr sz="1196" b="1" dirty="0" err="1">
+              <a:rPr sz="1400" b="1" dirty="0" err="1">
                 <a:solidFill>
                   <a:srgbClr val="0D47A1"/>
                 </a:solidFill>
@@ -14129,7 +13985,7 @@
               </a:rPr>
               <a:t>польза</a:t>
             </a:r>
-            <a:endParaRPr sz="1196" b="1" dirty="0">
+            <a:endParaRPr sz="1400" b="1" dirty="0">
               <a:solidFill>
                 <a:srgbClr val="0D47A1"/>
               </a:solidFill>
@@ -14146,8 +14002,8 @@
         </p:nvSpPr>
         <p:spPr>
           <a:xfrm>
-            <a:off x="1619209" y="5419725"/>
-            <a:ext cx="3905152" cy="228600"/>
+            <a:off x="1619209" y="5385138"/>
+            <a:ext cx="3467552" cy="297774"/>
           </a:xfrm>
           <a:prstGeom prst="rect">
             <a:avLst/>
@@ -14172,7 +14028,7 @@
               </a:spcAft>
             </a:pPr>
             <a:r>
-              <a:rPr sz="956" b="0" dirty="0" err="1">
+              <a:rPr sz="1000" b="0" dirty="0" err="1">
                 <a:solidFill>
                   <a:srgbClr val="4B5563"/>
                 </a:solidFill>
@@ -14181,7 +14037,7 @@
               <a:t>Инструмент</a:t>
             </a:r>
             <a:r>
-              <a:rPr sz="956" b="0" dirty="0">
+              <a:rPr sz="1000" b="0" dirty="0">
                 <a:solidFill>
                   <a:srgbClr val="4B5563"/>
                 </a:solidFill>
@@ -14190,7 +14046,7 @@
               <a:t> </a:t>
             </a:r>
             <a:r>
-              <a:rPr sz="956" b="0" dirty="0" err="1">
+              <a:rPr sz="1000" b="0" dirty="0" err="1">
                 <a:solidFill>
                   <a:srgbClr val="4B5563"/>
                 </a:solidFill>
@@ -14199,7 +14055,7 @@
               <a:t>для</a:t>
             </a:r>
             <a:r>
-              <a:rPr sz="956" b="0" dirty="0">
+              <a:rPr sz="1000" b="0" dirty="0">
                 <a:solidFill>
                   <a:srgbClr val="4B5563"/>
                 </a:solidFill>
@@ -14208,7 +14064,7 @@
               <a:t> </a:t>
             </a:r>
             <a:r>
-              <a:rPr sz="956" b="0" dirty="0" err="1">
+              <a:rPr sz="1000" b="0" dirty="0" err="1">
                 <a:solidFill>
                   <a:srgbClr val="4B5563"/>
                 </a:solidFill>
@@ -14217,7 +14073,7 @@
               <a:t>ранней</a:t>
             </a:r>
             <a:r>
-              <a:rPr sz="956" b="0" dirty="0">
+              <a:rPr sz="1000" b="0" dirty="0">
                 <a:solidFill>
                   <a:srgbClr val="4B5563"/>
                 </a:solidFill>
@@ -14226,7 +14082,7 @@
               <a:t> </a:t>
             </a:r>
             <a:r>
-              <a:rPr sz="956" b="0" dirty="0" err="1">
+              <a:rPr sz="1000" b="0" dirty="0" err="1">
                 <a:solidFill>
                   <a:srgbClr val="4B5563"/>
                 </a:solidFill>
@@ -14235,7 +14091,7 @@
               <a:t>профилактики</a:t>
             </a:r>
             <a:r>
-              <a:rPr sz="956" b="0" dirty="0">
+              <a:rPr sz="1000" b="0" dirty="0">
                 <a:solidFill>
                   <a:srgbClr val="4B5563"/>
                 </a:solidFill>
@@ -14244,7 +14100,7 @@
               <a:t> </a:t>
             </a:r>
             <a:r>
-              <a:rPr sz="956" b="0" dirty="0" err="1">
+              <a:rPr sz="1000" b="0" dirty="0" err="1">
                 <a:solidFill>
                   <a:srgbClr val="4B5563"/>
                 </a:solidFill>
@@ -14252,7 +14108,7 @@
               </a:rPr>
               <a:t>заболеваний</a:t>
             </a:r>
-            <a:endParaRPr sz="956" b="0" dirty="0">
+            <a:endParaRPr sz="1000" b="0" dirty="0">
               <a:solidFill>
                 <a:srgbClr val="4B5563"/>
               </a:solidFill>
@@ -14357,8 +14213,8 @@
         </p:nvSpPr>
         <p:spPr>
           <a:xfrm>
-            <a:off x="7600759" y="1600200"/>
-            <a:ext cx="1857328" cy="400050"/>
+            <a:off x="7600759" y="1581864"/>
+            <a:ext cx="1971950" cy="436723"/>
           </a:xfrm>
           <a:prstGeom prst="rect">
             <a:avLst/>
@@ -14383,7 +14239,7 @@
               </a:spcAft>
             </a:pPr>
             <a:r>
-              <a:rPr sz="1674" b="1" dirty="0" err="1">
+              <a:rPr sz="2000" b="1" dirty="0" err="1">
                 <a:solidFill>
                   <a:srgbClr val="0D47A1"/>
                 </a:solidFill>
@@ -14391,7 +14247,7 @@
               </a:rPr>
               <a:t>Ограничения</a:t>
             </a:r>
-            <a:endParaRPr sz="1674" b="1" dirty="0">
+            <a:endParaRPr sz="2000" b="1" dirty="0">
               <a:solidFill>
                 <a:srgbClr val="0D47A1"/>
               </a:solidFill>
@@ -14482,8 +14338,8 @@
         </p:nvSpPr>
         <p:spPr>
           <a:xfrm>
-            <a:off x="8019849" y="2495550"/>
-            <a:ext cx="2162120" cy="314325"/>
+            <a:off x="8019849" y="2473144"/>
+            <a:ext cx="2040880" cy="359137"/>
           </a:xfrm>
           <a:prstGeom prst="rect">
             <a:avLst/>
@@ -14508,7 +14364,7 @@
               </a:spcAft>
             </a:pPr>
             <a:r>
-              <a:rPr sz="1315" b="1" dirty="0" err="1">
+              <a:rPr sz="1400" b="1" dirty="0" err="1">
                 <a:solidFill>
                   <a:srgbClr val="0D47A1"/>
                 </a:solidFill>
@@ -14517,7 +14373,7 @@
               <a:t>Точность</a:t>
             </a:r>
             <a:r>
-              <a:rPr sz="1315" b="1" dirty="0">
+              <a:rPr sz="1400" b="1" dirty="0">
                 <a:solidFill>
                   <a:srgbClr val="0D47A1"/>
                 </a:solidFill>
@@ -14526,7 +14382,7 @@
               <a:t> </a:t>
             </a:r>
             <a:r>
-              <a:rPr sz="1315" b="1" dirty="0" err="1">
+              <a:rPr sz="1400" b="1" dirty="0" err="1">
                 <a:solidFill>
                   <a:srgbClr val="0D47A1"/>
                 </a:solidFill>
@@ -14534,7 +14390,7 @@
               </a:rPr>
               <a:t>прогнозов</a:t>
             </a:r>
-            <a:endParaRPr sz="1315" b="1" dirty="0">
+            <a:endParaRPr sz="1400" b="1" dirty="0">
               <a:solidFill>
                 <a:srgbClr val="0D47A1"/>
               </a:solidFill>
@@ -14551,8 +14407,8 @@
         </p:nvSpPr>
         <p:spPr>
           <a:xfrm>
-            <a:off x="7600759" y="2952750"/>
-            <a:ext cx="609584" cy="533399"/>
+            <a:off x="7600759" y="2933218"/>
+            <a:ext cx="622222" cy="572464"/>
           </a:xfrm>
           <a:prstGeom prst="rect">
             <a:avLst/>
@@ -14577,14 +14433,20 @@
               </a:spcAft>
             </a:pPr>
             <a:r>
-              <a:rPr sz="3348" b="1" dirty="0">
+              <a:rPr lang="ru-RU" sz="3348" b="1" dirty="0">
                 <a:solidFill>
                   <a:srgbClr val="4FC3F7"/>
                 </a:solidFill>
                 <a:latin typeface="Noto Sans"/>
               </a:rPr>
-              <a:t>85</a:t>
-            </a:r>
+              <a:t>90</a:t>
+            </a:r>
+            <a:endParaRPr sz="3348" b="1" dirty="0">
+              <a:solidFill>
+                <a:srgbClr val="4FC3F7"/>
+              </a:solidFill>
+              <a:latin typeface="Noto Sans"/>
+            </a:endParaRPr>
           </a:p>
         </p:txBody>
       </p:sp>
@@ -14596,8 +14458,8 @@
         </p:nvSpPr>
         <p:spPr>
           <a:xfrm>
-            <a:off x="8286542" y="3124200"/>
-            <a:ext cx="238119" cy="400050"/>
+            <a:off x="8129195" y="3006896"/>
+            <a:ext cx="427152" cy="463204"/>
           </a:xfrm>
           <a:prstGeom prst="rect">
             <a:avLst/>
@@ -14605,7 +14467,7 @@
           <a:noFill/>
         </p:spPr>
         <p:txBody>
-          <a:bodyPr wrap="none" lIns="73152" tIns="54864" rIns="73152" bIns="54864" anchor="ctr">
+          <a:bodyPr wrap="square" lIns="73152" tIns="54864" rIns="73152" bIns="54864" anchor="ctr">
             <a:spAutoFit/>
           </a:bodyPr>
           <a:lstStyle/>
@@ -14622,7 +14484,7 @@
               </a:spcAft>
             </a:pPr>
             <a:r>
-              <a:rPr sz="1674" b="1" dirty="0">
+              <a:rPr sz="2800" b="1" dirty="0">
                 <a:solidFill>
                   <a:srgbClr val="374151"/>
                 </a:solidFill>
@@ -15479,13 +15341,57 @@
       </p:sp>
       <p:sp>
         <p:nvSpPr>
-          <p:cNvPr id="5" name="Rectangle 4"/>
+          <p:cNvPr id="15" name="Rectangle 14"/>
           <p:cNvSpPr/>
           <p:nvPr/>
         </p:nvSpPr>
         <p:spPr>
           <a:xfrm>
-            <a:off x="666733" y="1571625"/>
+            <a:off x="6195436" y="857250"/>
+            <a:ext cx="5996257" cy="6000750"/>
+          </a:xfrm>
+          <a:prstGeom prst="rect">
+            <a:avLst/>
+          </a:prstGeom>
+          <a:solidFill>
+            <a:srgbClr val="F9FAFB"/>
+          </a:solidFill>
+          <a:ln>
+            <a:noFill/>
+          </a:ln>
+        </p:spPr>
+        <p:style>
+          <a:lnRef idx="1">
+            <a:schemeClr val="accent1"/>
+          </a:lnRef>
+          <a:fillRef idx="3">
+            <a:schemeClr val="accent1"/>
+          </a:fillRef>
+          <a:effectRef idx="2">
+            <a:schemeClr val="accent1"/>
+          </a:effectRef>
+          <a:fontRef idx="minor">
+            <a:schemeClr val="lt1"/>
+          </a:fontRef>
+        </p:style>
+        <p:txBody>
+          <a:bodyPr rtlCol="0" anchor="ctr"/>
+          <a:lstStyle/>
+          <a:p>
+            <a:pPr algn="ctr"/>
+            <a:endParaRPr dirty="0"/>
+          </a:p>
+        </p:txBody>
+      </p:sp>
+      <p:sp>
+        <p:nvSpPr>
+          <p:cNvPr id="16" name="Rectangle 15"/>
+          <p:cNvSpPr/>
+          <p:nvPr/>
+        </p:nvSpPr>
+        <p:spPr>
+          <a:xfrm>
+            <a:off x="594878" y="1322270"/>
             <a:ext cx="76198" cy="380999"/>
           </a:xfrm>
           <a:prstGeom prst="rect">
@@ -15523,14 +15429,14 @@
       </p:sp>
       <p:sp>
         <p:nvSpPr>
-          <p:cNvPr id="6" name="TextBox 5"/>
+          <p:cNvPr id="17" name="TextBox 16"/>
           <p:cNvSpPr txBox="1"/>
           <p:nvPr/>
         </p:nvSpPr>
         <p:spPr>
           <a:xfrm>
-            <a:off x="895327" y="1562100"/>
-            <a:ext cx="2009724" cy="400050"/>
+            <a:off x="823472" y="1312746"/>
+            <a:ext cx="3209844" cy="400050"/>
           </a:xfrm>
           <a:prstGeom prst="rect">
             <a:avLst/>
@@ -15561,7 +15467,7 @@
                 </a:solidFill>
                 <a:latin typeface="Noto Sans"/>
               </a:rPr>
-              <a:t>Итоги</a:t>
+              <a:t>Перспективы</a:t>
             </a:r>
             <a:r>
               <a:rPr sz="1674" b="1" dirty="0">
@@ -15579,7 +15485,7 @@
                 </a:solidFill>
                 <a:latin typeface="Noto Sans"/>
               </a:rPr>
-              <a:t>проекта</a:t>
+              <a:t>развития</a:t>
             </a:r>
             <a:endParaRPr sz="1674" b="1" dirty="0">
               <a:solidFill>
@@ -15592,13 +15498,1288 @@
       </p:sp>
       <p:sp>
         <p:nvSpPr>
-          <p:cNvPr id="7" name="Rounded Rectangle 6"/>
+          <p:cNvPr id="18" name="Rounded Rectangle 17"/>
           <p:cNvSpPr/>
           <p:nvPr/>
         </p:nvSpPr>
         <p:spPr>
           <a:xfrm>
-            <a:off x="666733" y="2266950"/>
+            <a:off x="594878" y="2017595"/>
+            <a:ext cx="2590735" cy="1638299"/>
+          </a:xfrm>
+          <a:prstGeom prst="roundRect">
+            <a:avLst>
+              <a:gd name="adj" fmla="val 13953"/>
+            </a:avLst>
+          </a:prstGeom>
+          <a:solidFill>
+            <a:srgbClr val="FFFFFF"/>
+          </a:solidFill>
+          <a:ln w="33020">
+            <a:solidFill>
+              <a:srgbClr val="4FC3F7"/>
+            </a:solidFill>
+          </a:ln>
+        </p:spPr>
+        <p:style>
+          <a:lnRef idx="1">
+            <a:schemeClr val="accent1"/>
+          </a:lnRef>
+          <a:fillRef idx="3">
+            <a:schemeClr val="accent1"/>
+          </a:fillRef>
+          <a:effectRef idx="2">
+            <a:schemeClr val="accent1"/>
+          </a:effectRef>
+          <a:fontRef idx="minor">
+            <a:schemeClr val="lt1"/>
+          </a:fontRef>
+        </p:style>
+        <p:txBody>
+          <a:bodyPr rtlCol="0" anchor="ctr"/>
+          <a:lstStyle/>
+          <a:p>
+            <a:pPr algn="ctr"/>
+            <a:endParaRPr dirty="0"/>
+          </a:p>
+        </p:txBody>
+      </p:sp>
+      <p:pic>
+        <p:nvPicPr>
+          <p:cNvPr id="19" name="Picture 18" descr="image.png"/>
+          <p:cNvPicPr>
+            <a:picLocks noChangeAspect="1"/>
+          </p:cNvPicPr>
+          <p:nvPr/>
+        </p:nvPicPr>
+        <p:blipFill>
+          <a:blip r:embed="rId3">
+            <a:alphaModFix/>
+          </a:blip>
+          <a:stretch>
+            <a:fillRect/>
+          </a:stretch>
+        </p:blipFill>
+        <p:spPr>
+          <a:xfrm>
+            <a:off x="823472" y="2425200"/>
+            <a:ext cx="342891" cy="289691"/>
+          </a:xfrm>
+          <a:prstGeom prst="rect">
+            <a:avLst/>
+          </a:prstGeom>
+        </p:spPr>
+      </p:pic>
+      <p:sp>
+        <p:nvSpPr>
+          <p:cNvPr id="20" name="TextBox 19"/>
+          <p:cNvSpPr txBox="1"/>
+          <p:nvPr/>
+        </p:nvSpPr>
+        <p:spPr>
+          <a:xfrm>
+            <a:off x="1280661" y="2398589"/>
+            <a:ext cx="1774781" cy="342914"/>
+          </a:xfrm>
+          <a:prstGeom prst="rect">
+            <a:avLst/>
+          </a:prstGeom>
+          <a:noFill/>
+        </p:spPr>
+        <p:txBody>
+          <a:bodyPr wrap="none" lIns="73152" tIns="54864" rIns="73152" bIns="54864" anchor="ctr">
+            <a:spAutoFit/>
+          </a:bodyPr>
+          <a:lstStyle/>
+          <a:p>
+            <a:pPr algn="l">
+              <a:lnSpc>
+                <a:spcPts val="1950"/>
+              </a:lnSpc>
+              <a:spcBef>
+                <a:spcPts val="0"/>
+              </a:spcBef>
+              <a:spcAft>
+                <a:spcPts val="0"/>
+              </a:spcAft>
+            </a:pPr>
+            <a:r>
+              <a:rPr sz="1200" b="1" dirty="0" err="1">
+                <a:solidFill>
+                  <a:srgbClr val="0D47A1"/>
+                </a:solidFill>
+                <a:latin typeface="Noto Sans"/>
+              </a:rPr>
+              <a:t>Новые</a:t>
+            </a:r>
+            <a:r>
+              <a:rPr sz="1200" b="1" dirty="0">
+                <a:solidFill>
+                  <a:srgbClr val="0D47A1"/>
+                </a:solidFill>
+                <a:latin typeface="Noto Sans"/>
+              </a:rPr>
+              <a:t> </a:t>
+            </a:r>
+            <a:r>
+              <a:rPr sz="1200" b="1" dirty="0" err="1">
+                <a:solidFill>
+                  <a:srgbClr val="0D47A1"/>
+                </a:solidFill>
+                <a:latin typeface="Noto Sans"/>
+              </a:rPr>
+              <a:t>заболевания</a:t>
+            </a:r>
+            <a:endParaRPr sz="1200" b="1" dirty="0">
+              <a:solidFill>
+                <a:srgbClr val="0D47A1"/>
+              </a:solidFill>
+              <a:latin typeface="Noto Sans"/>
+            </a:endParaRPr>
+          </a:p>
+        </p:txBody>
+      </p:sp>
+      <p:sp>
+        <p:nvSpPr>
+          <p:cNvPr id="21" name="TextBox 20"/>
+          <p:cNvSpPr txBox="1"/>
+          <p:nvPr/>
+        </p:nvSpPr>
+        <p:spPr>
+          <a:xfrm>
+            <a:off x="823472" y="2970096"/>
+            <a:ext cx="2133546" cy="457200"/>
+          </a:xfrm>
+          <a:prstGeom prst="rect">
+            <a:avLst/>
+          </a:prstGeom>
+          <a:noFill/>
+        </p:spPr>
+        <p:txBody>
+          <a:bodyPr wrap="square" lIns="73152" tIns="54864" rIns="73152" bIns="54864" anchor="ctr">
+            <a:spAutoFit/>
+          </a:bodyPr>
+          <a:lstStyle/>
+          <a:p>
+            <a:pPr algn="l">
+              <a:lnSpc>
+                <a:spcPts val="1560"/>
+              </a:lnSpc>
+              <a:spcBef>
+                <a:spcPts val="0"/>
+              </a:spcBef>
+              <a:spcAft>
+                <a:spcPts val="0"/>
+              </a:spcAft>
+            </a:pPr>
+            <a:r>
+              <a:rPr sz="956" b="0" dirty="0" err="1">
+                <a:solidFill>
+                  <a:srgbClr val="4B5563"/>
+                </a:solidFill>
+                <a:latin typeface="Noto Sans"/>
+              </a:rPr>
+              <a:t>Расширение</a:t>
+            </a:r>
+            <a:r>
+              <a:rPr sz="956" b="0" dirty="0">
+                <a:solidFill>
+                  <a:srgbClr val="4B5563"/>
+                </a:solidFill>
+                <a:latin typeface="Noto Sans"/>
+              </a:rPr>
+              <a:t> </a:t>
+            </a:r>
+            <a:r>
+              <a:rPr sz="956" b="0" dirty="0" err="1">
+                <a:solidFill>
+                  <a:srgbClr val="4B5563"/>
+                </a:solidFill>
+                <a:latin typeface="Noto Sans"/>
+              </a:rPr>
+              <a:t>списка</a:t>
+            </a:r>
+            <a:r>
+              <a:rPr sz="956" b="0" dirty="0">
+                <a:solidFill>
+                  <a:srgbClr val="4B5563"/>
+                </a:solidFill>
+                <a:latin typeface="Noto Sans"/>
+              </a:rPr>
+              <a:t> </a:t>
+            </a:r>
+            <a:r>
+              <a:rPr sz="956" b="0" dirty="0" err="1">
+                <a:solidFill>
+                  <a:srgbClr val="4B5563"/>
+                </a:solidFill>
+                <a:latin typeface="Noto Sans"/>
+              </a:rPr>
+              <a:t>анализируемых</a:t>
+            </a:r>
+            <a:r>
+              <a:rPr sz="956" b="0" dirty="0">
+                <a:solidFill>
+                  <a:srgbClr val="4B5563"/>
+                </a:solidFill>
+                <a:latin typeface="Noto Sans"/>
+              </a:rPr>
+              <a:t> </a:t>
+            </a:r>
+            <a:r>
+              <a:rPr sz="956" b="0" dirty="0" err="1">
+                <a:solidFill>
+                  <a:srgbClr val="4B5563"/>
+                </a:solidFill>
+                <a:latin typeface="Noto Sans"/>
+              </a:rPr>
+              <a:t>болезней</a:t>
+            </a:r>
+            <a:endParaRPr sz="956" b="0" dirty="0">
+              <a:solidFill>
+                <a:srgbClr val="4B5563"/>
+              </a:solidFill>
+              <a:latin typeface="Noto Sans"/>
+            </a:endParaRPr>
+          </a:p>
+        </p:txBody>
+      </p:sp>
+      <p:sp>
+        <p:nvSpPr>
+          <p:cNvPr id="22" name="Rounded Rectangle 21"/>
+          <p:cNvSpPr/>
+          <p:nvPr/>
+        </p:nvSpPr>
+        <p:spPr>
+          <a:xfrm>
+            <a:off x="3376108" y="2017595"/>
+            <a:ext cx="2590735" cy="1638299"/>
+          </a:xfrm>
+          <a:prstGeom prst="roundRect">
+            <a:avLst>
+              <a:gd name="adj" fmla="val 13953"/>
+            </a:avLst>
+          </a:prstGeom>
+          <a:solidFill>
+            <a:srgbClr val="FFFFFF"/>
+          </a:solidFill>
+          <a:ln w="33020">
+            <a:solidFill>
+              <a:srgbClr val="0D47A1"/>
+            </a:solidFill>
+          </a:ln>
+        </p:spPr>
+        <p:style>
+          <a:lnRef idx="1">
+            <a:schemeClr val="accent1"/>
+          </a:lnRef>
+          <a:fillRef idx="3">
+            <a:schemeClr val="accent1"/>
+          </a:fillRef>
+          <a:effectRef idx="2">
+            <a:schemeClr val="accent1"/>
+          </a:effectRef>
+          <a:fontRef idx="minor">
+            <a:schemeClr val="lt1"/>
+          </a:fontRef>
+        </p:style>
+        <p:txBody>
+          <a:bodyPr rtlCol="0" anchor="ctr"/>
+          <a:lstStyle/>
+          <a:p>
+            <a:pPr algn="ctr"/>
+            <a:endParaRPr dirty="0"/>
+          </a:p>
+        </p:txBody>
+      </p:sp>
+      <p:pic>
+        <p:nvPicPr>
+          <p:cNvPr id="23" name="Picture 22" descr="image.png"/>
+          <p:cNvPicPr>
+            <a:picLocks noChangeAspect="1"/>
+          </p:cNvPicPr>
+          <p:nvPr/>
+        </p:nvPicPr>
+        <p:blipFill>
+          <a:blip r:embed="rId4">
+            <a:alphaModFix/>
+          </a:blip>
+          <a:stretch>
+            <a:fillRect/>
+          </a:stretch>
+        </p:blipFill>
+        <p:spPr>
+          <a:xfrm>
+            <a:off x="3604702" y="2437024"/>
+            <a:ext cx="342891" cy="266043"/>
+          </a:xfrm>
+          <a:prstGeom prst="rect">
+            <a:avLst/>
+          </a:prstGeom>
+        </p:spPr>
+      </p:pic>
+      <p:sp>
+        <p:nvSpPr>
+          <p:cNvPr id="24" name="TextBox 23"/>
+          <p:cNvSpPr txBox="1"/>
+          <p:nvPr/>
+        </p:nvSpPr>
+        <p:spPr>
+          <a:xfrm>
+            <a:off x="3947593" y="2398653"/>
+            <a:ext cx="1928342" cy="342786"/>
+          </a:xfrm>
+          <a:prstGeom prst="rect">
+            <a:avLst/>
+          </a:prstGeom>
+          <a:noFill/>
+        </p:spPr>
+        <p:txBody>
+          <a:bodyPr wrap="square" lIns="73152" tIns="54864" rIns="73152" bIns="54864" anchor="ctr">
+            <a:spAutoFit/>
+          </a:bodyPr>
+          <a:lstStyle/>
+          <a:p>
+            <a:pPr algn="l">
+              <a:lnSpc>
+                <a:spcPts val="1950"/>
+              </a:lnSpc>
+              <a:spcBef>
+                <a:spcPts val="0"/>
+              </a:spcBef>
+              <a:spcAft>
+                <a:spcPts val="0"/>
+              </a:spcAft>
+            </a:pPr>
+            <a:r>
+              <a:rPr sz="1196" b="1" dirty="0" err="1">
+                <a:solidFill>
+                  <a:srgbClr val="0D47A1"/>
+                </a:solidFill>
+                <a:latin typeface="Noto Sans"/>
+              </a:rPr>
+              <a:t>Машинное</a:t>
+            </a:r>
+            <a:r>
+              <a:rPr sz="1196" b="1" dirty="0">
+                <a:solidFill>
+                  <a:srgbClr val="0D47A1"/>
+                </a:solidFill>
+                <a:latin typeface="Noto Sans"/>
+              </a:rPr>
+              <a:t> </a:t>
+            </a:r>
+            <a:r>
+              <a:rPr sz="1196" b="1" dirty="0" err="1">
+                <a:solidFill>
+                  <a:srgbClr val="0D47A1"/>
+                </a:solidFill>
+                <a:latin typeface="Noto Sans"/>
+              </a:rPr>
+              <a:t>обучение</a:t>
+            </a:r>
+            <a:endParaRPr sz="1196" b="1" dirty="0">
+              <a:solidFill>
+                <a:srgbClr val="0D47A1"/>
+              </a:solidFill>
+              <a:latin typeface="Noto Sans"/>
+            </a:endParaRPr>
+          </a:p>
+        </p:txBody>
+      </p:sp>
+      <p:sp>
+        <p:nvSpPr>
+          <p:cNvPr id="25" name="TextBox 24"/>
+          <p:cNvSpPr txBox="1"/>
+          <p:nvPr/>
+        </p:nvSpPr>
+        <p:spPr>
+          <a:xfrm>
+            <a:off x="3604702" y="2970096"/>
+            <a:ext cx="2133546" cy="457200"/>
+          </a:xfrm>
+          <a:prstGeom prst="rect">
+            <a:avLst/>
+          </a:prstGeom>
+          <a:noFill/>
+        </p:spPr>
+        <p:txBody>
+          <a:bodyPr wrap="square" lIns="73152" tIns="54864" rIns="73152" bIns="54864" anchor="ctr">
+            <a:spAutoFit/>
+          </a:bodyPr>
+          <a:lstStyle/>
+          <a:p>
+            <a:pPr algn="l">
+              <a:lnSpc>
+                <a:spcPts val="1560"/>
+              </a:lnSpc>
+              <a:spcBef>
+                <a:spcPts val="0"/>
+              </a:spcBef>
+              <a:spcAft>
+                <a:spcPts val="0"/>
+              </a:spcAft>
+            </a:pPr>
+            <a:r>
+              <a:rPr sz="956" b="0" dirty="0" err="1">
+                <a:solidFill>
+                  <a:srgbClr val="4B5563"/>
+                </a:solidFill>
+                <a:latin typeface="Noto Sans"/>
+              </a:rPr>
+              <a:t>Повышение</a:t>
+            </a:r>
+            <a:r>
+              <a:rPr sz="956" b="0" dirty="0">
+                <a:solidFill>
+                  <a:srgbClr val="4B5563"/>
+                </a:solidFill>
+                <a:latin typeface="Noto Sans"/>
+              </a:rPr>
+              <a:t> </a:t>
+            </a:r>
+            <a:r>
+              <a:rPr sz="956" b="0" dirty="0" err="1">
+                <a:solidFill>
+                  <a:srgbClr val="4B5563"/>
+                </a:solidFill>
+                <a:latin typeface="Noto Sans"/>
+              </a:rPr>
+              <a:t>точности</a:t>
+            </a:r>
+            <a:r>
+              <a:rPr sz="956" b="0" dirty="0">
+                <a:solidFill>
+                  <a:srgbClr val="4B5563"/>
+                </a:solidFill>
+                <a:latin typeface="Noto Sans"/>
+              </a:rPr>
+              <a:t> с </a:t>
+            </a:r>
+            <a:r>
+              <a:rPr sz="956" b="0" dirty="0" err="1">
+                <a:solidFill>
+                  <a:srgbClr val="4B5563"/>
+                </a:solidFill>
+                <a:latin typeface="Noto Sans"/>
+              </a:rPr>
+              <a:t>помощью</a:t>
+            </a:r>
+            <a:r>
+              <a:rPr sz="956" b="0" dirty="0">
+                <a:solidFill>
+                  <a:srgbClr val="4B5563"/>
+                </a:solidFill>
+                <a:latin typeface="Noto Sans"/>
+              </a:rPr>
+              <a:t> ML-</a:t>
+            </a:r>
+            <a:r>
+              <a:rPr sz="956" b="0" dirty="0" err="1">
+                <a:solidFill>
+                  <a:srgbClr val="4B5563"/>
+                </a:solidFill>
+                <a:latin typeface="Noto Sans"/>
+              </a:rPr>
+              <a:t>алгоритмов</a:t>
+            </a:r>
+            <a:endParaRPr sz="956" b="0" dirty="0">
+              <a:solidFill>
+                <a:srgbClr val="4B5563"/>
+              </a:solidFill>
+              <a:latin typeface="Noto Sans"/>
+            </a:endParaRPr>
+          </a:p>
+        </p:txBody>
+      </p:sp>
+      <p:sp>
+        <p:nvSpPr>
+          <p:cNvPr id="26" name="Rounded Rectangle 25"/>
+          <p:cNvSpPr/>
+          <p:nvPr/>
+        </p:nvSpPr>
+        <p:spPr>
+          <a:xfrm>
+            <a:off x="594878" y="3846395"/>
+            <a:ext cx="2590735" cy="1638299"/>
+          </a:xfrm>
+          <a:prstGeom prst="roundRect">
+            <a:avLst>
+              <a:gd name="adj" fmla="val 13953"/>
+            </a:avLst>
+          </a:prstGeom>
+          <a:solidFill>
+            <a:srgbClr val="FFFFFF"/>
+          </a:solidFill>
+          <a:ln w="33020">
+            <a:solidFill>
+              <a:srgbClr val="0D47A1"/>
+            </a:solidFill>
+          </a:ln>
+        </p:spPr>
+        <p:style>
+          <a:lnRef idx="1">
+            <a:schemeClr val="accent1"/>
+          </a:lnRef>
+          <a:fillRef idx="3">
+            <a:schemeClr val="accent1"/>
+          </a:fillRef>
+          <a:effectRef idx="2">
+            <a:schemeClr val="accent1"/>
+          </a:effectRef>
+          <a:fontRef idx="minor">
+            <a:schemeClr val="lt1"/>
+          </a:fontRef>
+        </p:style>
+        <p:txBody>
+          <a:bodyPr rtlCol="0" anchor="ctr"/>
+          <a:lstStyle/>
+          <a:p>
+            <a:pPr algn="ctr"/>
+            <a:endParaRPr dirty="0"/>
+          </a:p>
+        </p:txBody>
+      </p:sp>
+      <p:pic>
+        <p:nvPicPr>
+          <p:cNvPr id="27" name="Picture 26" descr="image.png"/>
+          <p:cNvPicPr>
+            <a:picLocks noChangeAspect="1"/>
+          </p:cNvPicPr>
+          <p:nvPr/>
+        </p:nvPicPr>
+        <p:blipFill>
+          <a:blip r:embed="rId5">
+            <a:alphaModFix/>
+          </a:blip>
+          <a:stretch>
+            <a:fillRect/>
+          </a:stretch>
+        </p:blipFill>
+        <p:spPr>
+          <a:xfrm>
+            <a:off x="823472" y="4239220"/>
+            <a:ext cx="342891" cy="319251"/>
+          </a:xfrm>
+          <a:prstGeom prst="rect">
+            <a:avLst/>
+          </a:prstGeom>
+        </p:spPr>
+      </p:pic>
+      <p:sp>
+        <p:nvSpPr>
+          <p:cNvPr id="28" name="TextBox 27"/>
+          <p:cNvSpPr txBox="1"/>
+          <p:nvPr/>
+        </p:nvSpPr>
+        <p:spPr>
+          <a:xfrm>
+            <a:off x="1280661" y="4113096"/>
+            <a:ext cx="1676358" cy="571500"/>
+          </a:xfrm>
+          <a:prstGeom prst="rect">
+            <a:avLst/>
+          </a:prstGeom>
+          <a:noFill/>
+        </p:spPr>
+        <p:txBody>
+          <a:bodyPr wrap="none" lIns="73152" tIns="54864" rIns="73152" bIns="54864" anchor="ctr">
+            <a:spAutoFit/>
+          </a:bodyPr>
+          <a:lstStyle/>
+          <a:p>
+            <a:pPr algn="l">
+              <a:lnSpc>
+                <a:spcPts val="1950"/>
+              </a:lnSpc>
+              <a:spcBef>
+                <a:spcPts val="0"/>
+              </a:spcBef>
+              <a:spcAft>
+                <a:spcPts val="0"/>
+              </a:spcAft>
+            </a:pPr>
+            <a:r>
+              <a:rPr sz="1196" b="1" dirty="0" err="1">
+                <a:solidFill>
+                  <a:srgbClr val="0D47A1"/>
+                </a:solidFill>
+                <a:latin typeface="Noto Sans"/>
+              </a:rPr>
+              <a:t>Мобильная</a:t>
+            </a:r>
+            <a:r>
+              <a:rPr sz="1196" b="1" dirty="0">
+                <a:solidFill>
+                  <a:srgbClr val="0D47A1"/>
+                </a:solidFill>
+                <a:latin typeface="Noto Sans"/>
+              </a:rPr>
+              <a:t> </a:t>
+            </a:r>
+            <a:r>
+              <a:rPr sz="1196" b="1" dirty="0" err="1">
+                <a:solidFill>
+                  <a:srgbClr val="0D47A1"/>
+                </a:solidFill>
+                <a:latin typeface="Noto Sans"/>
+              </a:rPr>
+              <a:t>версия</a:t>
+            </a:r>
+            <a:endParaRPr sz="1196" b="1" dirty="0">
+              <a:solidFill>
+                <a:srgbClr val="0D47A1"/>
+              </a:solidFill>
+              <a:latin typeface="Noto Sans"/>
+            </a:endParaRPr>
+          </a:p>
+        </p:txBody>
+      </p:sp>
+      <p:sp>
+        <p:nvSpPr>
+          <p:cNvPr id="29" name="TextBox 28"/>
+          <p:cNvSpPr txBox="1"/>
+          <p:nvPr/>
+        </p:nvSpPr>
+        <p:spPr>
+          <a:xfrm>
+            <a:off x="823472" y="4798896"/>
+            <a:ext cx="2133546" cy="457200"/>
+          </a:xfrm>
+          <a:prstGeom prst="rect">
+            <a:avLst/>
+          </a:prstGeom>
+          <a:noFill/>
+        </p:spPr>
+        <p:txBody>
+          <a:bodyPr wrap="square" lIns="73152" tIns="54864" rIns="73152" bIns="54864" anchor="ctr">
+            <a:spAutoFit/>
+          </a:bodyPr>
+          <a:lstStyle/>
+          <a:p>
+            <a:pPr algn="l">
+              <a:lnSpc>
+                <a:spcPts val="1560"/>
+              </a:lnSpc>
+              <a:spcBef>
+                <a:spcPts val="0"/>
+              </a:spcBef>
+              <a:spcAft>
+                <a:spcPts val="0"/>
+              </a:spcAft>
+            </a:pPr>
+            <a:r>
+              <a:rPr sz="956" b="0" dirty="0" err="1">
+                <a:solidFill>
+                  <a:srgbClr val="4B5563"/>
+                </a:solidFill>
+                <a:latin typeface="Noto Sans"/>
+              </a:rPr>
+              <a:t>Адаптация</a:t>
+            </a:r>
+            <a:r>
+              <a:rPr sz="956" b="0" dirty="0">
+                <a:solidFill>
+                  <a:srgbClr val="4B5563"/>
+                </a:solidFill>
+                <a:latin typeface="Noto Sans"/>
+              </a:rPr>
+              <a:t> </a:t>
+            </a:r>
+            <a:r>
+              <a:rPr sz="956" b="0" dirty="0" err="1">
+                <a:solidFill>
+                  <a:srgbClr val="4B5563"/>
+                </a:solidFill>
+                <a:latin typeface="Noto Sans"/>
+              </a:rPr>
+              <a:t>приложения</a:t>
+            </a:r>
+            <a:r>
+              <a:rPr sz="956" b="0" dirty="0">
+                <a:solidFill>
+                  <a:srgbClr val="4B5563"/>
+                </a:solidFill>
+                <a:latin typeface="Noto Sans"/>
+              </a:rPr>
+              <a:t> </a:t>
+            </a:r>
+            <a:r>
+              <a:rPr sz="956" b="0" dirty="0" err="1">
+                <a:solidFill>
+                  <a:srgbClr val="4B5563"/>
+                </a:solidFill>
+                <a:latin typeface="Noto Sans"/>
+              </a:rPr>
+              <a:t>для</a:t>
+            </a:r>
+            <a:r>
+              <a:rPr sz="956" b="0" dirty="0">
+                <a:solidFill>
+                  <a:srgbClr val="4B5563"/>
+                </a:solidFill>
+                <a:latin typeface="Noto Sans"/>
+              </a:rPr>
+              <a:t> </a:t>
+            </a:r>
+            <a:r>
+              <a:rPr sz="956" b="0" dirty="0" err="1">
+                <a:solidFill>
+                  <a:srgbClr val="4B5563"/>
+                </a:solidFill>
+                <a:latin typeface="Noto Sans"/>
+              </a:rPr>
+              <a:t>смартфонов</a:t>
+            </a:r>
+            <a:endParaRPr sz="956" b="0" dirty="0">
+              <a:solidFill>
+                <a:srgbClr val="4B5563"/>
+              </a:solidFill>
+              <a:latin typeface="Noto Sans"/>
+            </a:endParaRPr>
+          </a:p>
+        </p:txBody>
+      </p:sp>
+      <p:sp>
+        <p:nvSpPr>
+          <p:cNvPr id="30" name="Rounded Rectangle 29"/>
+          <p:cNvSpPr/>
+          <p:nvPr/>
+        </p:nvSpPr>
+        <p:spPr>
+          <a:xfrm>
+            <a:off x="3376108" y="3846395"/>
+            <a:ext cx="2590735" cy="1638299"/>
+          </a:xfrm>
+          <a:prstGeom prst="roundRect">
+            <a:avLst>
+              <a:gd name="adj" fmla="val 13953"/>
+            </a:avLst>
+          </a:prstGeom>
+          <a:solidFill>
+            <a:srgbClr val="FFFFFF"/>
+          </a:solidFill>
+          <a:ln w="33020">
+            <a:solidFill>
+              <a:srgbClr val="4FC3F7"/>
+            </a:solidFill>
+          </a:ln>
+        </p:spPr>
+        <p:style>
+          <a:lnRef idx="1">
+            <a:schemeClr val="accent1"/>
+          </a:lnRef>
+          <a:fillRef idx="3">
+            <a:schemeClr val="accent1"/>
+          </a:fillRef>
+          <a:effectRef idx="2">
+            <a:schemeClr val="accent1"/>
+          </a:effectRef>
+          <a:fontRef idx="minor">
+            <a:schemeClr val="lt1"/>
+          </a:fontRef>
+        </p:style>
+        <p:txBody>
+          <a:bodyPr rtlCol="0" anchor="ctr"/>
+          <a:lstStyle/>
+          <a:p>
+            <a:pPr algn="ctr"/>
+            <a:endParaRPr dirty="0"/>
+          </a:p>
+        </p:txBody>
+      </p:sp>
+      <p:pic>
+        <p:nvPicPr>
+          <p:cNvPr id="31" name="Picture 30" descr="image.png"/>
+          <p:cNvPicPr>
+            <a:picLocks noChangeAspect="1"/>
+          </p:cNvPicPr>
+          <p:nvPr/>
+        </p:nvPicPr>
+        <p:blipFill>
+          <a:blip r:embed="rId6">
+            <a:alphaModFix/>
+          </a:blip>
+          <a:stretch>
+            <a:fillRect/>
+          </a:stretch>
+        </p:blipFill>
+        <p:spPr>
+          <a:xfrm>
+            <a:off x="3604702" y="4138222"/>
+            <a:ext cx="342891" cy="292647"/>
+          </a:xfrm>
+          <a:prstGeom prst="rect">
+            <a:avLst/>
+          </a:prstGeom>
+        </p:spPr>
+      </p:pic>
+      <p:sp>
+        <p:nvSpPr>
+          <p:cNvPr id="32" name="TextBox 31"/>
+          <p:cNvSpPr txBox="1"/>
+          <p:nvPr/>
+        </p:nvSpPr>
+        <p:spPr>
+          <a:xfrm>
+            <a:off x="4061891" y="4141671"/>
+            <a:ext cx="1543011" cy="285750"/>
+          </a:xfrm>
+          <a:prstGeom prst="rect">
+            <a:avLst/>
+          </a:prstGeom>
+          <a:noFill/>
+        </p:spPr>
+        <p:txBody>
+          <a:bodyPr wrap="none" lIns="73152" tIns="54864" rIns="73152" bIns="54864" anchor="ctr">
+            <a:spAutoFit/>
+          </a:bodyPr>
+          <a:lstStyle/>
+          <a:p>
+            <a:pPr algn="l">
+              <a:lnSpc>
+                <a:spcPts val="1950"/>
+              </a:lnSpc>
+              <a:spcBef>
+                <a:spcPts val="0"/>
+              </a:spcBef>
+              <a:spcAft>
+                <a:spcPts val="0"/>
+              </a:spcAft>
+            </a:pPr>
+            <a:r>
+              <a:rPr sz="1196" b="1" dirty="0" err="1">
+                <a:solidFill>
+                  <a:srgbClr val="0D47A1"/>
+                </a:solidFill>
+                <a:latin typeface="Noto Sans"/>
+              </a:rPr>
+              <a:t>Интеграция</a:t>
+            </a:r>
+            <a:r>
+              <a:rPr sz="1196" b="1" dirty="0">
+                <a:solidFill>
+                  <a:srgbClr val="0D47A1"/>
+                </a:solidFill>
+                <a:latin typeface="Noto Sans"/>
+              </a:rPr>
+              <a:t> API</a:t>
+            </a:r>
+          </a:p>
+        </p:txBody>
+      </p:sp>
+      <p:sp>
+        <p:nvSpPr>
+          <p:cNvPr id="33" name="TextBox 32"/>
+          <p:cNvSpPr txBox="1"/>
+          <p:nvPr/>
+        </p:nvSpPr>
+        <p:spPr>
+          <a:xfrm>
+            <a:off x="3604702" y="4570296"/>
+            <a:ext cx="2133546" cy="457200"/>
+          </a:xfrm>
+          <a:prstGeom prst="rect">
+            <a:avLst/>
+          </a:prstGeom>
+          <a:noFill/>
+        </p:spPr>
+        <p:txBody>
+          <a:bodyPr wrap="square" lIns="73152" tIns="54864" rIns="73152" bIns="54864" anchor="ctr">
+            <a:spAutoFit/>
+          </a:bodyPr>
+          <a:lstStyle/>
+          <a:p>
+            <a:pPr algn="l">
+              <a:lnSpc>
+                <a:spcPts val="1560"/>
+              </a:lnSpc>
+              <a:spcBef>
+                <a:spcPts val="0"/>
+              </a:spcBef>
+              <a:spcAft>
+                <a:spcPts val="0"/>
+              </a:spcAft>
+            </a:pPr>
+            <a:r>
+              <a:rPr sz="956" b="0" dirty="0" err="1">
+                <a:solidFill>
+                  <a:srgbClr val="4B5563"/>
+                </a:solidFill>
+                <a:latin typeface="Noto Sans"/>
+              </a:rPr>
+              <a:t>Подключение</a:t>
+            </a:r>
+            <a:r>
+              <a:rPr sz="956" b="0" dirty="0">
+                <a:solidFill>
+                  <a:srgbClr val="4B5563"/>
+                </a:solidFill>
+                <a:latin typeface="Noto Sans"/>
+              </a:rPr>
+              <a:t> к </a:t>
+            </a:r>
+            <a:r>
+              <a:rPr sz="956" b="0" dirty="0" err="1">
+                <a:solidFill>
+                  <a:srgbClr val="4B5563"/>
+                </a:solidFill>
+                <a:latin typeface="Noto Sans"/>
+              </a:rPr>
+              <a:t>медицинским</a:t>
+            </a:r>
+            <a:r>
+              <a:rPr sz="956" b="0" dirty="0">
+                <a:solidFill>
+                  <a:srgbClr val="4B5563"/>
+                </a:solidFill>
+                <a:latin typeface="Noto Sans"/>
+              </a:rPr>
+              <a:t> </a:t>
+            </a:r>
+            <a:r>
+              <a:rPr sz="956" b="0" dirty="0" err="1">
+                <a:solidFill>
+                  <a:srgbClr val="4B5563"/>
+                </a:solidFill>
+                <a:latin typeface="Noto Sans"/>
+              </a:rPr>
+              <a:t>базам</a:t>
+            </a:r>
+            <a:r>
+              <a:rPr sz="956" b="0" dirty="0">
+                <a:solidFill>
+                  <a:srgbClr val="4B5563"/>
+                </a:solidFill>
+                <a:latin typeface="Noto Sans"/>
+              </a:rPr>
+              <a:t> </a:t>
+            </a:r>
+            <a:r>
+              <a:rPr sz="956" b="0" dirty="0" err="1">
+                <a:solidFill>
+                  <a:srgbClr val="4B5563"/>
+                </a:solidFill>
+                <a:latin typeface="Noto Sans"/>
+              </a:rPr>
+              <a:t>данных</a:t>
+            </a:r>
+            <a:endParaRPr sz="956" b="0" dirty="0">
+              <a:solidFill>
+                <a:srgbClr val="4B5563"/>
+              </a:solidFill>
+              <a:latin typeface="Noto Sans"/>
+            </a:endParaRPr>
+          </a:p>
+        </p:txBody>
+      </p:sp>
+      <p:pic>
+        <p:nvPicPr>
+          <p:cNvPr id="34" name="Picture 33" descr="image.png"/>
+          <p:cNvPicPr>
+            <a:picLocks noChangeAspect="1"/>
+          </p:cNvPicPr>
+          <p:nvPr/>
+        </p:nvPicPr>
+        <p:blipFill>
+          <a:blip r:embed="rId7">
+            <a:alphaModFix/>
+          </a:blip>
+          <a:stretch>
+            <a:fillRect/>
+          </a:stretch>
+        </p:blipFill>
+        <p:spPr>
+          <a:xfrm>
+            <a:off x="594878" y="5907605"/>
+            <a:ext cx="228594" cy="125729"/>
+          </a:xfrm>
+          <a:prstGeom prst="rect">
+            <a:avLst/>
+          </a:prstGeom>
+        </p:spPr>
+      </p:pic>
+      <p:sp>
+        <p:nvSpPr>
+          <p:cNvPr id="35" name="TextBox 34"/>
+          <p:cNvSpPr txBox="1"/>
+          <p:nvPr/>
+        </p:nvSpPr>
+        <p:spPr>
+          <a:xfrm>
+            <a:off x="937769" y="5812895"/>
+            <a:ext cx="5029074" cy="315151"/>
+          </a:xfrm>
+          <a:prstGeom prst="rect">
+            <a:avLst/>
+          </a:prstGeom>
+          <a:noFill/>
+        </p:spPr>
+        <p:txBody>
+          <a:bodyPr wrap="square" lIns="73152" tIns="54864" rIns="73152" bIns="54864" anchor="ctr">
+            <a:spAutoFit/>
+          </a:bodyPr>
+          <a:lstStyle/>
+          <a:p>
+            <a:pPr algn="l">
+              <a:lnSpc>
+                <a:spcPts val="1755"/>
+              </a:lnSpc>
+              <a:spcBef>
+                <a:spcPts val="0"/>
+              </a:spcBef>
+              <a:spcAft>
+                <a:spcPts val="0"/>
+              </a:spcAft>
+            </a:pPr>
+            <a:r>
+              <a:rPr lang="ru-RU" sz="1076" b="0" dirty="0">
+                <a:solidFill>
+                  <a:srgbClr val="374151"/>
+                </a:solidFill>
+                <a:latin typeface="Noto Sans"/>
+              </a:rPr>
+              <a:t>Непрерывное</a:t>
+            </a:r>
+            <a:r>
+              <a:rPr sz="1076" b="0" dirty="0">
+                <a:solidFill>
+                  <a:srgbClr val="374151"/>
+                </a:solidFill>
+                <a:latin typeface="Noto Sans"/>
+              </a:rPr>
+              <a:t> </a:t>
+            </a:r>
+            <a:r>
+              <a:rPr sz="1076" b="0" dirty="0" err="1">
+                <a:solidFill>
+                  <a:srgbClr val="374151"/>
+                </a:solidFill>
+                <a:latin typeface="Noto Sans"/>
+              </a:rPr>
+              <a:t>развитие</a:t>
+            </a:r>
+            <a:r>
+              <a:rPr sz="1076" b="0" dirty="0">
+                <a:solidFill>
+                  <a:srgbClr val="374151"/>
+                </a:solidFill>
+                <a:latin typeface="Noto Sans"/>
+              </a:rPr>
+              <a:t> </a:t>
+            </a:r>
+            <a:r>
+              <a:rPr sz="1076" b="0" dirty="0" err="1">
+                <a:solidFill>
+                  <a:srgbClr val="374151"/>
+                </a:solidFill>
+                <a:latin typeface="Noto Sans"/>
+              </a:rPr>
+              <a:t>для</a:t>
+            </a:r>
+            <a:r>
+              <a:rPr sz="1076" b="0" dirty="0">
+                <a:solidFill>
+                  <a:srgbClr val="374151"/>
+                </a:solidFill>
+                <a:latin typeface="Noto Sans"/>
+              </a:rPr>
+              <a:t> </a:t>
+            </a:r>
+            <a:r>
+              <a:rPr sz="1076" b="0" dirty="0" err="1">
+                <a:solidFill>
+                  <a:srgbClr val="374151"/>
+                </a:solidFill>
+                <a:latin typeface="Noto Sans"/>
+              </a:rPr>
+              <a:t>повышения</a:t>
+            </a:r>
+            <a:r>
+              <a:rPr sz="1076" b="0" dirty="0">
+                <a:solidFill>
+                  <a:srgbClr val="374151"/>
+                </a:solidFill>
+                <a:latin typeface="Noto Sans"/>
+              </a:rPr>
+              <a:t> </a:t>
+            </a:r>
+            <a:r>
+              <a:rPr sz="1076" b="0" dirty="0" err="1">
+                <a:solidFill>
+                  <a:srgbClr val="374151"/>
+                </a:solidFill>
+                <a:latin typeface="Noto Sans"/>
+              </a:rPr>
+              <a:t>качества</a:t>
+            </a:r>
+            <a:r>
+              <a:rPr sz="1076" b="0" dirty="0">
+                <a:solidFill>
+                  <a:srgbClr val="374151"/>
+                </a:solidFill>
+                <a:latin typeface="Noto Sans"/>
+              </a:rPr>
+              <a:t> </a:t>
+            </a:r>
+            <a:r>
+              <a:rPr sz="1076" b="0" dirty="0" err="1">
+                <a:solidFill>
+                  <a:srgbClr val="374151"/>
+                </a:solidFill>
+                <a:latin typeface="Noto Sans"/>
+              </a:rPr>
+              <a:t>прогнозов</a:t>
+            </a:r>
+            <a:endParaRPr sz="1076" b="0" dirty="0">
+              <a:solidFill>
+                <a:srgbClr val="374151"/>
+              </a:solidFill>
+              <a:latin typeface="Noto Sans"/>
+            </a:endParaRPr>
+          </a:p>
+        </p:txBody>
+      </p:sp>
+      <p:sp>
+        <p:nvSpPr>
+          <p:cNvPr id="36" name="Rectangle 4">
+            <a:extLst>
+              <a:ext uri="{FF2B5EF4-FFF2-40B4-BE49-F238E27FC236}">
+                <a16:creationId xmlns:a16="http://schemas.microsoft.com/office/drawing/2014/main" id="{DB9091FE-F925-F8CA-ABEE-C07CE7DD6521}"/>
+              </a:ext>
+            </a:extLst>
+          </p:cNvPr>
+          <p:cNvSpPr/>
+          <p:nvPr/>
+        </p:nvSpPr>
+        <p:spPr>
+          <a:xfrm>
+            <a:off x="6957416" y="1321429"/>
+            <a:ext cx="76198" cy="380999"/>
+          </a:xfrm>
+          <a:prstGeom prst="rect">
+            <a:avLst/>
+          </a:prstGeom>
+          <a:solidFill>
+            <a:srgbClr val="4FC3F7"/>
+          </a:solidFill>
+          <a:ln>
+            <a:noFill/>
+          </a:ln>
+        </p:spPr>
+        <p:style>
+          <a:lnRef idx="1">
+            <a:schemeClr val="accent1"/>
+          </a:lnRef>
+          <a:fillRef idx="3">
+            <a:schemeClr val="accent1"/>
+          </a:fillRef>
+          <a:effectRef idx="2">
+            <a:schemeClr val="accent1"/>
+          </a:effectRef>
+          <a:fontRef idx="minor">
+            <a:schemeClr val="lt1"/>
+          </a:fontRef>
+        </p:style>
+        <p:txBody>
+          <a:bodyPr rtlCol="0" anchor="ctr"/>
+          <a:lstStyle/>
+          <a:p>
+            <a:pPr algn="ctr"/>
+            <a:endParaRPr dirty="0"/>
+          </a:p>
+        </p:txBody>
+      </p:sp>
+      <p:sp>
+        <p:nvSpPr>
+          <p:cNvPr id="37" name="TextBox 36">
+            <a:extLst>
+              <a:ext uri="{FF2B5EF4-FFF2-40B4-BE49-F238E27FC236}">
+                <a16:creationId xmlns:a16="http://schemas.microsoft.com/office/drawing/2014/main" id="{91598196-A342-D469-9307-A64F6718D18F}"/>
+              </a:ext>
+            </a:extLst>
+          </p:cNvPr>
+          <p:cNvSpPr txBox="1"/>
+          <p:nvPr/>
+        </p:nvSpPr>
+        <p:spPr>
+          <a:xfrm>
+            <a:off x="7186010" y="1311904"/>
+            <a:ext cx="2009724" cy="400050"/>
+          </a:xfrm>
+          <a:prstGeom prst="rect">
+            <a:avLst/>
+          </a:prstGeom>
+          <a:noFill/>
+        </p:spPr>
+        <p:txBody>
+          <a:bodyPr wrap="none" lIns="73152" tIns="54864" rIns="73152" bIns="54864" anchor="ctr">
+            <a:spAutoFit/>
+          </a:bodyPr>
+          <a:lstStyle/>
+          <a:p>
+            <a:pPr algn="l">
+              <a:lnSpc>
+                <a:spcPts val="2730"/>
+              </a:lnSpc>
+              <a:spcBef>
+                <a:spcPts val="0"/>
+              </a:spcBef>
+              <a:spcAft>
+                <a:spcPts val="0"/>
+              </a:spcAft>
+            </a:pPr>
+            <a:r>
+              <a:rPr sz="1674" b="1" dirty="0" err="1">
+                <a:solidFill>
+                  <a:srgbClr val="0D47A1"/>
+                </a:solidFill>
+                <a:latin typeface="Noto Sans"/>
+              </a:rPr>
+              <a:t>Итоги</a:t>
+            </a:r>
+            <a:r>
+              <a:rPr sz="1674" b="1" dirty="0">
+                <a:solidFill>
+                  <a:srgbClr val="0D47A1"/>
+                </a:solidFill>
+                <a:latin typeface="Noto Sans"/>
+              </a:rPr>
+              <a:t> </a:t>
+            </a:r>
+            <a:r>
+              <a:rPr sz="1674" b="1" dirty="0" err="1">
+                <a:solidFill>
+                  <a:srgbClr val="0D47A1"/>
+                </a:solidFill>
+                <a:latin typeface="Noto Sans"/>
+              </a:rPr>
+              <a:t>проекта</a:t>
+            </a:r>
+            <a:endParaRPr sz="1674" b="1" dirty="0">
+              <a:solidFill>
+                <a:srgbClr val="0D47A1"/>
+              </a:solidFill>
+              <a:latin typeface="Noto Sans"/>
+            </a:endParaRPr>
+          </a:p>
+        </p:txBody>
+      </p:sp>
+      <p:sp>
+        <p:nvSpPr>
+          <p:cNvPr id="38" name="Rounded Rectangle 6">
+            <a:extLst>
+              <a:ext uri="{FF2B5EF4-FFF2-40B4-BE49-F238E27FC236}">
+                <a16:creationId xmlns:a16="http://schemas.microsoft.com/office/drawing/2014/main" id="{BDED7DF1-5BDF-1B8B-33A4-2904E1E508C1}"/>
+              </a:ext>
+            </a:extLst>
+          </p:cNvPr>
+          <p:cNvSpPr/>
+          <p:nvPr/>
+        </p:nvSpPr>
+        <p:spPr>
+          <a:xfrm>
+            <a:off x="6957416" y="2016754"/>
             <a:ext cx="4152796" cy="2895600"/>
           </a:xfrm>
           <a:prstGeom prst="roundRect">
@@ -15646,1566 +16827,13 @@
       </p:sp>
       <p:pic>
         <p:nvPicPr>
-          <p:cNvPr id="8" name="Picture 7" descr="image.png"/>
-          <p:cNvPicPr>
-            <a:picLocks noChangeAspect="1"/>
-          </p:cNvPicPr>
-          <p:nvPr/>
-        </p:nvPicPr>
-        <p:blipFill>
-          <a:blip r:embed="rId3">
-            <a:alphaModFix/>
-          </a:blip>
-          <a:stretch>
-            <a:fillRect/>
-          </a:stretch>
-        </p:blipFill>
-        <p:spPr>
-          <a:xfrm>
-            <a:off x="971525" y="2741696"/>
-            <a:ext cx="457188" cy="403057"/>
-          </a:xfrm>
-          <a:prstGeom prst="rect">
-            <a:avLst/>
-          </a:prstGeom>
-        </p:spPr>
-      </p:pic>
-      <p:sp>
-        <p:nvSpPr>
-          <p:cNvPr id="9" name="TextBox 8"/>
-          <p:cNvSpPr txBox="1"/>
-          <p:nvPr/>
-        </p:nvSpPr>
-        <p:spPr>
-          <a:xfrm>
-            <a:off x="1581110" y="2571750"/>
-            <a:ext cx="2933626" cy="742950"/>
-          </a:xfrm>
-          <a:prstGeom prst="rect">
-            <a:avLst/>
-          </a:prstGeom>
-          <a:noFill/>
-        </p:spPr>
-        <p:txBody>
-          <a:bodyPr wrap="none" lIns="73152" tIns="54864" rIns="73152" bIns="54864" anchor="ctr">
-            <a:spAutoFit/>
-          </a:bodyPr>
-          <a:lstStyle/>
-          <a:p>
-            <a:pPr algn="l">
-              <a:lnSpc>
-                <a:spcPts val="2535"/>
-              </a:lnSpc>
-              <a:spcBef>
-                <a:spcPts val="0"/>
-              </a:spcBef>
-              <a:spcAft>
-                <a:spcPts val="0"/>
-              </a:spcAft>
-            </a:pPr>
-            <a:r>
-              <a:rPr sz="1554" b="1" dirty="0" err="1">
-                <a:solidFill>
-                  <a:srgbClr val="FFFFFF"/>
-                </a:solidFill>
-                <a:latin typeface="Noto Sans"/>
-              </a:rPr>
-              <a:t>Проект</a:t>
-            </a:r>
-            <a:r>
-              <a:rPr sz="1554" b="1" dirty="0">
-                <a:solidFill>
-                  <a:srgbClr val="FFFFFF"/>
-                </a:solidFill>
-                <a:latin typeface="Noto Sans"/>
-              </a:rPr>
-              <a:t> </a:t>
-            </a:r>
-            <a:r>
-              <a:rPr sz="1554" b="1" dirty="0" err="1">
-                <a:solidFill>
-                  <a:srgbClr val="FFFFFF"/>
-                </a:solidFill>
-                <a:latin typeface="Noto Sans"/>
-              </a:rPr>
-              <a:t>реализован</a:t>
-            </a:r>
-            <a:r>
-              <a:rPr sz="1554" b="1" dirty="0">
-                <a:solidFill>
-                  <a:srgbClr val="FFFFFF"/>
-                </a:solidFill>
-                <a:latin typeface="Noto Sans"/>
-              </a:rPr>
-              <a:t> </a:t>
-            </a:r>
-            <a:r>
-              <a:rPr sz="1554" b="1" dirty="0" err="1">
-                <a:solidFill>
-                  <a:srgbClr val="FFFFFF"/>
-                </a:solidFill>
-                <a:latin typeface="Noto Sans"/>
-              </a:rPr>
-              <a:t>успешно</a:t>
-            </a:r>
-            <a:endParaRPr sz="1554" b="1" dirty="0">
-              <a:solidFill>
-                <a:srgbClr val="FFFFFF"/>
-              </a:solidFill>
-              <a:latin typeface="Noto Sans"/>
-            </a:endParaRPr>
-          </a:p>
-        </p:txBody>
-      </p:sp>
-      <p:sp>
-        <p:nvSpPr>
-          <p:cNvPr id="10" name="TextBox 9"/>
-          <p:cNvSpPr txBox="1"/>
-          <p:nvPr/>
-        </p:nvSpPr>
-        <p:spPr>
-          <a:xfrm>
-            <a:off x="971525" y="3467100"/>
-            <a:ext cx="3543211" cy="1390650"/>
-          </a:xfrm>
-          <a:prstGeom prst="rect">
-            <a:avLst/>
-          </a:prstGeom>
-          <a:noFill/>
-        </p:spPr>
-        <p:txBody>
-          <a:bodyPr wrap="square" lIns="73152" tIns="54864" rIns="73152" bIns="54864" anchor="ctr">
-            <a:spAutoFit/>
-          </a:bodyPr>
-          <a:lstStyle/>
-          <a:p>
-            <a:pPr algn="l">
-              <a:lnSpc>
-                <a:spcPts val="1885"/>
-              </a:lnSpc>
-              <a:spcBef>
-                <a:spcPts val="0"/>
-              </a:spcBef>
-              <a:spcAft>
-                <a:spcPts val="0"/>
-              </a:spcAft>
-            </a:pPr>
-            <a:r>
-              <a:rPr sz="1076" b="0" dirty="0" err="1">
-                <a:solidFill>
-                  <a:srgbClr val="FFFFFF"/>
-                </a:solidFill>
-                <a:latin typeface="Noto Sans"/>
-              </a:rPr>
-              <a:t>Все</a:t>
-            </a:r>
-            <a:r>
-              <a:rPr sz="1076" b="0" dirty="0">
-                <a:solidFill>
-                  <a:srgbClr val="FFFFFF"/>
-                </a:solidFill>
-                <a:latin typeface="Noto Sans"/>
-              </a:rPr>
-              <a:t> </a:t>
-            </a:r>
-            <a:r>
-              <a:rPr sz="1076" b="0" dirty="0" err="1">
-                <a:solidFill>
-                  <a:srgbClr val="FFFFFF"/>
-                </a:solidFill>
-                <a:latin typeface="Noto Sans"/>
-              </a:rPr>
-              <a:t>поставленные</a:t>
-            </a:r>
-            <a:r>
-              <a:rPr sz="1076" b="0" dirty="0">
-                <a:solidFill>
-                  <a:srgbClr val="FFFFFF"/>
-                </a:solidFill>
-                <a:latin typeface="Noto Sans"/>
-              </a:rPr>
-              <a:t> </a:t>
-            </a:r>
-            <a:r>
-              <a:rPr sz="1076" b="0" dirty="0" err="1">
-                <a:solidFill>
-                  <a:srgbClr val="FFFFFF"/>
-                </a:solidFill>
-                <a:latin typeface="Noto Sans"/>
-              </a:rPr>
-              <a:t>цели</a:t>
-            </a:r>
-            <a:r>
-              <a:rPr sz="1076" b="0" dirty="0">
-                <a:solidFill>
-                  <a:srgbClr val="FFFFFF"/>
-                </a:solidFill>
-                <a:latin typeface="Noto Sans"/>
-              </a:rPr>
-              <a:t> </a:t>
-            </a:r>
-            <a:r>
-              <a:rPr sz="1076" b="0" dirty="0" err="1">
-                <a:solidFill>
-                  <a:srgbClr val="FFFFFF"/>
-                </a:solidFill>
-                <a:latin typeface="Noto Sans"/>
-              </a:rPr>
-              <a:t>достигнуты</a:t>
-            </a:r>
-            <a:r>
-              <a:rPr sz="1076" b="0" dirty="0">
-                <a:solidFill>
-                  <a:srgbClr val="FFFFFF"/>
-                </a:solidFill>
-                <a:latin typeface="Noto Sans"/>
-              </a:rPr>
-              <a:t>. </a:t>
-            </a:r>
-            <a:r>
-              <a:rPr sz="1076" b="0" dirty="0" err="1">
-                <a:solidFill>
-                  <a:srgbClr val="FFFFFF"/>
-                </a:solidFill>
-                <a:latin typeface="Noto Sans"/>
-              </a:rPr>
-              <a:t>Веб-приложение</a:t>
-            </a:r>
-            <a:r>
-              <a:rPr sz="1076" b="0" dirty="0">
-                <a:solidFill>
-                  <a:srgbClr val="FFFFFF"/>
-                </a:solidFill>
-                <a:latin typeface="Noto Sans"/>
-              </a:rPr>
-              <a:t> </a:t>
-            </a:r>
-            <a:r>
-              <a:rPr sz="1076" b="0" dirty="0" err="1">
-                <a:solidFill>
-                  <a:srgbClr val="FFFFFF"/>
-                </a:solidFill>
-                <a:latin typeface="Noto Sans"/>
-              </a:rPr>
-              <a:t>корректно</a:t>
-            </a:r>
-            <a:r>
-              <a:rPr sz="1076" b="0" dirty="0">
-                <a:solidFill>
-                  <a:srgbClr val="FFFFFF"/>
-                </a:solidFill>
-                <a:latin typeface="Noto Sans"/>
-              </a:rPr>
-              <a:t> </a:t>
-            </a:r>
-            <a:r>
-              <a:rPr sz="1076" b="0" dirty="0" err="1">
-                <a:solidFill>
-                  <a:srgbClr val="FFFFFF"/>
-                </a:solidFill>
-                <a:latin typeface="Noto Sans"/>
-              </a:rPr>
-              <a:t>рассчитывает</a:t>
-            </a:r>
-            <a:r>
-              <a:rPr sz="1076" b="0" dirty="0">
-                <a:solidFill>
-                  <a:srgbClr val="FFFFFF"/>
-                </a:solidFill>
-                <a:latin typeface="Noto Sans"/>
-              </a:rPr>
-              <a:t> </a:t>
-            </a:r>
-            <a:r>
-              <a:rPr sz="1076" b="0" dirty="0" err="1">
-                <a:solidFill>
-                  <a:srgbClr val="FFFFFF"/>
-                </a:solidFill>
-                <a:latin typeface="Noto Sans"/>
-              </a:rPr>
-              <a:t>вероятность</a:t>
-            </a:r>
-            <a:r>
-              <a:rPr sz="1076" b="0" dirty="0">
-                <a:solidFill>
-                  <a:srgbClr val="FFFFFF"/>
-                </a:solidFill>
-                <a:latin typeface="Noto Sans"/>
-              </a:rPr>
-              <a:t> </a:t>
-            </a:r>
-            <a:r>
-              <a:rPr sz="1076" b="0" dirty="0" err="1">
-                <a:solidFill>
-                  <a:srgbClr val="FFFFFF"/>
-                </a:solidFill>
-                <a:latin typeface="Noto Sans"/>
-              </a:rPr>
-              <a:t>заболеваний</a:t>
-            </a:r>
-            <a:r>
-              <a:rPr sz="1076" b="0" dirty="0">
-                <a:solidFill>
-                  <a:srgbClr val="FFFFFF"/>
-                </a:solidFill>
-                <a:latin typeface="Noto Sans"/>
-              </a:rPr>
-              <a:t> и </a:t>
-            </a:r>
-            <a:r>
-              <a:rPr sz="1076" b="0" dirty="0" err="1">
-                <a:solidFill>
-                  <a:srgbClr val="FFFFFF"/>
-                </a:solidFill>
-                <a:latin typeface="Noto Sans"/>
-              </a:rPr>
-              <a:t>предоставляет</a:t>
-            </a:r>
-            <a:r>
-              <a:rPr sz="1076" b="0" dirty="0">
-                <a:solidFill>
-                  <a:srgbClr val="FFFFFF"/>
-                </a:solidFill>
-                <a:latin typeface="Noto Sans"/>
-              </a:rPr>
-              <a:t> </a:t>
-            </a:r>
-            <a:r>
-              <a:rPr sz="1076" b="0" dirty="0" err="1">
-                <a:solidFill>
-                  <a:srgbClr val="FFFFFF"/>
-                </a:solidFill>
-                <a:latin typeface="Noto Sans"/>
-              </a:rPr>
-              <a:t>удобный</a:t>
-            </a:r>
-            <a:r>
-              <a:rPr sz="1076" b="0" dirty="0">
-                <a:solidFill>
-                  <a:srgbClr val="FFFFFF"/>
-                </a:solidFill>
-                <a:latin typeface="Noto Sans"/>
-              </a:rPr>
-              <a:t> </a:t>
-            </a:r>
-            <a:r>
-              <a:rPr sz="1076" b="0" dirty="0" err="1">
-                <a:solidFill>
-                  <a:srgbClr val="FFFFFF"/>
-                </a:solidFill>
-                <a:latin typeface="Noto Sans"/>
-              </a:rPr>
-              <a:t>интерфейс</a:t>
-            </a:r>
-            <a:r>
-              <a:rPr sz="1076" b="0" dirty="0">
-                <a:solidFill>
-                  <a:srgbClr val="FFFFFF"/>
-                </a:solidFill>
-                <a:latin typeface="Noto Sans"/>
-              </a:rPr>
-              <a:t> </a:t>
-            </a:r>
-            <a:r>
-              <a:rPr sz="1076" b="0" dirty="0" err="1">
-                <a:solidFill>
-                  <a:srgbClr val="FFFFFF"/>
-                </a:solidFill>
-                <a:latin typeface="Noto Sans"/>
-              </a:rPr>
-              <a:t>для</a:t>
-            </a:r>
-            <a:r>
-              <a:rPr sz="1076" b="0" dirty="0">
-                <a:solidFill>
-                  <a:srgbClr val="FFFFFF"/>
-                </a:solidFill>
-                <a:latin typeface="Noto Sans"/>
-              </a:rPr>
-              <a:t> </a:t>
-            </a:r>
-            <a:r>
-              <a:rPr sz="1076" b="0" dirty="0" err="1">
-                <a:solidFill>
-                  <a:srgbClr val="FFFFFF"/>
-                </a:solidFill>
-                <a:latin typeface="Noto Sans"/>
-              </a:rPr>
-              <a:t>пользователей</a:t>
-            </a:r>
-            <a:r>
-              <a:rPr sz="1076" b="0" dirty="0">
-                <a:solidFill>
-                  <a:srgbClr val="FFFFFF"/>
-                </a:solidFill>
-                <a:latin typeface="Noto Sans"/>
-              </a:rPr>
-              <a:t>.</a:t>
-            </a:r>
-          </a:p>
-        </p:txBody>
-      </p:sp>
-      <p:sp>
-        <p:nvSpPr>
-          <p:cNvPr id="11" name="Rounded Rectangle 10"/>
-          <p:cNvSpPr/>
-          <p:nvPr/>
-        </p:nvSpPr>
-        <p:spPr>
-          <a:xfrm>
-            <a:off x="666733" y="5391150"/>
-            <a:ext cx="4152796" cy="761999"/>
-          </a:xfrm>
-          <a:prstGeom prst="roundRect">
-            <a:avLst>
-              <a:gd name="adj" fmla="val 30000"/>
-            </a:avLst>
-          </a:prstGeom>
-          <a:solidFill>
-            <a:srgbClr val="EFF6FF"/>
-          </a:solidFill>
-          <a:ln>
-            <a:noFill/>
-          </a:ln>
-        </p:spPr>
-        <p:style>
-          <a:lnRef idx="1">
-            <a:schemeClr val="accent1"/>
-          </a:lnRef>
-          <a:fillRef idx="3">
-            <a:schemeClr val="accent1"/>
-          </a:fillRef>
-          <a:effectRef idx="2">
-            <a:schemeClr val="accent1"/>
-          </a:effectRef>
-          <a:fontRef idx="minor">
-            <a:schemeClr val="lt1"/>
-          </a:fontRef>
-        </p:style>
-        <p:txBody>
-          <a:bodyPr rtlCol="0" anchor="ctr"/>
-          <a:lstStyle/>
-          <a:p>
-            <a:pPr algn="ctr"/>
-            <a:endParaRPr dirty="0"/>
-          </a:p>
-        </p:txBody>
-      </p:sp>
-      <p:sp>
-        <p:nvSpPr>
-          <p:cNvPr id="12" name="Round Same Side Corner Rectangle 11"/>
-          <p:cNvSpPr/>
-          <p:nvPr/>
-        </p:nvSpPr>
-        <p:spPr>
-          <a:xfrm rot="16200000">
-            <a:off x="351774" y="5706109"/>
-            <a:ext cx="761999" cy="132080"/>
-          </a:xfrm>
-          <a:prstGeom prst="round2SameRect">
-            <a:avLst>
-              <a:gd name="adj1" fmla="val 50000"/>
-              <a:gd name="adj2" fmla="val 0"/>
-            </a:avLst>
-          </a:prstGeom>
-          <a:solidFill>
-            <a:srgbClr val="4FC3F7"/>
-          </a:solidFill>
-          <a:ln>
-            <a:noFill/>
-          </a:ln>
-        </p:spPr>
-        <p:style>
-          <a:lnRef idx="1">
-            <a:schemeClr val="accent1"/>
-          </a:lnRef>
-          <a:fillRef idx="3">
-            <a:schemeClr val="accent1"/>
-          </a:fillRef>
-          <a:effectRef idx="2">
-            <a:schemeClr val="accent1"/>
-          </a:effectRef>
-          <a:fontRef idx="minor">
-            <a:schemeClr val="lt1"/>
-          </a:fontRef>
-        </p:style>
-        <p:txBody>
-          <a:bodyPr rtlCol="0" anchor="ctr"/>
-          <a:lstStyle/>
-          <a:p>
-            <a:pPr algn="ctr"/>
-            <a:endParaRPr dirty="0"/>
-          </a:p>
-        </p:txBody>
-      </p:sp>
-      <p:pic>
-        <p:nvPicPr>
-          <p:cNvPr id="13" name="Picture 12" descr="image.png"/>
-          <p:cNvPicPr>
-            <a:picLocks noChangeAspect="1"/>
-          </p:cNvPicPr>
-          <p:nvPr/>
-        </p:nvPicPr>
-        <p:blipFill>
-          <a:blip r:embed="rId4">
-            <a:alphaModFix/>
-          </a:blip>
-          <a:stretch>
-            <a:fillRect/>
-          </a:stretch>
-        </p:blipFill>
-        <p:spPr>
-          <a:xfrm>
-            <a:off x="933426" y="5651988"/>
-            <a:ext cx="304792" cy="240323"/>
-          </a:xfrm>
-          <a:prstGeom prst="rect">
-            <a:avLst/>
-          </a:prstGeom>
-        </p:spPr>
-      </p:pic>
-      <p:sp>
-        <p:nvSpPr>
-          <p:cNvPr id="14" name="TextBox 13"/>
-          <p:cNvSpPr txBox="1"/>
-          <p:nvPr/>
-        </p:nvSpPr>
-        <p:spPr>
-          <a:xfrm>
-            <a:off x="1390615" y="5629275"/>
-            <a:ext cx="2190695" cy="285750"/>
-          </a:xfrm>
-          <a:prstGeom prst="rect">
-            <a:avLst/>
-          </a:prstGeom>
-          <a:noFill/>
-        </p:spPr>
-        <p:txBody>
-          <a:bodyPr wrap="none" lIns="73152" tIns="54864" rIns="73152" bIns="54864" anchor="ctr">
-            <a:spAutoFit/>
-          </a:bodyPr>
-          <a:lstStyle/>
-          <a:p>
-            <a:pPr algn="l">
-              <a:lnSpc>
-                <a:spcPts val="1950"/>
-              </a:lnSpc>
-              <a:spcBef>
-                <a:spcPts val="0"/>
-              </a:spcBef>
-              <a:spcAft>
-                <a:spcPts val="0"/>
-              </a:spcAft>
-            </a:pPr>
-            <a:r>
-              <a:rPr sz="1196" b="1" dirty="0" err="1">
-                <a:solidFill>
-                  <a:srgbClr val="0D47A1"/>
-                </a:solidFill>
-                <a:latin typeface="Noto Sans"/>
-              </a:rPr>
-              <a:t>Спасибо</a:t>
-            </a:r>
-            <a:r>
-              <a:rPr sz="1196" b="1" dirty="0">
-                <a:solidFill>
-                  <a:srgbClr val="0D47A1"/>
-                </a:solidFill>
-                <a:latin typeface="Noto Sans"/>
-              </a:rPr>
-              <a:t> </a:t>
-            </a:r>
-            <a:r>
-              <a:rPr sz="1196" b="1" dirty="0" err="1">
-                <a:solidFill>
-                  <a:srgbClr val="0D47A1"/>
-                </a:solidFill>
-                <a:latin typeface="Noto Sans"/>
-              </a:rPr>
-              <a:t>за</a:t>
-            </a:r>
-            <a:r>
-              <a:rPr sz="1196" b="1" dirty="0">
-                <a:solidFill>
-                  <a:srgbClr val="0D47A1"/>
-                </a:solidFill>
-                <a:latin typeface="Noto Sans"/>
-              </a:rPr>
-              <a:t> </a:t>
-            </a:r>
-            <a:r>
-              <a:rPr sz="1196" b="1" dirty="0" err="1">
-                <a:solidFill>
-                  <a:srgbClr val="0D47A1"/>
-                </a:solidFill>
-                <a:latin typeface="Noto Sans"/>
-              </a:rPr>
-              <a:t>внимание</a:t>
-            </a:r>
-            <a:r>
-              <a:rPr sz="1196" b="1" dirty="0">
-                <a:solidFill>
-                  <a:srgbClr val="0D47A1"/>
-                </a:solidFill>
-                <a:latin typeface="Noto Sans"/>
-              </a:rPr>
-              <a:t>!</a:t>
-            </a:r>
-          </a:p>
-        </p:txBody>
-      </p:sp>
-      <p:sp>
-        <p:nvSpPr>
-          <p:cNvPr id="15" name="Rectangle 14"/>
-          <p:cNvSpPr/>
-          <p:nvPr/>
-        </p:nvSpPr>
-        <p:spPr>
-          <a:xfrm>
-            <a:off x="5486262" y="857250"/>
-            <a:ext cx="6705432" cy="6000750"/>
-          </a:xfrm>
-          <a:prstGeom prst="rect">
-            <a:avLst/>
-          </a:prstGeom>
-          <a:solidFill>
-            <a:srgbClr val="F9FAFB"/>
-          </a:solidFill>
-          <a:ln>
-            <a:noFill/>
-          </a:ln>
-        </p:spPr>
-        <p:style>
-          <a:lnRef idx="1">
-            <a:schemeClr val="accent1"/>
-          </a:lnRef>
-          <a:fillRef idx="3">
-            <a:schemeClr val="accent1"/>
-          </a:fillRef>
-          <a:effectRef idx="2">
-            <a:schemeClr val="accent1"/>
-          </a:effectRef>
-          <a:fontRef idx="minor">
-            <a:schemeClr val="lt1"/>
-          </a:fontRef>
-        </p:style>
-        <p:txBody>
-          <a:bodyPr rtlCol="0" anchor="ctr"/>
-          <a:lstStyle/>
-          <a:p>
-            <a:pPr algn="ctr"/>
-            <a:endParaRPr dirty="0"/>
-          </a:p>
-        </p:txBody>
-      </p:sp>
-      <p:sp>
-        <p:nvSpPr>
-          <p:cNvPr id="16" name="Rectangle 15"/>
-          <p:cNvSpPr/>
-          <p:nvPr/>
-        </p:nvSpPr>
-        <p:spPr>
-          <a:xfrm>
-            <a:off x="6152996" y="1409699"/>
-            <a:ext cx="76198" cy="380999"/>
-          </a:xfrm>
-          <a:prstGeom prst="rect">
-            <a:avLst/>
-          </a:prstGeom>
-          <a:solidFill>
-            <a:srgbClr val="4FC3F7"/>
-          </a:solidFill>
-          <a:ln>
-            <a:noFill/>
-          </a:ln>
-        </p:spPr>
-        <p:style>
-          <a:lnRef idx="1">
-            <a:schemeClr val="accent1"/>
-          </a:lnRef>
-          <a:fillRef idx="3">
-            <a:schemeClr val="accent1"/>
-          </a:fillRef>
-          <a:effectRef idx="2">
-            <a:schemeClr val="accent1"/>
-          </a:effectRef>
-          <a:fontRef idx="minor">
-            <a:schemeClr val="lt1"/>
-          </a:fontRef>
-        </p:style>
-        <p:txBody>
-          <a:bodyPr rtlCol="0" anchor="ctr"/>
-          <a:lstStyle/>
-          <a:p>
-            <a:pPr algn="ctr"/>
-            <a:endParaRPr dirty="0"/>
-          </a:p>
-        </p:txBody>
-      </p:sp>
-      <p:sp>
-        <p:nvSpPr>
-          <p:cNvPr id="17" name="TextBox 16"/>
-          <p:cNvSpPr txBox="1"/>
-          <p:nvPr/>
-        </p:nvSpPr>
-        <p:spPr>
-          <a:xfrm>
-            <a:off x="6381590" y="1400175"/>
-            <a:ext cx="3209844" cy="400050"/>
-          </a:xfrm>
-          <a:prstGeom prst="rect">
-            <a:avLst/>
-          </a:prstGeom>
-          <a:noFill/>
-        </p:spPr>
-        <p:txBody>
-          <a:bodyPr wrap="none" lIns="73152" tIns="54864" rIns="73152" bIns="54864" anchor="ctr">
-            <a:spAutoFit/>
-          </a:bodyPr>
-          <a:lstStyle/>
-          <a:p>
-            <a:pPr algn="l">
-              <a:lnSpc>
-                <a:spcPts val="2730"/>
-              </a:lnSpc>
-              <a:spcBef>
-                <a:spcPts val="0"/>
-              </a:spcBef>
-              <a:spcAft>
-                <a:spcPts val="0"/>
-              </a:spcAft>
-            </a:pPr>
-            <a:r>
-              <a:rPr sz="1674" b="1" dirty="0" err="1">
-                <a:solidFill>
-                  <a:srgbClr val="0D47A1"/>
-                </a:solidFill>
-                <a:latin typeface="Noto Sans"/>
-              </a:rPr>
-              <a:t>Перспективы</a:t>
-            </a:r>
-            <a:r>
-              <a:rPr sz="1674" b="1" dirty="0">
-                <a:solidFill>
-                  <a:srgbClr val="0D47A1"/>
-                </a:solidFill>
-                <a:latin typeface="Noto Sans"/>
-              </a:rPr>
-              <a:t> </a:t>
-            </a:r>
-            <a:r>
-              <a:rPr sz="1674" b="1" dirty="0" err="1">
-                <a:solidFill>
-                  <a:srgbClr val="0D47A1"/>
-                </a:solidFill>
-                <a:latin typeface="Noto Sans"/>
-              </a:rPr>
-              <a:t>развития</a:t>
-            </a:r>
-            <a:endParaRPr sz="1674" b="1" dirty="0">
-              <a:solidFill>
-                <a:srgbClr val="0D47A1"/>
-              </a:solidFill>
-              <a:latin typeface="Noto Sans"/>
-            </a:endParaRPr>
-          </a:p>
-        </p:txBody>
-      </p:sp>
-      <p:sp>
-        <p:nvSpPr>
-          <p:cNvPr id="18" name="Rounded Rectangle 17"/>
-          <p:cNvSpPr/>
-          <p:nvPr/>
-        </p:nvSpPr>
-        <p:spPr>
-          <a:xfrm>
-            <a:off x="6152996" y="2105024"/>
-            <a:ext cx="2590735" cy="1638299"/>
-          </a:xfrm>
-          <a:prstGeom prst="roundRect">
-            <a:avLst>
-              <a:gd name="adj" fmla="val 13953"/>
-            </a:avLst>
-          </a:prstGeom>
-          <a:solidFill>
-            <a:srgbClr val="FFFFFF"/>
-          </a:solidFill>
-          <a:ln w="33020">
-            <a:solidFill>
-              <a:srgbClr val="4FC3F7"/>
-            </a:solidFill>
-          </a:ln>
-        </p:spPr>
-        <p:style>
-          <a:lnRef idx="1">
-            <a:schemeClr val="accent1"/>
-          </a:lnRef>
-          <a:fillRef idx="3">
-            <a:schemeClr val="accent1"/>
-          </a:fillRef>
-          <a:effectRef idx="2">
-            <a:schemeClr val="accent1"/>
-          </a:effectRef>
-          <a:fontRef idx="minor">
-            <a:schemeClr val="lt1"/>
-          </a:fontRef>
-        </p:style>
-        <p:txBody>
-          <a:bodyPr rtlCol="0" anchor="ctr"/>
-          <a:lstStyle/>
-          <a:p>
-            <a:pPr algn="ctr"/>
-            <a:endParaRPr dirty="0"/>
-          </a:p>
-        </p:txBody>
-      </p:sp>
-      <p:pic>
-        <p:nvPicPr>
-          <p:cNvPr id="19" name="Picture 18" descr="image.png"/>
-          <p:cNvPicPr>
-            <a:picLocks noChangeAspect="1"/>
-          </p:cNvPicPr>
-          <p:nvPr/>
-        </p:nvPicPr>
-        <p:blipFill>
-          <a:blip r:embed="rId5">
-            <a:alphaModFix/>
-          </a:blip>
-          <a:stretch>
-            <a:fillRect/>
-          </a:stretch>
-        </p:blipFill>
-        <p:spPr>
-          <a:xfrm>
-            <a:off x="6381590" y="2512629"/>
-            <a:ext cx="342891" cy="289691"/>
-          </a:xfrm>
-          <a:prstGeom prst="rect">
-            <a:avLst/>
-          </a:prstGeom>
-        </p:spPr>
-      </p:pic>
-      <p:sp>
-        <p:nvSpPr>
-          <p:cNvPr id="20" name="TextBox 19"/>
-          <p:cNvSpPr txBox="1"/>
-          <p:nvPr/>
-        </p:nvSpPr>
-        <p:spPr>
-          <a:xfrm>
-            <a:off x="6838779" y="2371725"/>
-            <a:ext cx="1676358" cy="571500"/>
-          </a:xfrm>
-          <a:prstGeom prst="rect">
-            <a:avLst/>
-          </a:prstGeom>
-          <a:noFill/>
-        </p:spPr>
-        <p:txBody>
-          <a:bodyPr wrap="none" lIns="73152" tIns="54864" rIns="73152" bIns="54864" anchor="ctr">
-            <a:spAutoFit/>
-          </a:bodyPr>
-          <a:lstStyle/>
-          <a:p>
-            <a:pPr algn="l">
-              <a:lnSpc>
-                <a:spcPts val="1950"/>
-              </a:lnSpc>
-              <a:spcBef>
-                <a:spcPts val="0"/>
-              </a:spcBef>
-              <a:spcAft>
-                <a:spcPts val="0"/>
-              </a:spcAft>
-            </a:pPr>
-            <a:r>
-              <a:rPr sz="1196" b="1" dirty="0" err="1">
-                <a:solidFill>
-                  <a:srgbClr val="0D47A1"/>
-                </a:solidFill>
-                <a:latin typeface="Noto Sans"/>
-              </a:rPr>
-              <a:t>Новые</a:t>
-            </a:r>
-            <a:r>
-              <a:rPr sz="1196" b="1" dirty="0">
-                <a:solidFill>
-                  <a:srgbClr val="0D47A1"/>
-                </a:solidFill>
-                <a:latin typeface="Noto Sans"/>
-              </a:rPr>
-              <a:t> </a:t>
-            </a:r>
-            <a:r>
-              <a:rPr sz="1196" b="1" dirty="0" err="1">
-                <a:solidFill>
-                  <a:srgbClr val="0D47A1"/>
-                </a:solidFill>
-                <a:latin typeface="Noto Sans"/>
-              </a:rPr>
-              <a:t>заболевания</a:t>
-            </a:r>
-            <a:endParaRPr sz="1196" b="1" dirty="0">
-              <a:solidFill>
-                <a:srgbClr val="0D47A1"/>
-              </a:solidFill>
-              <a:latin typeface="Noto Sans"/>
-            </a:endParaRPr>
-          </a:p>
-        </p:txBody>
-      </p:sp>
-      <p:sp>
-        <p:nvSpPr>
-          <p:cNvPr id="21" name="TextBox 20"/>
-          <p:cNvSpPr txBox="1"/>
-          <p:nvPr/>
-        </p:nvSpPr>
-        <p:spPr>
-          <a:xfrm>
-            <a:off x="6381590" y="3057525"/>
-            <a:ext cx="2133546" cy="457200"/>
-          </a:xfrm>
-          <a:prstGeom prst="rect">
-            <a:avLst/>
-          </a:prstGeom>
-          <a:noFill/>
-        </p:spPr>
-        <p:txBody>
-          <a:bodyPr wrap="square" lIns="73152" tIns="54864" rIns="73152" bIns="54864" anchor="ctr">
-            <a:spAutoFit/>
-          </a:bodyPr>
-          <a:lstStyle/>
-          <a:p>
-            <a:pPr algn="l">
-              <a:lnSpc>
-                <a:spcPts val="1560"/>
-              </a:lnSpc>
-              <a:spcBef>
-                <a:spcPts val="0"/>
-              </a:spcBef>
-              <a:spcAft>
-                <a:spcPts val="0"/>
-              </a:spcAft>
-            </a:pPr>
-            <a:r>
-              <a:rPr sz="956" b="0" dirty="0" err="1">
-                <a:solidFill>
-                  <a:srgbClr val="4B5563"/>
-                </a:solidFill>
-                <a:latin typeface="Noto Sans"/>
-              </a:rPr>
-              <a:t>Расширение</a:t>
-            </a:r>
-            <a:r>
-              <a:rPr sz="956" b="0" dirty="0">
-                <a:solidFill>
-                  <a:srgbClr val="4B5563"/>
-                </a:solidFill>
-                <a:latin typeface="Noto Sans"/>
-              </a:rPr>
-              <a:t> </a:t>
-            </a:r>
-            <a:r>
-              <a:rPr sz="956" b="0" dirty="0" err="1">
-                <a:solidFill>
-                  <a:srgbClr val="4B5563"/>
-                </a:solidFill>
-                <a:latin typeface="Noto Sans"/>
-              </a:rPr>
-              <a:t>списка</a:t>
-            </a:r>
-            <a:r>
-              <a:rPr sz="956" b="0" dirty="0">
-                <a:solidFill>
-                  <a:srgbClr val="4B5563"/>
-                </a:solidFill>
-                <a:latin typeface="Noto Sans"/>
-              </a:rPr>
-              <a:t> </a:t>
-            </a:r>
-            <a:r>
-              <a:rPr sz="956" b="0" dirty="0" err="1">
-                <a:solidFill>
-                  <a:srgbClr val="4B5563"/>
-                </a:solidFill>
-                <a:latin typeface="Noto Sans"/>
-              </a:rPr>
-              <a:t>анализируемых</a:t>
-            </a:r>
-            <a:r>
-              <a:rPr sz="956" b="0" dirty="0">
-                <a:solidFill>
-                  <a:srgbClr val="4B5563"/>
-                </a:solidFill>
-                <a:latin typeface="Noto Sans"/>
-              </a:rPr>
-              <a:t> </a:t>
-            </a:r>
-            <a:r>
-              <a:rPr sz="956" b="0" dirty="0" err="1">
-                <a:solidFill>
-                  <a:srgbClr val="4B5563"/>
-                </a:solidFill>
-                <a:latin typeface="Noto Sans"/>
-              </a:rPr>
-              <a:t>болезней</a:t>
-            </a:r>
-            <a:endParaRPr sz="956" b="0" dirty="0">
-              <a:solidFill>
-                <a:srgbClr val="4B5563"/>
-              </a:solidFill>
-              <a:latin typeface="Noto Sans"/>
-            </a:endParaRPr>
-          </a:p>
-        </p:txBody>
-      </p:sp>
-      <p:sp>
-        <p:nvSpPr>
-          <p:cNvPr id="22" name="Rounded Rectangle 21"/>
-          <p:cNvSpPr/>
-          <p:nvPr/>
-        </p:nvSpPr>
-        <p:spPr>
-          <a:xfrm>
-            <a:off x="8934226" y="2105024"/>
-            <a:ext cx="2590735" cy="1638299"/>
-          </a:xfrm>
-          <a:prstGeom prst="roundRect">
-            <a:avLst>
-              <a:gd name="adj" fmla="val 13953"/>
-            </a:avLst>
-          </a:prstGeom>
-          <a:solidFill>
-            <a:srgbClr val="FFFFFF"/>
-          </a:solidFill>
-          <a:ln w="33020">
-            <a:solidFill>
-              <a:srgbClr val="0D47A1"/>
-            </a:solidFill>
-          </a:ln>
-        </p:spPr>
-        <p:style>
-          <a:lnRef idx="1">
-            <a:schemeClr val="accent1"/>
-          </a:lnRef>
-          <a:fillRef idx="3">
-            <a:schemeClr val="accent1"/>
-          </a:fillRef>
-          <a:effectRef idx="2">
-            <a:schemeClr val="accent1"/>
-          </a:effectRef>
-          <a:fontRef idx="minor">
-            <a:schemeClr val="lt1"/>
-          </a:fontRef>
-        </p:style>
-        <p:txBody>
-          <a:bodyPr rtlCol="0" anchor="ctr"/>
-          <a:lstStyle/>
-          <a:p>
-            <a:pPr algn="ctr"/>
-            <a:endParaRPr dirty="0"/>
-          </a:p>
-        </p:txBody>
-      </p:sp>
-      <p:pic>
-        <p:nvPicPr>
-          <p:cNvPr id="23" name="Picture 22" descr="image.png"/>
-          <p:cNvPicPr>
-            <a:picLocks noChangeAspect="1"/>
-          </p:cNvPicPr>
-          <p:nvPr/>
-        </p:nvPicPr>
-        <p:blipFill>
-          <a:blip r:embed="rId6">
-            <a:alphaModFix/>
-          </a:blip>
-          <a:stretch>
-            <a:fillRect/>
-          </a:stretch>
-        </p:blipFill>
-        <p:spPr>
-          <a:xfrm>
-            <a:off x="9162820" y="2524453"/>
-            <a:ext cx="342891" cy="266043"/>
-          </a:xfrm>
-          <a:prstGeom prst="rect">
-            <a:avLst/>
-          </a:prstGeom>
-        </p:spPr>
-      </p:pic>
-      <p:sp>
-        <p:nvSpPr>
-          <p:cNvPr id="24" name="TextBox 23"/>
-          <p:cNvSpPr txBox="1"/>
-          <p:nvPr/>
-        </p:nvSpPr>
-        <p:spPr>
-          <a:xfrm>
-            <a:off x="9620009" y="2371725"/>
-            <a:ext cx="1676358" cy="571500"/>
-          </a:xfrm>
-          <a:prstGeom prst="rect">
-            <a:avLst/>
-          </a:prstGeom>
-          <a:noFill/>
-        </p:spPr>
-        <p:txBody>
-          <a:bodyPr wrap="none" lIns="73152" tIns="54864" rIns="73152" bIns="54864" anchor="ctr">
-            <a:spAutoFit/>
-          </a:bodyPr>
-          <a:lstStyle/>
-          <a:p>
-            <a:pPr algn="l">
-              <a:lnSpc>
-                <a:spcPts val="1950"/>
-              </a:lnSpc>
-              <a:spcBef>
-                <a:spcPts val="0"/>
-              </a:spcBef>
-              <a:spcAft>
-                <a:spcPts val="0"/>
-              </a:spcAft>
-            </a:pPr>
-            <a:r>
-              <a:rPr sz="1196" b="1" dirty="0" err="1">
-                <a:solidFill>
-                  <a:srgbClr val="0D47A1"/>
-                </a:solidFill>
-                <a:latin typeface="Noto Sans"/>
-              </a:rPr>
-              <a:t>Машинное</a:t>
-            </a:r>
-            <a:r>
-              <a:rPr sz="1196" b="1" dirty="0">
-                <a:solidFill>
-                  <a:srgbClr val="0D47A1"/>
-                </a:solidFill>
-                <a:latin typeface="Noto Sans"/>
-              </a:rPr>
-              <a:t> </a:t>
-            </a:r>
-            <a:r>
-              <a:rPr sz="1196" b="1" dirty="0" err="1">
-                <a:solidFill>
-                  <a:srgbClr val="0D47A1"/>
-                </a:solidFill>
-                <a:latin typeface="Noto Sans"/>
-              </a:rPr>
-              <a:t>обучение</a:t>
-            </a:r>
-            <a:endParaRPr sz="1196" b="1" dirty="0">
-              <a:solidFill>
-                <a:srgbClr val="0D47A1"/>
-              </a:solidFill>
-              <a:latin typeface="Noto Sans"/>
-            </a:endParaRPr>
-          </a:p>
-        </p:txBody>
-      </p:sp>
-      <p:sp>
-        <p:nvSpPr>
-          <p:cNvPr id="25" name="TextBox 24"/>
-          <p:cNvSpPr txBox="1"/>
-          <p:nvPr/>
-        </p:nvSpPr>
-        <p:spPr>
-          <a:xfrm>
-            <a:off x="9162820" y="3057525"/>
-            <a:ext cx="2133546" cy="457200"/>
-          </a:xfrm>
-          <a:prstGeom prst="rect">
-            <a:avLst/>
-          </a:prstGeom>
-          <a:noFill/>
-        </p:spPr>
-        <p:txBody>
-          <a:bodyPr wrap="square" lIns="73152" tIns="54864" rIns="73152" bIns="54864" anchor="ctr">
-            <a:spAutoFit/>
-          </a:bodyPr>
-          <a:lstStyle/>
-          <a:p>
-            <a:pPr algn="l">
-              <a:lnSpc>
-                <a:spcPts val="1560"/>
-              </a:lnSpc>
-              <a:spcBef>
-                <a:spcPts val="0"/>
-              </a:spcBef>
-              <a:spcAft>
-                <a:spcPts val="0"/>
-              </a:spcAft>
-            </a:pPr>
-            <a:r>
-              <a:rPr sz="956" b="0" dirty="0" err="1">
-                <a:solidFill>
-                  <a:srgbClr val="4B5563"/>
-                </a:solidFill>
-                <a:latin typeface="Noto Sans"/>
-              </a:rPr>
-              <a:t>Повышение</a:t>
-            </a:r>
-            <a:r>
-              <a:rPr sz="956" b="0" dirty="0">
-                <a:solidFill>
-                  <a:srgbClr val="4B5563"/>
-                </a:solidFill>
-                <a:latin typeface="Noto Sans"/>
-              </a:rPr>
-              <a:t> </a:t>
-            </a:r>
-            <a:r>
-              <a:rPr sz="956" b="0" dirty="0" err="1">
-                <a:solidFill>
-                  <a:srgbClr val="4B5563"/>
-                </a:solidFill>
-                <a:latin typeface="Noto Sans"/>
-              </a:rPr>
-              <a:t>точности</a:t>
-            </a:r>
-            <a:r>
-              <a:rPr sz="956" b="0" dirty="0">
-                <a:solidFill>
-                  <a:srgbClr val="4B5563"/>
-                </a:solidFill>
-                <a:latin typeface="Noto Sans"/>
-              </a:rPr>
-              <a:t> с </a:t>
-            </a:r>
-            <a:r>
-              <a:rPr sz="956" b="0" dirty="0" err="1">
-                <a:solidFill>
-                  <a:srgbClr val="4B5563"/>
-                </a:solidFill>
-                <a:latin typeface="Noto Sans"/>
-              </a:rPr>
-              <a:t>помощью</a:t>
-            </a:r>
-            <a:r>
-              <a:rPr sz="956" b="0" dirty="0">
-                <a:solidFill>
-                  <a:srgbClr val="4B5563"/>
-                </a:solidFill>
-                <a:latin typeface="Noto Sans"/>
-              </a:rPr>
-              <a:t> ML-</a:t>
-            </a:r>
-            <a:r>
-              <a:rPr sz="956" b="0" dirty="0" err="1">
-                <a:solidFill>
-                  <a:srgbClr val="4B5563"/>
-                </a:solidFill>
-                <a:latin typeface="Noto Sans"/>
-              </a:rPr>
-              <a:t>алгоритмов</a:t>
-            </a:r>
-            <a:endParaRPr sz="956" b="0" dirty="0">
-              <a:solidFill>
-                <a:srgbClr val="4B5563"/>
-              </a:solidFill>
-              <a:latin typeface="Noto Sans"/>
-            </a:endParaRPr>
-          </a:p>
-        </p:txBody>
-      </p:sp>
-      <p:sp>
-        <p:nvSpPr>
-          <p:cNvPr id="26" name="Rounded Rectangle 25"/>
-          <p:cNvSpPr/>
-          <p:nvPr/>
-        </p:nvSpPr>
-        <p:spPr>
-          <a:xfrm>
-            <a:off x="6152996" y="3933824"/>
-            <a:ext cx="2590735" cy="1638299"/>
-          </a:xfrm>
-          <a:prstGeom prst="roundRect">
-            <a:avLst>
-              <a:gd name="adj" fmla="val 13953"/>
-            </a:avLst>
-          </a:prstGeom>
-          <a:solidFill>
-            <a:srgbClr val="FFFFFF"/>
-          </a:solidFill>
-          <a:ln w="33020">
-            <a:solidFill>
-              <a:srgbClr val="0D47A1"/>
-            </a:solidFill>
-          </a:ln>
-        </p:spPr>
-        <p:style>
-          <a:lnRef idx="1">
-            <a:schemeClr val="accent1"/>
-          </a:lnRef>
-          <a:fillRef idx="3">
-            <a:schemeClr val="accent1"/>
-          </a:fillRef>
-          <a:effectRef idx="2">
-            <a:schemeClr val="accent1"/>
-          </a:effectRef>
-          <a:fontRef idx="minor">
-            <a:schemeClr val="lt1"/>
-          </a:fontRef>
-        </p:style>
-        <p:txBody>
-          <a:bodyPr rtlCol="0" anchor="ctr"/>
-          <a:lstStyle/>
-          <a:p>
-            <a:pPr algn="ctr"/>
-            <a:endParaRPr dirty="0"/>
-          </a:p>
-        </p:txBody>
-      </p:sp>
-      <p:pic>
-        <p:nvPicPr>
-          <p:cNvPr id="27" name="Picture 26" descr="image.png"/>
-          <p:cNvPicPr>
-            <a:picLocks noChangeAspect="1"/>
-          </p:cNvPicPr>
-          <p:nvPr/>
-        </p:nvPicPr>
-        <p:blipFill>
-          <a:blip r:embed="rId7">
-            <a:alphaModFix/>
-          </a:blip>
-          <a:stretch>
-            <a:fillRect/>
-          </a:stretch>
-        </p:blipFill>
-        <p:spPr>
-          <a:xfrm>
-            <a:off x="6381590" y="4326649"/>
-            <a:ext cx="342891" cy="319251"/>
-          </a:xfrm>
-          <a:prstGeom prst="rect">
-            <a:avLst/>
-          </a:prstGeom>
-        </p:spPr>
-      </p:pic>
-      <p:sp>
-        <p:nvSpPr>
-          <p:cNvPr id="28" name="TextBox 27"/>
-          <p:cNvSpPr txBox="1"/>
-          <p:nvPr/>
-        </p:nvSpPr>
-        <p:spPr>
-          <a:xfrm>
-            <a:off x="6838779" y="4200525"/>
-            <a:ext cx="1676358" cy="571500"/>
-          </a:xfrm>
-          <a:prstGeom prst="rect">
-            <a:avLst/>
-          </a:prstGeom>
-          <a:noFill/>
-        </p:spPr>
-        <p:txBody>
-          <a:bodyPr wrap="none" lIns="73152" tIns="54864" rIns="73152" bIns="54864" anchor="ctr">
-            <a:spAutoFit/>
-          </a:bodyPr>
-          <a:lstStyle/>
-          <a:p>
-            <a:pPr algn="l">
-              <a:lnSpc>
-                <a:spcPts val="1950"/>
-              </a:lnSpc>
-              <a:spcBef>
-                <a:spcPts val="0"/>
-              </a:spcBef>
-              <a:spcAft>
-                <a:spcPts val="0"/>
-              </a:spcAft>
-            </a:pPr>
-            <a:r>
-              <a:rPr sz="1196" b="1" dirty="0" err="1">
-                <a:solidFill>
-                  <a:srgbClr val="0D47A1"/>
-                </a:solidFill>
-                <a:latin typeface="Noto Sans"/>
-              </a:rPr>
-              <a:t>Мобильная</a:t>
-            </a:r>
-            <a:r>
-              <a:rPr sz="1196" b="1" dirty="0">
-                <a:solidFill>
-                  <a:srgbClr val="0D47A1"/>
-                </a:solidFill>
-                <a:latin typeface="Noto Sans"/>
-              </a:rPr>
-              <a:t> </a:t>
-            </a:r>
-            <a:r>
-              <a:rPr sz="1196" b="1" dirty="0" err="1">
-                <a:solidFill>
-                  <a:srgbClr val="0D47A1"/>
-                </a:solidFill>
-                <a:latin typeface="Noto Sans"/>
-              </a:rPr>
-              <a:t>версия</a:t>
-            </a:r>
-            <a:endParaRPr sz="1196" b="1" dirty="0">
-              <a:solidFill>
-                <a:srgbClr val="0D47A1"/>
-              </a:solidFill>
-              <a:latin typeface="Noto Sans"/>
-            </a:endParaRPr>
-          </a:p>
-        </p:txBody>
-      </p:sp>
-      <p:sp>
-        <p:nvSpPr>
-          <p:cNvPr id="29" name="TextBox 28"/>
-          <p:cNvSpPr txBox="1"/>
-          <p:nvPr/>
-        </p:nvSpPr>
-        <p:spPr>
-          <a:xfrm>
-            <a:off x="6381590" y="4886325"/>
-            <a:ext cx="2133546" cy="457200"/>
-          </a:xfrm>
-          <a:prstGeom prst="rect">
-            <a:avLst/>
-          </a:prstGeom>
-          <a:noFill/>
-        </p:spPr>
-        <p:txBody>
-          <a:bodyPr wrap="square" lIns="73152" tIns="54864" rIns="73152" bIns="54864" anchor="ctr">
-            <a:spAutoFit/>
-          </a:bodyPr>
-          <a:lstStyle/>
-          <a:p>
-            <a:pPr algn="l">
-              <a:lnSpc>
-                <a:spcPts val="1560"/>
-              </a:lnSpc>
-              <a:spcBef>
-                <a:spcPts val="0"/>
-              </a:spcBef>
-              <a:spcAft>
-                <a:spcPts val="0"/>
-              </a:spcAft>
-            </a:pPr>
-            <a:r>
-              <a:rPr sz="956" b="0" dirty="0" err="1">
-                <a:solidFill>
-                  <a:srgbClr val="4B5563"/>
-                </a:solidFill>
-                <a:latin typeface="Noto Sans"/>
-              </a:rPr>
-              <a:t>Адаптация</a:t>
-            </a:r>
-            <a:r>
-              <a:rPr sz="956" b="0" dirty="0">
-                <a:solidFill>
-                  <a:srgbClr val="4B5563"/>
-                </a:solidFill>
-                <a:latin typeface="Noto Sans"/>
-              </a:rPr>
-              <a:t> </a:t>
-            </a:r>
-            <a:r>
-              <a:rPr sz="956" b="0" dirty="0" err="1">
-                <a:solidFill>
-                  <a:srgbClr val="4B5563"/>
-                </a:solidFill>
-                <a:latin typeface="Noto Sans"/>
-              </a:rPr>
-              <a:t>приложения</a:t>
-            </a:r>
-            <a:r>
-              <a:rPr sz="956" b="0" dirty="0">
-                <a:solidFill>
-                  <a:srgbClr val="4B5563"/>
-                </a:solidFill>
-                <a:latin typeface="Noto Sans"/>
-              </a:rPr>
-              <a:t> </a:t>
-            </a:r>
-            <a:r>
-              <a:rPr sz="956" b="0" dirty="0" err="1">
-                <a:solidFill>
-                  <a:srgbClr val="4B5563"/>
-                </a:solidFill>
-                <a:latin typeface="Noto Sans"/>
-              </a:rPr>
-              <a:t>для</a:t>
-            </a:r>
-            <a:r>
-              <a:rPr sz="956" b="0" dirty="0">
-                <a:solidFill>
-                  <a:srgbClr val="4B5563"/>
-                </a:solidFill>
-                <a:latin typeface="Noto Sans"/>
-              </a:rPr>
-              <a:t> </a:t>
-            </a:r>
-            <a:r>
-              <a:rPr sz="956" b="0" dirty="0" err="1">
-                <a:solidFill>
-                  <a:srgbClr val="4B5563"/>
-                </a:solidFill>
-                <a:latin typeface="Noto Sans"/>
-              </a:rPr>
-              <a:t>смартфонов</a:t>
-            </a:r>
-            <a:endParaRPr sz="956" b="0" dirty="0">
-              <a:solidFill>
-                <a:srgbClr val="4B5563"/>
-              </a:solidFill>
-              <a:latin typeface="Noto Sans"/>
-            </a:endParaRPr>
-          </a:p>
-        </p:txBody>
-      </p:sp>
-      <p:sp>
-        <p:nvSpPr>
-          <p:cNvPr id="30" name="Rounded Rectangle 29"/>
-          <p:cNvSpPr/>
-          <p:nvPr/>
-        </p:nvSpPr>
-        <p:spPr>
-          <a:xfrm>
-            <a:off x="8934226" y="3933824"/>
-            <a:ext cx="2590735" cy="1638299"/>
-          </a:xfrm>
-          <a:prstGeom prst="roundRect">
-            <a:avLst>
-              <a:gd name="adj" fmla="val 13953"/>
-            </a:avLst>
-          </a:prstGeom>
-          <a:solidFill>
-            <a:srgbClr val="FFFFFF"/>
-          </a:solidFill>
-          <a:ln w="33020">
-            <a:solidFill>
-              <a:srgbClr val="4FC3F7"/>
-            </a:solidFill>
-          </a:ln>
-        </p:spPr>
-        <p:style>
-          <a:lnRef idx="1">
-            <a:schemeClr val="accent1"/>
-          </a:lnRef>
-          <a:fillRef idx="3">
-            <a:schemeClr val="accent1"/>
-          </a:fillRef>
-          <a:effectRef idx="2">
-            <a:schemeClr val="accent1"/>
-          </a:effectRef>
-          <a:fontRef idx="minor">
-            <a:schemeClr val="lt1"/>
-          </a:fontRef>
-        </p:style>
-        <p:txBody>
-          <a:bodyPr rtlCol="0" anchor="ctr"/>
-          <a:lstStyle/>
-          <a:p>
-            <a:pPr algn="ctr"/>
-            <a:endParaRPr dirty="0"/>
-          </a:p>
-        </p:txBody>
-      </p:sp>
-      <p:pic>
-        <p:nvPicPr>
-          <p:cNvPr id="31" name="Picture 30" descr="image.png"/>
+          <p:cNvPr id="39" name="Picture 7" descr="image.png">
+            <a:extLst>
+              <a:ext uri="{FF2B5EF4-FFF2-40B4-BE49-F238E27FC236}">
+                <a16:creationId xmlns:a16="http://schemas.microsoft.com/office/drawing/2014/main" id="{9F782914-B5A5-A4FE-DF6E-2F581A547D84}"/>
+              </a:ext>
+            </a:extLst>
+          </p:cNvPr>
           <p:cNvPicPr>
             <a:picLocks noChangeAspect="1"/>
           </p:cNvPicPr>
@@ -17221,8 +16849,8 @@
         </p:blipFill>
         <p:spPr>
           <a:xfrm>
-            <a:off x="9162820" y="4225651"/>
-            <a:ext cx="342891" cy="292647"/>
+            <a:off x="7262208" y="2491500"/>
+            <a:ext cx="457188" cy="403057"/>
           </a:xfrm>
           <a:prstGeom prst="rect">
             <a:avLst/>
@@ -17231,14 +16859,20 @@
       </p:pic>
       <p:sp>
         <p:nvSpPr>
-          <p:cNvPr id="32" name="TextBox 31"/>
+          <p:cNvPr id="40" name="TextBox 39">
+            <a:extLst>
+              <a:ext uri="{FF2B5EF4-FFF2-40B4-BE49-F238E27FC236}">
+                <a16:creationId xmlns:a16="http://schemas.microsoft.com/office/drawing/2014/main" id="{6288B25A-A05C-1568-74A9-28D12B22A9A3}"/>
+              </a:ext>
+            </a:extLst>
+          </p:cNvPr>
           <p:cNvSpPr txBox="1"/>
           <p:nvPr/>
         </p:nvSpPr>
         <p:spPr>
           <a:xfrm>
-            <a:off x="9620009" y="4229100"/>
-            <a:ext cx="1543011" cy="285750"/>
+            <a:off x="7871793" y="2321554"/>
+            <a:ext cx="2933626" cy="742950"/>
           </a:xfrm>
           <a:prstGeom prst="rect">
             <a:avLst/>
@@ -17253,7 +16887,7 @@
           <a:p>
             <a:pPr algn="l">
               <a:lnSpc>
-                <a:spcPts val="1950"/>
+                <a:spcPts val="2535"/>
               </a:lnSpc>
               <a:spcBef>
                 <a:spcPts val="0"/>
@@ -17263,36 +16897,75 @@
               </a:spcAft>
             </a:pPr>
             <a:r>
-              <a:rPr sz="1196" b="1" dirty="0" err="1">
-                <a:solidFill>
-                  <a:srgbClr val="0D47A1"/>
-                </a:solidFill>
-                <a:latin typeface="Noto Sans"/>
-              </a:rPr>
-              <a:t>Интеграция</a:t>
-            </a:r>
-            <a:r>
-              <a:rPr sz="1196" b="1" dirty="0">
-                <a:solidFill>
-                  <a:srgbClr val="0D47A1"/>
-                </a:solidFill>
-                <a:latin typeface="Noto Sans"/>
-              </a:rPr>
-              <a:t> API</a:t>
-            </a:r>
-          </a:p>
-        </p:txBody>
-      </p:sp>
-      <p:sp>
-        <p:nvSpPr>
-          <p:cNvPr id="33" name="TextBox 32"/>
+              <a:rPr sz="1554" b="1" dirty="0" err="1">
+                <a:solidFill>
+                  <a:srgbClr val="FFFFFF"/>
+                </a:solidFill>
+                <a:latin typeface="Noto Sans"/>
+              </a:rPr>
+              <a:t>Проект</a:t>
+            </a:r>
+            <a:r>
+              <a:rPr sz="1554" b="1" dirty="0">
+                <a:solidFill>
+                  <a:srgbClr val="FFFFFF"/>
+                </a:solidFill>
+                <a:latin typeface="Noto Sans"/>
+              </a:rPr>
+              <a:t> </a:t>
+            </a:r>
+            <a:r>
+              <a:rPr sz="1554" b="1" dirty="0" err="1">
+                <a:solidFill>
+                  <a:srgbClr val="FFFFFF"/>
+                </a:solidFill>
+                <a:latin typeface="Noto Sans"/>
+              </a:rPr>
+              <a:t>реализован</a:t>
+            </a:r>
+            <a:r>
+              <a:rPr sz="1554" b="1" dirty="0">
+                <a:solidFill>
+                  <a:srgbClr val="FFFFFF"/>
+                </a:solidFill>
+                <a:latin typeface="Noto Sans"/>
+              </a:rPr>
+              <a:t> </a:t>
+            </a:r>
+            <a:r>
+              <a:rPr sz="1554" b="1" dirty="0" err="1">
+                <a:solidFill>
+                  <a:srgbClr val="FFFFFF"/>
+                </a:solidFill>
+                <a:latin typeface="Noto Sans"/>
+              </a:rPr>
+              <a:t>успешно</a:t>
+            </a:r>
+            <a:endParaRPr sz="1554" b="1" dirty="0">
+              <a:solidFill>
+                <a:srgbClr val="FFFFFF"/>
+              </a:solidFill>
+              <a:latin typeface="Noto Sans"/>
+            </a:endParaRPr>
+          </a:p>
+        </p:txBody>
+      </p:sp>
+      <p:sp>
+        <p:nvSpPr>
+          <p:cNvPr id="41" name="TextBox 40">
+            <a:extLst>
+              <a:ext uri="{FF2B5EF4-FFF2-40B4-BE49-F238E27FC236}">
+                <a16:creationId xmlns:a16="http://schemas.microsoft.com/office/drawing/2014/main" id="{16725BD4-BBE3-2674-B765-3F4985787C27}"/>
+              </a:ext>
+            </a:extLst>
+          </p:cNvPr>
           <p:cNvSpPr txBox="1"/>
           <p:nvPr/>
         </p:nvSpPr>
         <p:spPr>
           <a:xfrm>
-            <a:off x="9162820" y="4657725"/>
-            <a:ext cx="2133546" cy="457200"/>
+            <a:off x="7262208" y="3216904"/>
+            <a:ext cx="3543211" cy="1390650"/>
           </a:xfrm>
           <a:prstGeom prst="rect">
             <a:avLst/>
@@ -17307,7 +16980,7 @@
           <a:p>
             <a:pPr algn="l">
               <a:lnSpc>
-                <a:spcPts val="1560"/>
+                <a:spcPts val="1885"/>
               </a:lnSpc>
               <a:spcBef>
                 <a:spcPts val="0"/>
@@ -17317,80 +16990,374 @@
               </a:spcAft>
             </a:pPr>
             <a:r>
-              <a:rPr sz="956" b="0" dirty="0" err="1">
-                <a:solidFill>
-                  <a:srgbClr val="4B5563"/>
-                </a:solidFill>
-                <a:latin typeface="Noto Sans"/>
-              </a:rPr>
-              <a:t>Подключение</a:t>
-            </a:r>
-            <a:r>
-              <a:rPr sz="956" b="0" dirty="0">
-                <a:solidFill>
-                  <a:srgbClr val="4B5563"/>
-                </a:solidFill>
-                <a:latin typeface="Noto Sans"/>
-              </a:rPr>
-              <a:t> к </a:t>
-            </a:r>
-            <a:r>
-              <a:rPr sz="956" b="0" dirty="0" err="1">
-                <a:solidFill>
-                  <a:srgbClr val="4B5563"/>
-                </a:solidFill>
-                <a:latin typeface="Noto Sans"/>
-              </a:rPr>
-              <a:t>медицинским</a:t>
-            </a:r>
-            <a:r>
-              <a:rPr sz="956" b="0" dirty="0">
-                <a:solidFill>
-                  <a:srgbClr val="4B5563"/>
+              <a:rPr sz="1076" b="0" dirty="0" err="1">
+                <a:solidFill>
+                  <a:srgbClr val="FFFFFF"/>
+                </a:solidFill>
+                <a:latin typeface="Noto Sans"/>
+              </a:rPr>
+              <a:t>Все</a:t>
+            </a:r>
+            <a:r>
+              <a:rPr sz="1076" b="0" dirty="0">
+                <a:solidFill>
+                  <a:srgbClr val="FFFFFF"/>
                 </a:solidFill>
                 <a:latin typeface="Noto Sans"/>
               </a:rPr>
               <a:t> </a:t>
             </a:r>
             <a:r>
-              <a:rPr sz="956" b="0" dirty="0" err="1">
-                <a:solidFill>
-                  <a:srgbClr val="4B5563"/>
-                </a:solidFill>
-                <a:latin typeface="Noto Sans"/>
-              </a:rPr>
-              <a:t>базам</a:t>
-            </a:r>
-            <a:r>
-              <a:rPr sz="956" b="0" dirty="0">
-                <a:solidFill>
-                  <a:srgbClr val="4B5563"/>
+              <a:rPr sz="1076" b="0" dirty="0" err="1">
+                <a:solidFill>
+                  <a:srgbClr val="FFFFFF"/>
+                </a:solidFill>
+                <a:latin typeface="Noto Sans"/>
+              </a:rPr>
+              <a:t>поставленные</a:t>
+            </a:r>
+            <a:r>
+              <a:rPr sz="1076" b="0" dirty="0">
+                <a:solidFill>
+                  <a:srgbClr val="FFFFFF"/>
                 </a:solidFill>
                 <a:latin typeface="Noto Sans"/>
               </a:rPr>
               <a:t> </a:t>
             </a:r>
             <a:r>
-              <a:rPr sz="956" b="0" dirty="0" err="1">
-                <a:solidFill>
-                  <a:srgbClr val="4B5563"/>
-                </a:solidFill>
-                <a:latin typeface="Noto Sans"/>
-              </a:rPr>
-              <a:t>данных</a:t>
-            </a:r>
-            <a:endParaRPr sz="956" b="0" dirty="0">
-              <a:solidFill>
-                <a:srgbClr val="4B5563"/>
-              </a:solidFill>
-              <a:latin typeface="Noto Sans"/>
-            </a:endParaRPr>
+              <a:rPr sz="1076" b="0" dirty="0" err="1">
+                <a:solidFill>
+                  <a:srgbClr val="FFFFFF"/>
+                </a:solidFill>
+                <a:latin typeface="Noto Sans"/>
+              </a:rPr>
+              <a:t>цели</a:t>
+            </a:r>
+            <a:r>
+              <a:rPr sz="1076" b="0" dirty="0">
+                <a:solidFill>
+                  <a:srgbClr val="FFFFFF"/>
+                </a:solidFill>
+                <a:latin typeface="Noto Sans"/>
+              </a:rPr>
+              <a:t> </a:t>
+            </a:r>
+            <a:r>
+              <a:rPr sz="1076" b="0" dirty="0" err="1">
+                <a:solidFill>
+                  <a:srgbClr val="FFFFFF"/>
+                </a:solidFill>
+                <a:latin typeface="Noto Sans"/>
+              </a:rPr>
+              <a:t>достигнуты</a:t>
+            </a:r>
+            <a:r>
+              <a:rPr sz="1076" b="0" dirty="0">
+                <a:solidFill>
+                  <a:srgbClr val="FFFFFF"/>
+                </a:solidFill>
+                <a:latin typeface="Noto Sans"/>
+              </a:rPr>
+              <a:t>. </a:t>
+            </a:r>
+            <a:r>
+              <a:rPr sz="1076" b="0" dirty="0" err="1">
+                <a:solidFill>
+                  <a:srgbClr val="FFFFFF"/>
+                </a:solidFill>
+                <a:latin typeface="Noto Sans"/>
+              </a:rPr>
+              <a:t>Веб-приложение</a:t>
+            </a:r>
+            <a:r>
+              <a:rPr sz="1076" b="0" dirty="0">
+                <a:solidFill>
+                  <a:srgbClr val="FFFFFF"/>
+                </a:solidFill>
+                <a:latin typeface="Noto Sans"/>
+              </a:rPr>
+              <a:t> </a:t>
+            </a:r>
+            <a:r>
+              <a:rPr sz="1076" b="0" dirty="0" err="1">
+                <a:solidFill>
+                  <a:srgbClr val="FFFFFF"/>
+                </a:solidFill>
+                <a:latin typeface="Noto Sans"/>
+              </a:rPr>
+              <a:t>корректно</a:t>
+            </a:r>
+            <a:r>
+              <a:rPr sz="1076" b="0" dirty="0">
+                <a:solidFill>
+                  <a:srgbClr val="FFFFFF"/>
+                </a:solidFill>
+                <a:latin typeface="Noto Sans"/>
+              </a:rPr>
+              <a:t> </a:t>
+            </a:r>
+            <a:r>
+              <a:rPr sz="1076" b="0" dirty="0" err="1">
+                <a:solidFill>
+                  <a:srgbClr val="FFFFFF"/>
+                </a:solidFill>
+                <a:latin typeface="Noto Sans"/>
+              </a:rPr>
+              <a:t>рассчитывает</a:t>
+            </a:r>
+            <a:r>
+              <a:rPr sz="1076" b="0" dirty="0">
+                <a:solidFill>
+                  <a:srgbClr val="FFFFFF"/>
+                </a:solidFill>
+                <a:latin typeface="Noto Sans"/>
+              </a:rPr>
+              <a:t> </a:t>
+            </a:r>
+            <a:r>
+              <a:rPr sz="1076" b="0" dirty="0" err="1">
+                <a:solidFill>
+                  <a:srgbClr val="FFFFFF"/>
+                </a:solidFill>
+                <a:latin typeface="Noto Sans"/>
+              </a:rPr>
+              <a:t>вероятность</a:t>
+            </a:r>
+            <a:r>
+              <a:rPr sz="1076" b="0" dirty="0">
+                <a:solidFill>
+                  <a:srgbClr val="FFFFFF"/>
+                </a:solidFill>
+                <a:latin typeface="Noto Sans"/>
+              </a:rPr>
+              <a:t> </a:t>
+            </a:r>
+            <a:r>
+              <a:rPr sz="1076" b="0" dirty="0" err="1">
+                <a:solidFill>
+                  <a:srgbClr val="FFFFFF"/>
+                </a:solidFill>
+                <a:latin typeface="Noto Sans"/>
+              </a:rPr>
+              <a:t>заболеваний</a:t>
+            </a:r>
+            <a:r>
+              <a:rPr sz="1076" b="0" dirty="0">
+                <a:solidFill>
+                  <a:srgbClr val="FFFFFF"/>
+                </a:solidFill>
+                <a:latin typeface="Noto Sans"/>
+              </a:rPr>
+              <a:t> и </a:t>
+            </a:r>
+            <a:r>
+              <a:rPr sz="1076" b="0" dirty="0" err="1">
+                <a:solidFill>
+                  <a:srgbClr val="FFFFFF"/>
+                </a:solidFill>
+                <a:latin typeface="Noto Sans"/>
+              </a:rPr>
+              <a:t>предоставляет</a:t>
+            </a:r>
+            <a:r>
+              <a:rPr sz="1076" b="0" dirty="0">
+                <a:solidFill>
+                  <a:srgbClr val="FFFFFF"/>
+                </a:solidFill>
+                <a:latin typeface="Noto Sans"/>
+              </a:rPr>
+              <a:t> </a:t>
+            </a:r>
+            <a:r>
+              <a:rPr sz="1076" b="0" dirty="0" err="1">
+                <a:solidFill>
+                  <a:srgbClr val="FFFFFF"/>
+                </a:solidFill>
+                <a:latin typeface="Noto Sans"/>
+              </a:rPr>
+              <a:t>удобный</a:t>
+            </a:r>
+            <a:r>
+              <a:rPr sz="1076" b="0" dirty="0">
+                <a:solidFill>
+                  <a:srgbClr val="FFFFFF"/>
+                </a:solidFill>
+                <a:latin typeface="Noto Sans"/>
+              </a:rPr>
+              <a:t> </a:t>
+            </a:r>
+            <a:r>
+              <a:rPr sz="1076" b="0" dirty="0" err="1">
+                <a:solidFill>
+                  <a:srgbClr val="FFFFFF"/>
+                </a:solidFill>
+                <a:latin typeface="Noto Sans"/>
+              </a:rPr>
+              <a:t>интерфейс</a:t>
+            </a:r>
+            <a:r>
+              <a:rPr sz="1076" b="0" dirty="0">
+                <a:solidFill>
+                  <a:srgbClr val="FFFFFF"/>
+                </a:solidFill>
+                <a:latin typeface="Noto Sans"/>
+              </a:rPr>
+              <a:t> </a:t>
+            </a:r>
+            <a:r>
+              <a:rPr sz="1076" b="0" dirty="0" err="1">
+                <a:solidFill>
+                  <a:srgbClr val="FFFFFF"/>
+                </a:solidFill>
+                <a:latin typeface="Noto Sans"/>
+              </a:rPr>
+              <a:t>для</a:t>
+            </a:r>
+            <a:r>
+              <a:rPr sz="1076" b="0" dirty="0">
+                <a:solidFill>
+                  <a:srgbClr val="FFFFFF"/>
+                </a:solidFill>
+                <a:latin typeface="Noto Sans"/>
+              </a:rPr>
+              <a:t> </a:t>
+            </a:r>
+            <a:r>
+              <a:rPr sz="1076" b="0" dirty="0" err="1">
+                <a:solidFill>
+                  <a:srgbClr val="FFFFFF"/>
+                </a:solidFill>
+                <a:latin typeface="Noto Sans"/>
+              </a:rPr>
+              <a:t>пользователей</a:t>
+            </a:r>
+            <a:r>
+              <a:rPr sz="1076" b="0" dirty="0">
+                <a:solidFill>
+                  <a:srgbClr val="FFFFFF"/>
+                </a:solidFill>
+                <a:latin typeface="Noto Sans"/>
+              </a:rPr>
+              <a:t>.</a:t>
+            </a:r>
+          </a:p>
+        </p:txBody>
+      </p:sp>
+      <p:sp>
+        <p:nvSpPr>
+          <p:cNvPr id="42" name="Rounded Rectangle 10">
+            <a:extLst>
+              <a:ext uri="{FF2B5EF4-FFF2-40B4-BE49-F238E27FC236}">
+                <a16:creationId xmlns:a16="http://schemas.microsoft.com/office/drawing/2014/main" id="{CB34F6BC-58B1-4398-0264-A636E7422A71}"/>
+              </a:ext>
+            </a:extLst>
+          </p:cNvPr>
+          <p:cNvSpPr/>
+          <p:nvPr/>
+        </p:nvSpPr>
+        <p:spPr>
+          <a:xfrm>
+            <a:off x="6957416" y="5140954"/>
+            <a:ext cx="4152796" cy="761999"/>
+          </a:xfrm>
+          <a:prstGeom prst="roundRect">
+            <a:avLst>
+              <a:gd name="adj" fmla="val 30000"/>
+            </a:avLst>
+          </a:prstGeom>
+          <a:solidFill>
+            <a:srgbClr val="EFF6FF"/>
+          </a:solidFill>
+          <a:ln>
+            <a:noFill/>
+          </a:ln>
+        </p:spPr>
+        <p:style>
+          <a:lnRef idx="1">
+            <a:schemeClr val="accent1"/>
+          </a:lnRef>
+          <a:fillRef idx="3">
+            <a:schemeClr val="accent1"/>
+          </a:fillRef>
+          <a:effectRef idx="2">
+            <a:schemeClr val="accent1"/>
+          </a:effectRef>
+          <a:fontRef idx="minor">
+            <a:schemeClr val="lt1"/>
+          </a:fontRef>
+        </p:style>
+        <p:txBody>
+          <a:bodyPr rtlCol="0" anchor="ctr"/>
+          <a:lstStyle/>
+          <a:p>
+            <a:pPr algn="ctr"/>
+            <a:endParaRPr dirty="0"/>
+          </a:p>
+        </p:txBody>
+      </p:sp>
+      <p:sp>
+        <p:nvSpPr>
+          <p:cNvPr id="43" name="Round Same Side Corner Rectangle 11">
+            <a:extLst>
+              <a:ext uri="{FF2B5EF4-FFF2-40B4-BE49-F238E27FC236}">
+                <a16:creationId xmlns:a16="http://schemas.microsoft.com/office/drawing/2014/main" id="{0E8B7D55-D0EF-3A20-3465-C0DA36F993E3}"/>
+              </a:ext>
+            </a:extLst>
+          </p:cNvPr>
+          <p:cNvSpPr/>
+          <p:nvPr/>
+        </p:nvSpPr>
+        <p:spPr>
+          <a:xfrm rot="16200000">
+            <a:off x="6642457" y="5455913"/>
+            <a:ext cx="761999" cy="132080"/>
+          </a:xfrm>
+          <a:prstGeom prst="round2SameRect">
+            <a:avLst>
+              <a:gd name="adj1" fmla="val 50000"/>
+              <a:gd name="adj2" fmla="val 0"/>
+            </a:avLst>
+          </a:prstGeom>
+          <a:solidFill>
+            <a:srgbClr val="4FC3F7"/>
+          </a:solidFill>
+          <a:ln>
+            <a:noFill/>
+          </a:ln>
+        </p:spPr>
+        <p:style>
+          <a:lnRef idx="1">
+            <a:schemeClr val="accent1"/>
+          </a:lnRef>
+          <a:fillRef idx="3">
+            <a:schemeClr val="accent1"/>
+          </a:fillRef>
+          <a:effectRef idx="2">
+            <a:schemeClr val="accent1"/>
+          </a:effectRef>
+          <a:fontRef idx="minor">
+            <a:schemeClr val="lt1"/>
+          </a:fontRef>
+        </p:style>
+        <p:txBody>
+          <a:bodyPr rtlCol="0" anchor="ctr"/>
+          <a:lstStyle/>
+          <a:p>
+            <a:pPr algn="ctr"/>
+            <a:endParaRPr dirty="0"/>
           </a:p>
         </p:txBody>
       </p:sp>
       <p:pic>
         <p:nvPicPr>
-          <p:cNvPr id="34" name="Picture 33" descr="image.png"/>
+          <p:cNvPr id="44" name="Picture 12" descr="image.png">
+            <a:extLst>
+              <a:ext uri="{FF2B5EF4-FFF2-40B4-BE49-F238E27FC236}">
+                <a16:creationId xmlns:a16="http://schemas.microsoft.com/office/drawing/2014/main" id="{23A87435-6EAC-1810-DE8C-A361145F5002}"/>
+              </a:ext>
+            </a:extLst>
+          </p:cNvPr>
           <p:cNvPicPr>
             <a:picLocks noChangeAspect="1"/>
           </p:cNvPicPr>
@@ -17406,8 +17373,8 @@
         </p:blipFill>
         <p:spPr>
           <a:xfrm>
-            <a:off x="6152996" y="5995034"/>
-            <a:ext cx="228594" cy="125729"/>
+            <a:off x="7224109" y="5401792"/>
+            <a:ext cx="304792" cy="240323"/>
           </a:xfrm>
           <a:prstGeom prst="rect">
             <a:avLst/>
@@ -17416,14 +17383,20 @@
       </p:pic>
       <p:sp>
         <p:nvSpPr>
-          <p:cNvPr id="35" name="TextBox 34"/>
+          <p:cNvPr id="45" name="TextBox 44">
+            <a:extLst>
+              <a:ext uri="{FF2B5EF4-FFF2-40B4-BE49-F238E27FC236}">
+                <a16:creationId xmlns:a16="http://schemas.microsoft.com/office/drawing/2014/main" id="{CEBDF3D3-7634-38F3-7B28-D81F7D42F00E}"/>
+              </a:ext>
+            </a:extLst>
+          </p:cNvPr>
           <p:cNvSpPr txBox="1"/>
           <p:nvPr/>
         </p:nvSpPr>
         <p:spPr>
           <a:xfrm>
-            <a:off x="6495887" y="5900324"/>
-            <a:ext cx="5029074" cy="315151"/>
+            <a:off x="7681298" y="5379079"/>
+            <a:ext cx="2190695" cy="285750"/>
           </a:xfrm>
           <a:prstGeom prst="rect">
             <a:avLst/>
@@ -17431,14 +17404,14 @@
           <a:noFill/>
         </p:spPr>
         <p:txBody>
-          <a:bodyPr wrap="square" lIns="73152" tIns="54864" rIns="73152" bIns="54864" anchor="ctr">
+          <a:bodyPr wrap="none" lIns="73152" tIns="54864" rIns="73152" bIns="54864" anchor="ctr">
             <a:spAutoFit/>
           </a:bodyPr>
           <a:lstStyle/>
           <a:p>
             <a:pPr algn="l">
               <a:lnSpc>
-                <a:spcPts val="1755"/>
+                <a:spcPts val="1950"/>
               </a:lnSpc>
               <a:spcBef>
                 <a:spcPts val="0"/>
@@ -17448,110 +17421,59 @@
               </a:spcAft>
             </a:pPr>
             <a:r>
-              <a:rPr lang="ru-RU" sz="1076" b="0" dirty="0">
-                <a:solidFill>
-                  <a:srgbClr val="374151"/>
-                </a:solidFill>
-                <a:latin typeface="Noto Sans"/>
-              </a:rPr>
-              <a:t>Непрерывное</a:t>
-            </a:r>
-            <a:r>
-              <a:rPr sz="1076" b="0" dirty="0">
-                <a:solidFill>
-                  <a:srgbClr val="374151"/>
+              <a:rPr sz="1196" b="1" dirty="0" err="1">
+                <a:solidFill>
+                  <a:srgbClr val="0D47A1"/>
+                </a:solidFill>
+                <a:latin typeface="Noto Sans"/>
+              </a:rPr>
+              <a:t>Спасибо</a:t>
+            </a:r>
+            <a:r>
+              <a:rPr sz="1196" b="1" dirty="0">
+                <a:solidFill>
+                  <a:srgbClr val="0D47A1"/>
                 </a:solidFill>
                 <a:latin typeface="Noto Sans"/>
               </a:rPr>
               <a:t> </a:t>
             </a:r>
             <a:r>
-              <a:rPr sz="1076" b="0" dirty="0" err="1">
-                <a:solidFill>
-                  <a:srgbClr val="374151"/>
-                </a:solidFill>
-                <a:latin typeface="Noto Sans"/>
-              </a:rPr>
-              <a:t>развитие</a:t>
-            </a:r>
-            <a:r>
-              <a:rPr sz="1076" b="0" dirty="0">
-                <a:solidFill>
-                  <a:srgbClr val="374151"/>
+              <a:rPr sz="1196" b="1" dirty="0" err="1">
+                <a:solidFill>
+                  <a:srgbClr val="0D47A1"/>
+                </a:solidFill>
+                <a:latin typeface="Noto Sans"/>
+              </a:rPr>
+              <a:t>за</a:t>
+            </a:r>
+            <a:r>
+              <a:rPr sz="1196" b="1" dirty="0">
+                <a:solidFill>
+                  <a:srgbClr val="0D47A1"/>
                 </a:solidFill>
                 <a:latin typeface="Noto Sans"/>
               </a:rPr>
               <a:t> </a:t>
             </a:r>
             <a:r>
-              <a:rPr sz="1076" b="0" dirty="0" err="1">
-                <a:solidFill>
-                  <a:srgbClr val="374151"/>
-                </a:solidFill>
-                <a:latin typeface="Noto Sans"/>
-              </a:rPr>
-              <a:t>для</a:t>
-            </a:r>
-            <a:r>
-              <a:rPr sz="1076" b="0" dirty="0">
-                <a:solidFill>
-                  <a:srgbClr val="374151"/>
-                </a:solidFill>
-                <a:latin typeface="Noto Sans"/>
-              </a:rPr>
-              <a:t> </a:t>
-            </a:r>
-            <a:r>
-              <a:rPr sz="1076" b="0" dirty="0" err="1">
-                <a:solidFill>
-                  <a:srgbClr val="374151"/>
-                </a:solidFill>
-                <a:latin typeface="Noto Sans"/>
-              </a:rPr>
-              <a:t>повышения</a:t>
-            </a:r>
-            <a:r>
-              <a:rPr sz="1076" b="0" dirty="0">
-                <a:solidFill>
-                  <a:srgbClr val="374151"/>
-                </a:solidFill>
-                <a:latin typeface="Noto Sans"/>
-              </a:rPr>
-              <a:t> </a:t>
-            </a:r>
-            <a:r>
-              <a:rPr sz="1076" b="0" dirty="0" err="1">
-                <a:solidFill>
-                  <a:srgbClr val="374151"/>
-                </a:solidFill>
-                <a:latin typeface="Noto Sans"/>
-              </a:rPr>
-              <a:t>качества</a:t>
-            </a:r>
-            <a:r>
-              <a:rPr sz="1076" b="0" dirty="0">
-                <a:solidFill>
-                  <a:srgbClr val="374151"/>
-                </a:solidFill>
-                <a:latin typeface="Noto Sans"/>
-              </a:rPr>
-              <a:t> </a:t>
-            </a:r>
-            <a:r>
-              <a:rPr sz="1076" b="0" dirty="0" err="1">
-                <a:solidFill>
-                  <a:srgbClr val="374151"/>
-                </a:solidFill>
-                <a:latin typeface="Noto Sans"/>
-              </a:rPr>
-              <a:t>прогнозов</a:t>
-            </a:r>
-            <a:endParaRPr sz="1076" b="0" dirty="0">
-              <a:solidFill>
-                <a:srgbClr val="374151"/>
-              </a:solidFill>
-              <a:latin typeface="Noto Sans"/>
-            </a:endParaRPr>
+              <a:rPr sz="1196" b="1" dirty="0" err="1">
+                <a:solidFill>
+                  <a:srgbClr val="0D47A1"/>
+                </a:solidFill>
+                <a:latin typeface="Noto Sans"/>
+              </a:rPr>
+              <a:t>внимание</a:t>
+            </a:r>
+            <a:r>
+              <a:rPr sz="1196" b="1" dirty="0">
+                <a:solidFill>
+                  <a:srgbClr val="0D47A1"/>
+                </a:solidFill>
+                <a:latin typeface="Noto Sans"/>
+              </a:rPr>
+              <a:t>!</a:t>
+            </a:r>
           </a:p>
         </p:txBody>
       </p:sp>
